--- a/exports/pptx/lessons/middle-module-15-project-implementation/day-10-share.pptx
+++ b/exports/pptx/lessons/middle-module-15-project-implementation/day-10-share.pptx
@@ -18,9 +18,13 @@
     <p:sldId id="266" r:id="rId12"/>
     <p:sldId id="267" r:id="rId13"/>
     <p:sldId id="268" r:id="rId14"/>
+    <p:sldId id="269" r:id="rId15"/>
+    <p:sldId id="270" r:id="rId16"/>
+    <p:sldId id="271" r:id="rId17"/>
+    <p:sldId id="272" r:id="rId18"/>
   </p:sldIdLst>
   <p:notesMasterIdLst>
-    <p:notesMasterId r:id="rId15"/>
+    <p:notesMasterId r:id="rId19"/>
   </p:notesMasterIdLst>
   <p:sldSz cx="9144000" cy="5143500"/>
   <p:notesSz cx="5143500" cy="9144000"/>
@@ -890,6 +894,358 @@
             <a:fld id="{F7021451-1387-4CA6-816F-3879F97B5CBC}" type="slidenum">
               <a:rPr lang="en-US"/>
               <a:t>13</a:t>
+            </a:fld>
+            <a:endParaRPr lang="en-US"/>
+          </a:p>
+        </p:txBody>
+      </p:sp>
+    </p:spTree>
+    <p:extLst>
+      <p:ext uri="{BB962C8B-B14F-4D97-AF65-F5344CB8AC3E}">
+        <p14:creationId xmlns:p14="http://schemas.microsoft.com/office/powerpoint/2010/main" val="1024086991"/>
+      </p:ext>
+    </p:extLst>
+  </p:cSld>
+  <p:clrMapOvr>
+    <a:masterClrMapping/>
+  </p:clrMapOvr>
+</p:notes>
+</file>
+
+<file path=ppt/notesSlides/notesSlide14.xml><?xml version="1.0" encoding="utf-8"?>
+<p:notes xmlns:a="http://schemas.openxmlformats.org/drawingml/2006/main" xmlns:r="http://schemas.openxmlformats.org/officeDocument/2006/relationships" xmlns:p="http://schemas.openxmlformats.org/presentationml/2006/main">
+  <p:cSld>
+    <p:spTree>
+      <p:nvGrpSpPr>
+        <p:cNvPr id="1" name=""/>
+        <p:cNvGrpSpPr/>
+        <p:nvPr/>
+      </p:nvGrpSpPr>
+      <p:grpSpPr>
+        <a:xfrm>
+          <a:off x="0" y="0"/>
+          <a:ext cx="0" cy="0"/>
+          <a:chOff x="0" y="0"/>
+          <a:chExt cx="0" cy="0"/>
+        </a:xfrm>
+      </p:grpSpPr>
+      <p:sp>
+        <p:nvSpPr>
+          <p:cNvPr id="2" name="Slide Image Placeholder 1"/>
+          <p:cNvSpPr>
+            <a:spLocks noGrp="1" noRot="1" noChangeAspect="1"/>
+          </p:cNvSpPr>
+          <p:nvPr>
+            <p:ph type="sldImg"/>
+          </p:nvPr>
+        </p:nvSpPr>
+        <p:spPr/>
+      </p:sp>
+      <p:sp>
+        <p:nvSpPr>
+          <p:cNvPr id="3" name="Notes Placeholder 2"/>
+          <p:cNvSpPr>
+            <a:spLocks noGrp="1"/>
+          </p:cNvSpPr>
+          <p:nvPr>
+            <p:ph type="body" idx="1"/>
+          </p:nvPr>
+        </p:nvSpPr>
+        <p:spPr/>
+        <p:txBody>
+          <a:bodyPr/>
+          <a:lstStyle/>
+          <a:p>
+            <a:r>
+              <a:rPr lang="en-US" dirty="0"/>
+              <a:t/>
+            </a:r>
+            <a:endParaRPr lang="en-US" dirty="0"/>
+          </a:p>
+        </p:txBody>
+      </p:sp>
+      <p:sp>
+        <p:nvSpPr>
+          <p:cNvPr id="4" name="Slide Number Placeholder 3"/>
+          <p:cNvSpPr>
+            <a:spLocks noGrp="1"/>
+          </p:cNvSpPr>
+          <p:nvPr>
+            <p:ph type="sldNum" sz="quarter" idx="10"/>
+          </p:nvPr>
+        </p:nvSpPr>
+        <p:spPr/>
+        <p:txBody>
+          <a:bodyPr/>
+          <a:lstStyle/>
+          <a:p>
+            <a:fld id="{F7021451-1387-4CA6-816F-3879F97B5CBC}" type="slidenum">
+              <a:rPr lang="en-US"/>
+              <a:t>14</a:t>
+            </a:fld>
+            <a:endParaRPr lang="en-US"/>
+          </a:p>
+        </p:txBody>
+      </p:sp>
+    </p:spTree>
+    <p:extLst>
+      <p:ext uri="{BB962C8B-B14F-4D97-AF65-F5344CB8AC3E}">
+        <p14:creationId xmlns:p14="http://schemas.microsoft.com/office/powerpoint/2010/main" val="1024086991"/>
+      </p:ext>
+    </p:extLst>
+  </p:cSld>
+  <p:clrMapOvr>
+    <a:masterClrMapping/>
+  </p:clrMapOvr>
+</p:notes>
+</file>
+
+<file path=ppt/notesSlides/notesSlide15.xml><?xml version="1.0" encoding="utf-8"?>
+<p:notes xmlns:a="http://schemas.openxmlformats.org/drawingml/2006/main" xmlns:r="http://schemas.openxmlformats.org/officeDocument/2006/relationships" xmlns:p="http://schemas.openxmlformats.org/presentationml/2006/main">
+  <p:cSld>
+    <p:spTree>
+      <p:nvGrpSpPr>
+        <p:cNvPr id="1" name=""/>
+        <p:cNvGrpSpPr/>
+        <p:nvPr/>
+      </p:nvGrpSpPr>
+      <p:grpSpPr>
+        <a:xfrm>
+          <a:off x="0" y="0"/>
+          <a:ext cx="0" cy="0"/>
+          <a:chOff x="0" y="0"/>
+          <a:chExt cx="0" cy="0"/>
+        </a:xfrm>
+      </p:grpSpPr>
+      <p:sp>
+        <p:nvSpPr>
+          <p:cNvPr id="2" name="Slide Image Placeholder 1"/>
+          <p:cNvSpPr>
+            <a:spLocks noGrp="1" noRot="1" noChangeAspect="1"/>
+          </p:cNvSpPr>
+          <p:nvPr>
+            <p:ph type="sldImg"/>
+          </p:nvPr>
+        </p:nvSpPr>
+        <p:spPr/>
+      </p:sp>
+      <p:sp>
+        <p:nvSpPr>
+          <p:cNvPr id="3" name="Notes Placeholder 2"/>
+          <p:cNvSpPr>
+            <a:spLocks noGrp="1"/>
+          </p:cNvSpPr>
+          <p:nvPr>
+            <p:ph type="body" idx="1"/>
+          </p:nvPr>
+        </p:nvSpPr>
+        <p:spPr/>
+        <p:txBody>
+          <a:bodyPr/>
+          <a:lstStyle/>
+          <a:p>
+            <a:r>
+              <a:rPr lang="en-US" dirty="0"/>
+              <a:t/>
+            </a:r>
+            <a:endParaRPr lang="en-US" dirty="0"/>
+          </a:p>
+        </p:txBody>
+      </p:sp>
+      <p:sp>
+        <p:nvSpPr>
+          <p:cNvPr id="4" name="Slide Number Placeholder 3"/>
+          <p:cNvSpPr>
+            <a:spLocks noGrp="1"/>
+          </p:cNvSpPr>
+          <p:nvPr>
+            <p:ph type="sldNum" sz="quarter" idx="10"/>
+          </p:nvPr>
+        </p:nvSpPr>
+        <p:spPr/>
+        <p:txBody>
+          <a:bodyPr/>
+          <a:lstStyle/>
+          <a:p>
+            <a:fld id="{F7021451-1387-4CA6-816F-3879F97B5CBC}" type="slidenum">
+              <a:rPr lang="en-US"/>
+              <a:t>15</a:t>
+            </a:fld>
+            <a:endParaRPr lang="en-US"/>
+          </a:p>
+        </p:txBody>
+      </p:sp>
+    </p:spTree>
+    <p:extLst>
+      <p:ext uri="{BB962C8B-B14F-4D97-AF65-F5344CB8AC3E}">
+        <p14:creationId xmlns:p14="http://schemas.microsoft.com/office/powerpoint/2010/main" val="1024086991"/>
+      </p:ext>
+    </p:extLst>
+  </p:cSld>
+  <p:clrMapOvr>
+    <a:masterClrMapping/>
+  </p:clrMapOvr>
+</p:notes>
+</file>
+
+<file path=ppt/notesSlides/notesSlide16.xml><?xml version="1.0" encoding="utf-8"?>
+<p:notes xmlns:a="http://schemas.openxmlformats.org/drawingml/2006/main" xmlns:r="http://schemas.openxmlformats.org/officeDocument/2006/relationships" xmlns:p="http://schemas.openxmlformats.org/presentationml/2006/main">
+  <p:cSld>
+    <p:spTree>
+      <p:nvGrpSpPr>
+        <p:cNvPr id="1" name=""/>
+        <p:cNvGrpSpPr/>
+        <p:nvPr/>
+      </p:nvGrpSpPr>
+      <p:grpSpPr>
+        <a:xfrm>
+          <a:off x="0" y="0"/>
+          <a:ext cx="0" cy="0"/>
+          <a:chOff x="0" y="0"/>
+          <a:chExt cx="0" cy="0"/>
+        </a:xfrm>
+      </p:grpSpPr>
+      <p:sp>
+        <p:nvSpPr>
+          <p:cNvPr id="2" name="Slide Image Placeholder 1"/>
+          <p:cNvSpPr>
+            <a:spLocks noGrp="1" noRot="1" noChangeAspect="1"/>
+          </p:cNvSpPr>
+          <p:nvPr>
+            <p:ph type="sldImg"/>
+          </p:nvPr>
+        </p:nvSpPr>
+        <p:spPr/>
+      </p:sp>
+      <p:sp>
+        <p:nvSpPr>
+          <p:cNvPr id="3" name="Notes Placeholder 2"/>
+          <p:cNvSpPr>
+            <a:spLocks noGrp="1"/>
+          </p:cNvSpPr>
+          <p:nvPr>
+            <p:ph type="body" idx="1"/>
+          </p:nvPr>
+        </p:nvSpPr>
+        <p:spPr/>
+        <p:txBody>
+          <a:bodyPr/>
+          <a:lstStyle/>
+          <a:p>
+            <a:r>
+              <a:rPr lang="en-US" dirty="0"/>
+              <a:t/>
+            </a:r>
+            <a:endParaRPr lang="en-US" dirty="0"/>
+          </a:p>
+        </p:txBody>
+      </p:sp>
+      <p:sp>
+        <p:nvSpPr>
+          <p:cNvPr id="4" name="Slide Number Placeholder 3"/>
+          <p:cNvSpPr>
+            <a:spLocks noGrp="1"/>
+          </p:cNvSpPr>
+          <p:nvPr>
+            <p:ph type="sldNum" sz="quarter" idx="10"/>
+          </p:nvPr>
+        </p:nvSpPr>
+        <p:spPr/>
+        <p:txBody>
+          <a:bodyPr/>
+          <a:lstStyle/>
+          <a:p>
+            <a:fld id="{F7021451-1387-4CA6-816F-3879F97B5CBC}" type="slidenum">
+              <a:rPr lang="en-US"/>
+              <a:t>16</a:t>
+            </a:fld>
+            <a:endParaRPr lang="en-US"/>
+          </a:p>
+        </p:txBody>
+      </p:sp>
+    </p:spTree>
+    <p:extLst>
+      <p:ext uri="{BB962C8B-B14F-4D97-AF65-F5344CB8AC3E}">
+        <p14:creationId xmlns:p14="http://schemas.microsoft.com/office/powerpoint/2010/main" val="1024086991"/>
+      </p:ext>
+    </p:extLst>
+  </p:cSld>
+  <p:clrMapOvr>
+    <a:masterClrMapping/>
+  </p:clrMapOvr>
+</p:notes>
+</file>
+
+<file path=ppt/notesSlides/notesSlide17.xml><?xml version="1.0" encoding="utf-8"?>
+<p:notes xmlns:a="http://schemas.openxmlformats.org/drawingml/2006/main" xmlns:r="http://schemas.openxmlformats.org/officeDocument/2006/relationships" xmlns:p="http://schemas.openxmlformats.org/presentationml/2006/main">
+  <p:cSld>
+    <p:spTree>
+      <p:nvGrpSpPr>
+        <p:cNvPr id="1" name=""/>
+        <p:cNvGrpSpPr/>
+        <p:nvPr/>
+      </p:nvGrpSpPr>
+      <p:grpSpPr>
+        <a:xfrm>
+          <a:off x="0" y="0"/>
+          <a:ext cx="0" cy="0"/>
+          <a:chOff x="0" y="0"/>
+          <a:chExt cx="0" cy="0"/>
+        </a:xfrm>
+      </p:grpSpPr>
+      <p:sp>
+        <p:nvSpPr>
+          <p:cNvPr id="2" name="Slide Image Placeholder 1"/>
+          <p:cNvSpPr>
+            <a:spLocks noGrp="1" noRot="1" noChangeAspect="1"/>
+          </p:cNvSpPr>
+          <p:nvPr>
+            <p:ph type="sldImg"/>
+          </p:nvPr>
+        </p:nvSpPr>
+        <p:spPr/>
+      </p:sp>
+      <p:sp>
+        <p:nvSpPr>
+          <p:cNvPr id="3" name="Notes Placeholder 2"/>
+          <p:cNvSpPr>
+            <a:spLocks noGrp="1"/>
+          </p:cNvSpPr>
+          <p:nvPr>
+            <p:ph type="body" idx="1"/>
+          </p:nvPr>
+        </p:nvSpPr>
+        <p:spPr/>
+        <p:txBody>
+          <a:bodyPr/>
+          <a:lstStyle/>
+          <a:p>
+            <a:r>
+              <a:rPr lang="en-US" dirty="0"/>
+              <a:t/>
+            </a:r>
+            <a:endParaRPr lang="en-US" dirty="0"/>
+          </a:p>
+        </p:txBody>
+      </p:sp>
+      <p:sp>
+        <p:nvSpPr>
+          <p:cNvPr id="4" name="Slide Number Placeholder 3"/>
+          <p:cNvSpPr>
+            <a:spLocks noGrp="1"/>
+          </p:cNvSpPr>
+          <p:nvPr>
+            <p:ph type="sldNum" sz="quarter" idx="10"/>
+          </p:nvPr>
+        </p:nvSpPr>
+        <p:spPr/>
+        <p:txBody>
+          <a:bodyPr/>
+          <a:lstStyle/>
+          <a:p>
+            <a:fld id="{F7021451-1387-4CA6-816F-3879F97B5CBC}" type="slidenum">
+              <a:rPr lang="en-US"/>
+              <a:t>17</a:t>
             </a:fld>
             <a:endParaRPr lang="en-US"/>
           </a:p>
@@ -2189,102 +2545,6 @@
         </p:nvSpPr>
         <p:spPr>
           <a:xfrm>
-            <a:off x="406301" y="1223963"/>
-            <a:ext cx="8498026" cy="274290"/>
-          </a:xfrm>
-          <a:prstGeom prst="rect">
-            <a:avLst/>
-          </a:prstGeom>
-          <a:noFill/>
-          <a:ln/>
-        </p:spPr>
-        <p:txBody>
-          <a:bodyPr wrap="square" lIns="0" tIns="0" rIns="0" bIns="0" rtlCol="0" anchor="t"/>
-          <a:lstStyle/>
-          <a:p>
-            <a:pPr algn="l" indent="0" marL="0">
-              <a:lnSpc>
-                <a:spcPts val="2160"/>
-              </a:lnSpc>
-              <a:spcBef>
-                <a:spcPts val="600"/>
-              </a:spcBef>
-              <a:spcAft>
-                <a:spcPts val="800"/>
-              </a:spcAft>
-              <a:buNone/>
-            </a:pPr>
-            <a:r>
-              <a:rPr lang="en-US" sz="1800" b="1" dirty="0">
-                <a:solidFill>
-                  <a:srgbClr val="FE4447"/>
-                </a:solidFill>
-                <a:latin typeface="Georgia" pitchFamily="34" charset="0"/>
-                <a:ea typeface="Georgia" pitchFamily="34" charset="-122"/>
-                <a:cs typeface="Georgia" pitchFamily="34" charset="-120"/>
-              </a:rPr>
-              <a:t>Learning objective</a:t>
-            </a:r>
-            <a:endParaRPr lang="en-US" sz="1800" dirty="0"/>
-          </a:p>
-        </p:txBody>
-      </p:sp>
-      <p:sp>
-        <p:nvSpPr>
-          <p:cNvPr id="6" name="Text 4"/>
-          <p:cNvSpPr/>
-          <p:nvPr/>
-        </p:nvSpPr>
-        <p:spPr>
-          <a:xfrm>
-            <a:off x="406301" y="1637854"/>
-            <a:ext cx="8498026" cy="426541"/>
-          </a:xfrm>
-          <a:prstGeom prst="rect">
-            <a:avLst/>
-          </a:prstGeom>
-          <a:noFill/>
-          <a:ln/>
-        </p:spPr>
-        <p:txBody>
-          <a:bodyPr wrap="square" lIns="0" tIns="0" rIns="0" bIns="0" rtlCol="0" anchor="t"/>
-          <a:lstStyle/>
-          <a:p>
-            <a:pPr algn="l" indent="0" marL="0">
-              <a:lnSpc>
-                <a:spcPts val="1680"/>
-              </a:lnSpc>
-              <a:spcBef>
-                <a:spcPts val="300"/>
-              </a:spcBef>
-              <a:spcAft>
-                <a:spcPts val="300"/>
-              </a:spcAft>
-              <a:buNone/>
-            </a:pPr>
-            <a:r>
-              <a:rPr lang="en-US" sz="1200" dirty="0">
-                <a:solidFill>
-                  <a:srgbClr val="1C2833"/>
-                </a:solidFill>
-                <a:latin typeface="Arial" pitchFamily="34" charset="0"/>
-                <a:ea typeface="Arial" pitchFamily="34" charset="-122"/>
-                <a:cs typeface="Arial" pitchFamily="34" charset="-120"/>
-              </a:rPr>
-              <a:t>Students deliver a 4-minute share + 1-minute Q&amp;A to a small audience of peers and invited parents/staff, submit their final artefact and documentation, and complete the summative quiz and self+peer reflection.</a:t>
-            </a:r>
-            <a:endParaRPr lang="en-US" sz="1200" dirty="0"/>
-          </a:p>
-        </p:txBody>
-      </p:sp>
-      <p:sp>
-        <p:nvSpPr>
-          <p:cNvPr id="7" name="Text 5"/>
-          <p:cNvSpPr/>
-          <p:nvPr/>
-        </p:nvSpPr>
-        <p:spPr>
-          <a:xfrm>
             <a:off x="406301" y="4434929"/>
             <a:ext cx="8498026" cy="213271"/>
           </a:xfrm>
@@ -2429,7 +2689,7 @@
                 <a:ea typeface="Georgia" pitchFamily="34" charset="-122"/>
                 <a:cs typeface="Georgia" pitchFamily="34" charset="-120"/>
               </a:rPr>
-              <a:t>Homework</a:t>
+              <a:t>Reflection + close (5 min)</a:t>
             </a:r>
             <a:endParaRPr lang="en-US" sz="1800" dirty="0"/>
           </a:p>
@@ -2444,7 +2704,7 @@
         <p:spPr>
           <a:xfrm>
             <a:off x="634901" y="883593"/>
-            <a:ext cx="8102798" cy="281880"/>
+            <a:ext cx="8102798" cy="975122"/>
           </a:xfrm>
           <a:prstGeom prst="rect">
             <a:avLst/>
@@ -2467,6 +2727,26 @@
               <a:buChar char="•"/>
             </a:pPr>
             <a:r>
+              <a:rPr lang="en-US" sz="1200" dirty="0">
+                <a:solidFill>
+                  <a:srgbClr val="1C2833"/>
+                </a:solidFill>
+                <a:latin typeface="Arial" pitchFamily="34" charset="0"/>
+                <a:ea typeface="Arial" pitchFamily="34" charset="-122"/>
+                <a:cs typeface="Arial" pitchFamily="34" charset="-120"/>
+              </a:rPr>
+              <a:t>Hand out the </a:t>
+            </a:r>
+            <a:pPr algn="l" indent="0" marL="0">
+              <a:lnSpc>
+                <a:spcPts val="1620"/>
+              </a:lnSpc>
+              <a:spcAft>
+                <a:spcPts val="300"/>
+              </a:spcAft>
+              <a:buNone/>
+            </a:pPr>
+            <a:r>
               <a:rPr lang="en-US" sz="1200" b="1" dirty="0">
                 <a:solidFill>
                   <a:srgbClr val="1C2833"/>
@@ -2475,7 +2755,7 @@
                 <a:ea typeface="Arial" pitchFamily="34" charset="-122"/>
                 <a:cs typeface="Arial" pitchFamily="34" charset="-120"/>
               </a:rPr>
-              <a:t>No homework after today.</a:t>
+              <a:t>peer + self-reflection slip</a:t>
             </a:r>
             <a:pPr algn="l" indent="0" marL="0">
               <a:lnSpc>
@@ -2495,109 +2775,83 @@
                 <a:ea typeface="Arial" pitchFamily="34" charset="-122"/>
                 <a:cs typeface="Arial" pitchFamily="34" charset="-120"/>
               </a:rPr>
-              <a:t> Module is complete.</a:t>
+              <a:t>. 4 minutes silent writing.</a:t>
             </a:r>
             <a:endParaRPr lang="en-US" sz="1200" dirty="0"/>
           </a:p>
+          <a:p>
+            <a:pPr algn="l" marL="342900" indent="-342900">
+              <a:lnSpc>
+                <a:spcPts val="1620"/>
+              </a:lnSpc>
+              <a:spcAft>
+                <a:spcPts val="300"/>
+              </a:spcAft>
+              <a:buSzPct val="100000"/>
+              <a:buChar char="•"/>
+            </a:pPr>
+            <a:r>
+              <a:rPr lang="en-US" sz="1200" dirty="0">
+                <a:solidFill>
+                  <a:srgbClr val="1C2833"/>
+                </a:solidFill>
+                <a:latin typeface="Arial" pitchFamily="34" charset="0"/>
+                <a:ea typeface="Arial" pitchFamily="34" charset="-122"/>
+                <a:cs typeface="Arial" pitchFamily="34" charset="-120"/>
+              </a:rPr>
+              <a:t>Final journal entry: "If I started Module 15 again, the one thing I would do differently is ___ ."</a:t>
+            </a:r>
+            <a:endParaRPr lang="en-US" sz="1200" dirty="0"/>
+          </a:p>
+          <a:p>
+            <a:pPr algn="l" marL="342900" indent="-342900">
+              <a:lnSpc>
+                <a:spcPts val="1620"/>
+              </a:lnSpc>
+              <a:spcAft>
+                <a:spcPts val="300"/>
+              </a:spcAft>
+              <a:buSzPct val="100000"/>
+              <a:buChar char="•"/>
+            </a:pPr>
+            <a:r>
+              <a:rPr lang="en-US" sz="1200" dirty="0">
+                <a:solidFill>
+                  <a:srgbClr val="1C2833"/>
+                </a:solidFill>
+                <a:latin typeface="Arial" pitchFamily="34" charset="0"/>
+                <a:ea typeface="Arial" pitchFamily="34" charset="-122"/>
+                <a:cs typeface="Arial" pitchFamily="34" charset="-120"/>
+              </a:rPr>
+              <a:t>Closing: </a:t>
+            </a:r>
+            <a:pPr algn="l" indent="0" marL="0">
+              <a:lnSpc>
+                <a:spcPts val="1620"/>
+              </a:lnSpc>
+              <a:spcAft>
+                <a:spcPts val="300"/>
+              </a:spcAft>
+              <a:buNone/>
+            </a:pPr>
+            <a:r>
+              <a:rPr lang="en-US" sz="1200" i="1" dirty="0">
+                <a:solidFill>
+                  <a:srgbClr val="1C2833"/>
+                </a:solidFill>
+                <a:latin typeface="Arial" pitchFamily="34" charset="0"/>
+                <a:ea typeface="Arial" pitchFamily="34" charset="-122"/>
+                <a:cs typeface="Arial" pitchFamily="34" charset="-120"/>
+              </a:rPr>
+              <a:t>"What you did over the past two weeks is the real thing — small, finished work delivered to a real audience. That's the practice we want you to carry into Module 16 and beyond. Well done."</a:t>
+            </a:r>
+            <a:endParaRPr lang="en-US" sz="1200" dirty="0"/>
+          </a:p>
         </p:txBody>
       </p:sp>
       <p:sp>
         <p:nvSpPr>
           <p:cNvPr id="5" name="Text 3"/>
-          <p:cNvSpPr/>
-          <p:nvPr/>
-        </p:nvSpPr>
-        <p:spPr>
-          <a:xfrm>
-            <a:off x="406301" y="1254323"/>
-            <a:ext cx="8498026" cy="436066"/>
-          </a:xfrm>
-          <a:prstGeom prst="rect">
-            <a:avLst/>
-          </a:prstGeom>
-          <a:noFill/>
-          <a:ln/>
-        </p:spPr>
-        <p:txBody>
-          <a:bodyPr wrap="square" lIns="0" tIns="0" rIns="0" bIns="0" rtlCol="0" anchor="t"/>
-          <a:lstStyle/>
-          <a:p>
-            <a:pPr algn="l" indent="0" marL="0">
-              <a:lnSpc>
-                <a:spcPts val="1680"/>
-              </a:lnSpc>
-              <a:spcBef>
-                <a:spcPts val="300"/>
-              </a:spcBef>
-              <a:spcAft>
-                <a:spcPts val="300"/>
-              </a:spcAft>
-              <a:buNone/>
-            </a:pPr>
-            <a:r>
-              <a:rPr lang="en-US" sz="1200" dirty="0">
-                <a:solidFill>
-                  <a:srgbClr val="1C2833"/>
-                </a:solidFill>
-                <a:latin typeface="Arial" pitchFamily="34" charset="0"/>
-                <a:ea typeface="Arial" pitchFamily="34" charset="-122"/>
-                <a:cs typeface="Arial" pitchFamily="34" charset="-120"/>
-              </a:rPr>
-              <a:t>– If your next module begins immediately, look at that module's </a:t>
-            </a:r>
-            <a:pPr algn="l" indent="0" marL="0">
-              <a:lnSpc>
-                <a:spcPts val="1680"/>
-              </a:lnSpc>
-              <a:spcBef>
-                <a:spcPts val="300"/>
-              </a:spcBef>
-              <a:spcAft>
-                <a:spcPts val="300"/>
-              </a:spcAft>
-              <a:buNone/>
-            </a:pPr>
-            <a:r>
-              <a:rPr lang="en-US" sz="1200" dirty="0">
-                <a:solidFill>
-                  <a:srgbClr val="1C2833"/>
-                </a:solidFill>
-                <a:latin typeface="Arial" pitchFamily="34" charset="0"/>
-                <a:ea typeface="Arial" pitchFamily="34" charset="-122"/>
-                <a:cs typeface="Arial" pitchFamily="34" charset="-120"/>
-              </a:rPr>
-              <a:t>README.md</a:t>
-            </a:r>
-            <a:pPr algn="l" indent="0" marL="0">
-              <a:lnSpc>
-                <a:spcPts val="1680"/>
-              </a:lnSpc>
-              <a:spcBef>
-                <a:spcPts val="300"/>
-              </a:spcBef>
-              <a:spcAft>
-                <a:spcPts val="300"/>
-              </a:spcAft>
-              <a:buNone/>
-            </a:pPr>
-            <a:r>
-              <a:rPr lang="en-US" sz="1200" dirty="0">
-                <a:solidFill>
-                  <a:srgbClr val="1C2833"/>
-                </a:solidFill>
-                <a:latin typeface="Arial" pitchFamily="34" charset="0"/>
-                <a:ea typeface="Arial" pitchFamily="34" charset="-122"/>
-                <a:cs typeface="Arial" pitchFamily="34" charset="-120"/>
-              </a:rPr>
-              <a:t> for the prerequisite reading. Otherwise, rest. – Keep your artefact at school for one week — the teacher will return it after marking and may share photos with families.</a:t>
-            </a:r>
-            <a:endParaRPr lang="en-US" sz="1200" dirty="0"/>
-          </a:p>
-        </p:txBody>
-      </p:sp>
-      <p:sp>
-        <p:nvSpPr>
-          <p:cNvPr id="6" name="Text 4"/>
           <p:cNvSpPr/>
           <p:nvPr/>
         </p:nvSpPr>
@@ -2747,7 +3001,7 @@
                 <a:ea typeface="Georgia" pitchFamily="34" charset="-122"/>
                 <a:cs typeface="Georgia" pitchFamily="34" charset="-120"/>
               </a:rPr>
-              <a:t>Differentiation</a:t>
+              <a:t>Student-facing content</a:t>
             </a:r>
             <a:endParaRPr lang="en-US" sz="1800" dirty="0"/>
           </a:p>
@@ -2761,111 +3015,484 @@
         </p:nvSpPr>
         <p:spPr>
           <a:xfrm>
-            <a:off x="634901" y="883593"/>
-            <a:ext cx="8102798" cy="937022"/>
-          </a:xfrm>
-          <a:prstGeom prst="rect">
+            <a:off x="406301" y="883593"/>
+            <a:ext cx="8331398" cy="3188494"/>
+          </a:xfrm>
+          <a:prstGeom prst="rect">
+            <a:avLst/>
+          </a:prstGeom>
+          <a:solidFill>
+            <a:srgbClr val="F4F8F9"/>
+          </a:solidFill>
+          <a:ln/>
+        </p:spPr>
+        <p:txBody>
+          <a:bodyPr wrap="square" rtlCol="0" anchor="ctr"/>
+          <a:lstStyle/>
+          <a:p>
+            <a:pPr indent="0" marL="0">
+              <a:buNone/>
+            </a:pPr>
+            <a:endParaRPr lang="en-US" dirty="0"/>
+          </a:p>
+        </p:txBody>
+      </p:sp>
+      <p:sp>
+        <p:nvSpPr>
+          <p:cNvPr id="5" name="Shape 3"/>
+          <p:cNvSpPr/>
+          <p:nvPr/>
+        </p:nvSpPr>
+        <p:spPr>
+          <a:xfrm>
+            <a:off x="434876" y="883593"/>
+            <a:ext cx="0" cy="3188494"/>
+          </a:xfrm>
+          <a:prstGeom prst="line">
             <a:avLst/>
           </a:prstGeom>
           <a:noFill/>
+          <a:ln w="57150">
+            <a:solidFill>
+              <a:srgbClr val="FE4447"/>
+            </a:solidFill>
+            <a:prstDash val="solid"/>
+          </a:ln>
+        </p:spPr>
+      </p:sp>
+      <p:sp>
+        <p:nvSpPr>
+          <p:cNvPr id="6" name="Text 4"/>
+          <p:cNvSpPr/>
+          <p:nvPr/>
+        </p:nvSpPr>
+        <p:spPr>
+          <a:xfrm>
+            <a:off x="692051" y="1074093"/>
+            <a:ext cx="7973389" cy="230981"/>
+          </a:xfrm>
+          <a:prstGeom prst="rect">
+            <a:avLst/>
+          </a:prstGeom>
+          <a:noFill/>
           <a:ln/>
         </p:spPr>
         <p:txBody>
           <a:bodyPr wrap="square" lIns="0" tIns="0" rIns="0" bIns="0" rtlCol="0" anchor="t"/>
           <a:lstStyle/>
           <a:p>
-            <a:pPr algn="l" marL="342900" indent="-342900">
-              <a:lnSpc>
-                <a:spcPts val="1620"/>
-              </a:lnSpc>
-              <a:spcAft>
-                <a:spcPts val="300"/>
-              </a:spcAft>
-              <a:buSzPct val="100000"/>
-              <a:buChar char="•"/>
-            </a:pPr>
-            <a:r>
-              <a:rPr lang="en-US" sz="1200" b="1" dirty="0">
-                <a:solidFill>
-                  <a:srgbClr val="1C2833"/>
-                </a:solidFill>
-                <a:latin typeface="Arial" pitchFamily="34" charset="0"/>
-                <a:ea typeface="Arial" pitchFamily="34" charset="-122"/>
-                <a:cs typeface="Arial" pitchFamily="34" charset="-120"/>
-              </a:rPr>
-              <a:t>One tier up:</a:t>
-            </a:r>
-            <a:pPr algn="l" indent="0" marL="0">
-              <a:lnSpc>
-                <a:spcPts val="1620"/>
-              </a:lnSpc>
-              <a:spcAft>
-                <a:spcPts val="300"/>
-              </a:spcAft>
-              <a:buNone/>
-            </a:pPr>
-            <a:r>
-              <a:rPr lang="en-US" sz="1200" dirty="0">
-                <a:solidFill>
-                  <a:srgbClr val="1C2833"/>
-                </a:solidFill>
-                <a:latin typeface="Arial" pitchFamily="34" charset="0"/>
-                <a:ea typeface="Arial" pitchFamily="34" charset="-122"/>
-                <a:cs typeface="Arial" pitchFamily="34" charset="-120"/>
-              </a:rPr>
-              <a:t> Volunteer to present early in the running order — by doing so you set a tone of honesty (especially in the reflection) that helps the room. Bonus marks: nil. Bonus learning: real.</a:t>
-            </a:r>
-            <a:endParaRPr lang="en-US" sz="1200" dirty="0"/>
-          </a:p>
-          <a:p>
-            <a:pPr algn="l" marL="342900" indent="-342900">
-              <a:lnSpc>
-                <a:spcPts val="1620"/>
-              </a:lnSpc>
-              <a:spcAft>
-                <a:spcPts val="300"/>
-              </a:spcAft>
-              <a:buSzPct val="100000"/>
-              <a:buChar char="•"/>
-            </a:pPr>
-            <a:r>
-              <a:rPr lang="en-US" sz="1200" b="1" dirty="0">
-                <a:solidFill>
-                  <a:srgbClr val="1C2833"/>
-                </a:solidFill>
-                <a:latin typeface="Arial" pitchFamily="34" charset="0"/>
-                <a:ea typeface="Arial" pitchFamily="34" charset="-122"/>
-                <a:cs typeface="Arial" pitchFamily="34" charset="-120"/>
-              </a:rPr>
-              <a:t>One tier down:</a:t>
-            </a:r>
-            <a:pPr algn="l" indent="0" marL="0">
-              <a:lnSpc>
-                <a:spcPts val="1620"/>
-              </a:lnSpc>
-              <a:spcAft>
-                <a:spcPts val="300"/>
-              </a:spcAft>
-              <a:buNone/>
-            </a:pPr>
-            <a:r>
-              <a:rPr lang="en-US" sz="1200" dirty="0">
-                <a:solidFill>
-                  <a:srgbClr val="1C2833"/>
-                </a:solidFill>
-                <a:latin typeface="Arial" pitchFamily="34" charset="0"/>
-                <a:ea typeface="Arial" pitchFamily="34" charset="-122"/>
-                <a:cs typeface="Arial" pitchFamily="34" charset="-120"/>
-              </a:rPr>
-              <a:t> Recorded video presentation accepted (sent by Day 10 morning). Same rubric, same Q&amp;A in writing (one peer asks one written question, you reply with two sentences).</a:t>
-            </a:r>
-            <a:endParaRPr lang="en-US" sz="1200" dirty="0"/>
-          </a:p>
-        </p:txBody>
-      </p:sp>
-      <p:sp>
-        <p:nvSpPr>
-          <p:cNvPr id="5" name="Text 3"/>
+            <a:pPr algn="l" indent="0" marL="0">
+              <a:lnSpc>
+                <a:spcPts val="1820"/>
+              </a:lnSpc>
+              <a:spcBef>
+                <a:spcPts val="300"/>
+              </a:spcBef>
+              <a:spcAft>
+                <a:spcPts val="300"/>
+              </a:spcAft>
+              <a:buNone/>
+            </a:pPr>
+            <a:r>
+              <a:rPr lang="en-US" sz="1300" b="1" i="1" dirty="0">
+                <a:solidFill>
+                  <a:srgbClr val="1C2833"/>
+                </a:solidFill>
+                <a:latin typeface="Georgia" pitchFamily="34" charset="0"/>
+                <a:ea typeface="Georgia" pitchFamily="34" charset="-122"/>
+                <a:cs typeface="Georgia" pitchFamily="34" charset="-120"/>
+              </a:rPr>
+              <a:t>Today is the share.</a:t>
+            </a:r>
+            <a:endParaRPr lang="en-US" sz="1300" dirty="0"/>
+          </a:p>
+        </p:txBody>
+      </p:sp>
+      <p:sp>
+        <p:nvSpPr>
+          <p:cNvPr id="7" name="Text 5"/>
+          <p:cNvSpPr/>
+          <p:nvPr/>
+        </p:nvSpPr>
+        <p:spPr>
+          <a:xfrm>
+            <a:off x="692051" y="1343174"/>
+            <a:ext cx="7973389" cy="230981"/>
+          </a:xfrm>
+          <a:prstGeom prst="rect">
+            <a:avLst/>
+          </a:prstGeom>
+          <a:noFill/>
+          <a:ln/>
+        </p:spPr>
+        <p:txBody>
+          <a:bodyPr wrap="square" lIns="0" tIns="0" rIns="0" bIns="0" rtlCol="0" anchor="t"/>
+          <a:lstStyle/>
+          <a:p>
+            <a:pPr algn="l" indent="0" marL="0">
+              <a:lnSpc>
+                <a:spcPts val="1820"/>
+              </a:lnSpc>
+              <a:spcBef>
+                <a:spcPts val="300"/>
+              </a:spcBef>
+              <a:spcAft>
+                <a:spcPts val="300"/>
+              </a:spcAft>
+              <a:buNone/>
+            </a:pPr>
+            <a:r>
+              <a:rPr lang="en-US" sz="1300" i="1" dirty="0">
+                <a:solidFill>
+                  <a:srgbClr val="1C2833"/>
+                </a:solidFill>
+                <a:latin typeface="Georgia" pitchFamily="34" charset="0"/>
+                <a:ea typeface="Georgia" pitchFamily="34" charset="-122"/>
+                <a:cs typeface="Georgia" pitchFamily="34" charset="-120"/>
+              </a:rPr>
+              <a:t>The schedule:</a:t>
+            </a:r>
+            <a:endParaRPr lang="en-US" sz="1300" dirty="0"/>
+          </a:p>
+        </p:txBody>
+      </p:sp>
+      <p:sp>
+        <p:nvSpPr>
+          <p:cNvPr id="8" name="Text 6"/>
+          <p:cNvSpPr/>
+          <p:nvPr/>
+        </p:nvSpPr>
+        <p:spPr>
+          <a:xfrm>
+            <a:off x="692051" y="1612255"/>
+            <a:ext cx="7973389" cy="692944"/>
+          </a:xfrm>
+          <a:prstGeom prst="rect">
+            <a:avLst/>
+          </a:prstGeom>
+          <a:noFill/>
+          <a:ln/>
+        </p:spPr>
+        <p:txBody>
+          <a:bodyPr wrap="square" lIns="0" tIns="0" rIns="0" bIns="0" rtlCol="0" anchor="t"/>
+          <a:lstStyle/>
+          <a:p>
+            <a:pPr algn="l" indent="0" marL="0">
+              <a:lnSpc>
+                <a:spcPts val="1820"/>
+              </a:lnSpc>
+              <a:spcBef>
+                <a:spcPts val="300"/>
+              </a:spcBef>
+              <a:spcAft>
+                <a:spcPts val="300"/>
+              </a:spcAft>
+              <a:buNone/>
+            </a:pPr>
+            <a:r>
+              <a:rPr lang="en-US" sz="1300" i="1" dirty="0">
+                <a:solidFill>
+                  <a:srgbClr val="1C2833"/>
+                </a:solidFill>
+                <a:latin typeface="Georgia" pitchFamily="34" charset="0"/>
+                <a:ea typeface="Georgia" pitchFamily="34" charset="-122"/>
+                <a:cs typeface="Georgia" pitchFamily="34" charset="-120"/>
+              </a:rPr>
+              <a:t>| Block | What happens | |-------|---------------| | Welcome (5 min) | Brief from teacher; audience seated | | Shares (35 min) | Each student: 4 min share + 1 min Q&amp;A | | Summative quiz (15 min) | Short, closed-book, process-focused | | Reflection + close (5 min) | Self + peer reflection slip, final journal |</a:t>
+            </a:r>
+            <a:endParaRPr lang="en-US" sz="1300" dirty="0"/>
+          </a:p>
+        </p:txBody>
+      </p:sp>
+      <p:sp>
+        <p:nvSpPr>
+          <p:cNvPr id="9" name="Text 7"/>
+          <p:cNvSpPr/>
+          <p:nvPr/>
+        </p:nvSpPr>
+        <p:spPr>
+          <a:xfrm>
+            <a:off x="692051" y="2343299"/>
+            <a:ext cx="7973389" cy="461963"/>
+          </a:xfrm>
+          <a:prstGeom prst="rect">
+            <a:avLst/>
+          </a:prstGeom>
+          <a:noFill/>
+          <a:ln/>
+        </p:spPr>
+        <p:txBody>
+          <a:bodyPr wrap="square" lIns="0" tIns="0" rIns="0" bIns="0" rtlCol="0" anchor="t"/>
+          <a:lstStyle/>
+          <a:p>
+            <a:pPr algn="l" indent="0" marL="0">
+              <a:lnSpc>
+                <a:spcPts val="1820"/>
+              </a:lnSpc>
+              <a:spcBef>
+                <a:spcPts val="300"/>
+              </a:spcBef>
+              <a:spcAft>
+                <a:spcPts val="300"/>
+              </a:spcAft>
+              <a:buNone/>
+            </a:pPr>
+            <a:r>
+              <a:rPr lang="en-US" sz="1300" b="1" i="1" dirty="0">
+                <a:solidFill>
+                  <a:srgbClr val="1C2833"/>
+                </a:solidFill>
+                <a:latin typeface="Georgia" pitchFamily="34" charset="0"/>
+                <a:ea typeface="Georgia" pitchFamily="34" charset="-122"/>
+                <a:cs typeface="Georgia" pitchFamily="34" charset="-120"/>
+              </a:rPr>
+              <a:t>The audience includes peers and a few invited parents and staff.</a:t>
+            </a:r>
+            <a:pPr algn="l" indent="0" marL="0">
+              <a:lnSpc>
+                <a:spcPts val="1820"/>
+              </a:lnSpc>
+              <a:spcBef>
+                <a:spcPts val="300"/>
+              </a:spcBef>
+              <a:spcAft>
+                <a:spcPts val="300"/>
+              </a:spcAft>
+              <a:buNone/>
+            </a:pPr>
+            <a:r>
+              <a:rPr lang="en-US" sz="1300" dirty="0">
+                <a:solidFill>
+                  <a:srgbClr val="1C2833"/>
+                </a:solidFill>
+                <a:latin typeface="Georgia" pitchFamily="34" charset="0"/>
+                <a:ea typeface="Georgia" pitchFamily="34" charset="-122"/>
+                <a:cs typeface="Georgia" pitchFamily="34" charset="-120"/>
+              </a:rPr>
+              <a:t> Speak to all of them, not just your teacher.</a:t>
+            </a:r>
+            <a:endParaRPr lang="en-US" sz="1300" dirty="0"/>
+          </a:p>
+        </p:txBody>
+      </p:sp>
+      <p:sp>
+        <p:nvSpPr>
+          <p:cNvPr id="10" name="Text 8"/>
+          <p:cNvSpPr/>
+          <p:nvPr/>
+        </p:nvSpPr>
+        <p:spPr>
+          <a:xfrm>
+            <a:off x="692051" y="2843361"/>
+            <a:ext cx="7973389" cy="230981"/>
+          </a:xfrm>
+          <a:prstGeom prst="rect">
+            <a:avLst/>
+          </a:prstGeom>
+          <a:noFill/>
+          <a:ln/>
+        </p:spPr>
+        <p:txBody>
+          <a:bodyPr wrap="square" lIns="0" tIns="0" rIns="0" bIns="0" rtlCol="0" anchor="t"/>
+          <a:lstStyle/>
+          <a:p>
+            <a:pPr algn="l" indent="0" marL="0">
+              <a:lnSpc>
+                <a:spcPts val="1820"/>
+              </a:lnSpc>
+              <a:spcBef>
+                <a:spcPts val="300"/>
+              </a:spcBef>
+              <a:spcAft>
+                <a:spcPts val="300"/>
+              </a:spcAft>
+              <a:buNone/>
+            </a:pPr>
+            <a:r>
+              <a:rPr lang="en-US" sz="1300" b="1" i="1" dirty="0">
+                <a:solidFill>
+                  <a:srgbClr val="1C2833"/>
+                </a:solidFill>
+                <a:latin typeface="Georgia" pitchFamily="34" charset="0"/>
+                <a:ea typeface="Georgia" pitchFamily="34" charset="-122"/>
+                <a:cs typeface="Georgia" pitchFamily="34" charset="-120"/>
+              </a:rPr>
+              <a:t>Three things to remember:</a:t>
+            </a:r>
+            <a:endParaRPr lang="en-US" sz="1300" dirty="0"/>
+          </a:p>
+        </p:txBody>
+      </p:sp>
+      <p:sp>
+        <p:nvSpPr>
+          <p:cNvPr id="11" name="Text 9"/>
+          <p:cNvSpPr/>
+          <p:nvPr/>
+        </p:nvSpPr>
+        <p:spPr>
+          <a:xfrm>
+            <a:off x="692051" y="3112443"/>
+            <a:ext cx="7973389" cy="230981"/>
+          </a:xfrm>
+          <a:prstGeom prst="rect">
+            <a:avLst/>
+          </a:prstGeom>
+          <a:noFill/>
+          <a:ln/>
+        </p:spPr>
+        <p:txBody>
+          <a:bodyPr wrap="square" lIns="0" tIns="0" rIns="0" bIns="0" rtlCol="0" anchor="t"/>
+          <a:lstStyle/>
+          <a:p>
+            <a:pPr algn="l" indent="0" marL="0">
+              <a:lnSpc>
+                <a:spcPts val="1820"/>
+              </a:lnSpc>
+              <a:spcBef>
+                <a:spcPts val="300"/>
+              </a:spcBef>
+              <a:spcAft>
+                <a:spcPts val="300"/>
+              </a:spcAft>
+              <a:buNone/>
+            </a:pPr>
+            <a:r>
+              <a:rPr lang="en-US" sz="1300" i="1" dirty="0">
+                <a:solidFill>
+                  <a:srgbClr val="1C2833"/>
+                </a:solidFill>
+                <a:latin typeface="Georgia" pitchFamily="34" charset="0"/>
+                <a:ea typeface="Georgia" pitchFamily="34" charset="-122"/>
+                <a:cs typeface="Georgia" pitchFamily="34" charset="-120"/>
+              </a:rPr>
+              <a:t>Show the artefact early. Don't leave it as a reveal.</a:t>
+            </a:r>
+            <a:endParaRPr lang="en-US" sz="1300" dirty="0"/>
+          </a:p>
+        </p:txBody>
+      </p:sp>
+      <p:sp>
+        <p:nvSpPr>
+          <p:cNvPr id="12" name="Text 10"/>
+          <p:cNvSpPr/>
+          <p:nvPr/>
+        </p:nvSpPr>
+        <p:spPr>
+          <a:xfrm>
+            <a:off x="692051" y="3381524"/>
+            <a:ext cx="7973389" cy="230981"/>
+          </a:xfrm>
+          <a:prstGeom prst="rect">
+            <a:avLst/>
+          </a:prstGeom>
+          <a:noFill/>
+          <a:ln/>
+        </p:spPr>
+        <p:txBody>
+          <a:bodyPr wrap="square" lIns="0" tIns="0" rIns="0" bIns="0" rtlCol="0" anchor="t"/>
+          <a:lstStyle/>
+          <a:p>
+            <a:pPr algn="l" indent="0" marL="0">
+              <a:lnSpc>
+                <a:spcPts val="1820"/>
+              </a:lnSpc>
+              <a:spcBef>
+                <a:spcPts val="300"/>
+              </a:spcBef>
+              <a:spcAft>
+                <a:spcPts val="300"/>
+              </a:spcAft>
+              <a:buNone/>
+            </a:pPr>
+            <a:r>
+              <a:rPr lang="en-US" sz="1300" i="1" dirty="0">
+                <a:solidFill>
+                  <a:srgbClr val="1C2833"/>
+                </a:solidFill>
+                <a:latin typeface="Georgia" pitchFamily="34" charset="0"/>
+                <a:ea typeface="Georgia" pitchFamily="34" charset="-122"/>
+                <a:cs typeface="Georgia" pitchFamily="34" charset="-120"/>
+              </a:rPr>
+              <a:t>End with the reflection — one thing that worked, one that didn't.</a:t>
+            </a:r>
+            <a:endParaRPr lang="en-US" sz="1300" dirty="0"/>
+          </a:p>
+        </p:txBody>
+      </p:sp>
+      <p:sp>
+        <p:nvSpPr>
+          <p:cNvPr id="13" name="Text 11"/>
+          <p:cNvSpPr/>
+          <p:nvPr/>
+        </p:nvSpPr>
+        <p:spPr>
+          <a:xfrm>
+            <a:off x="692051" y="3650605"/>
+            <a:ext cx="7973389" cy="230981"/>
+          </a:xfrm>
+          <a:prstGeom prst="rect">
+            <a:avLst/>
+          </a:prstGeom>
+          <a:noFill/>
+          <a:ln/>
+        </p:spPr>
+        <p:txBody>
+          <a:bodyPr wrap="square" lIns="0" tIns="0" rIns="0" bIns="0" rtlCol="0" anchor="t"/>
+          <a:lstStyle/>
+          <a:p>
+            <a:pPr algn="l" indent="0" marL="0">
+              <a:lnSpc>
+                <a:spcPts val="1820"/>
+              </a:lnSpc>
+              <a:spcBef>
+                <a:spcPts val="300"/>
+              </a:spcBef>
+              <a:spcAft>
+                <a:spcPts val="300"/>
+              </a:spcAft>
+              <a:buNone/>
+            </a:pPr>
+            <a:r>
+              <a:rPr lang="en-US" sz="1300" dirty="0">
+                <a:solidFill>
+                  <a:srgbClr val="1C2833"/>
+                </a:solidFill>
+                <a:latin typeface="Georgia" pitchFamily="34" charset="0"/>
+                <a:ea typeface="Georgia" pitchFamily="34" charset="-122"/>
+                <a:cs typeface="Georgia" pitchFamily="34" charset="-120"/>
+              </a:rPr>
+              <a:t>If a question stumps you in Q&amp;A, say </a:t>
+            </a:r>
+            <a:pPr algn="l" indent="0" marL="0">
+              <a:lnSpc>
+                <a:spcPts val="1820"/>
+              </a:lnSpc>
+              <a:spcBef>
+                <a:spcPts val="300"/>
+              </a:spcBef>
+              <a:spcAft>
+                <a:spcPts val="300"/>
+              </a:spcAft>
+              <a:buNone/>
+            </a:pPr>
+            <a:r>
+              <a:rPr lang="en-US" sz="1300" i="1" dirty="0">
+                <a:solidFill>
+                  <a:srgbClr val="1C2833"/>
+                </a:solidFill>
+                <a:latin typeface="Georgia" pitchFamily="34" charset="0"/>
+                <a:ea typeface="Georgia" pitchFamily="34" charset="-122"/>
+                <a:cs typeface="Georgia" pitchFamily="34" charset="-120"/>
+              </a:rPr>
+              <a:t>"I don't know, but here's what I'd check…"</a:t>
+            </a:r>
+            <a:endParaRPr lang="en-US" sz="1300" dirty="0"/>
+          </a:p>
+        </p:txBody>
+      </p:sp>
+      <p:sp>
+        <p:nvSpPr>
+          <p:cNvPr id="14" name="Text 12"/>
           <p:cNvSpPr/>
           <p:nvPr/>
         </p:nvSpPr>
@@ -3015,7 +3642,7 @@
                 <a:ea typeface="Georgia" pitchFamily="34" charset="-122"/>
                 <a:cs typeface="Georgia" pitchFamily="34" charset="-120"/>
               </a:rPr>
-              <a:t>Teacher notes</a:t>
+              <a:t>Self + Peer Reflection Slip (template)</a:t>
             </a:r>
             <a:endParaRPr lang="en-US" sz="1800" dirty="0"/>
           </a:p>
@@ -3029,266 +3656,103 @@
         </p:nvSpPr>
         <p:spPr>
           <a:xfrm>
-            <a:off x="634901" y="883593"/>
-            <a:ext cx="8102798" cy="1630263"/>
-          </a:xfrm>
-          <a:prstGeom prst="rect">
+            <a:off x="406301" y="883593"/>
+            <a:ext cx="8331398" cy="4443710"/>
+          </a:xfrm>
+          <a:prstGeom prst="rect">
+            <a:avLst/>
+          </a:prstGeom>
+          <a:solidFill>
+            <a:srgbClr val="F4F8F9"/>
+          </a:solidFill>
+          <a:ln/>
+        </p:spPr>
+        <p:txBody>
+          <a:bodyPr wrap="square" rtlCol="0" anchor="ctr"/>
+          <a:lstStyle/>
+          <a:p>
+            <a:pPr indent="0" marL="0">
+              <a:buNone/>
+            </a:pPr>
+            <a:endParaRPr lang="en-US" dirty="0"/>
+          </a:p>
+        </p:txBody>
+      </p:sp>
+      <p:sp>
+        <p:nvSpPr>
+          <p:cNvPr id="5" name="Shape 3"/>
+          <p:cNvSpPr/>
+          <p:nvPr/>
+        </p:nvSpPr>
+        <p:spPr>
+          <a:xfrm>
+            <a:off x="430113" y="883593"/>
+            <a:ext cx="0" cy="4443710"/>
+          </a:xfrm>
+          <a:prstGeom prst="line">
             <a:avLst/>
           </a:prstGeom>
           <a:noFill/>
+          <a:ln w="47625">
+            <a:solidFill>
+              <a:srgbClr val="277884"/>
+            </a:solidFill>
+            <a:prstDash val="solid"/>
+          </a:ln>
+        </p:spPr>
+      </p:sp>
+      <p:sp>
+        <p:nvSpPr>
+          <p:cNvPr id="6" name="Text 4"/>
+          <p:cNvSpPr/>
+          <p:nvPr/>
+        </p:nvSpPr>
+        <p:spPr>
+          <a:xfrm>
+            <a:off x="631627" y="1010543"/>
+            <a:ext cx="8086939" cy="174575"/>
+          </a:xfrm>
+          <a:prstGeom prst="rect">
+            <a:avLst/>
+          </a:prstGeom>
+          <a:noFill/>
           <a:ln/>
         </p:spPr>
         <p:txBody>
           <a:bodyPr wrap="square" lIns="0" tIns="0" rIns="0" bIns="0" rtlCol="0" anchor="t"/>
           <a:lstStyle/>
           <a:p>
-            <a:pPr algn="l" marL="342900" indent="-342900">
-              <a:lnSpc>
-                <a:spcPts val="1620"/>
-              </a:lnSpc>
-              <a:spcAft>
-                <a:spcPts val="300"/>
-              </a:spcAft>
-              <a:buSzPct val="100000"/>
-              <a:buChar char="•"/>
-            </a:pPr>
-            <a:r>
-              <a:rPr lang="en-US" sz="1200" b="1" dirty="0">
-                <a:solidFill>
-                  <a:srgbClr val="1C2833"/>
-                </a:solidFill>
-                <a:latin typeface="Arial" pitchFamily="34" charset="0"/>
-                <a:ea typeface="Arial" pitchFamily="34" charset="-122"/>
-                <a:cs typeface="Arial" pitchFamily="34" charset="-120"/>
-              </a:rPr>
-              <a:t>Run the timer strictly.</a:t>
-            </a:r>
-            <a:pPr algn="l" indent="0" marL="0">
-              <a:lnSpc>
-                <a:spcPts val="1620"/>
-              </a:lnSpc>
-              <a:spcAft>
-                <a:spcPts val="300"/>
-              </a:spcAft>
-              <a:buNone/>
-            </a:pPr>
-            <a:r>
-              <a:rPr lang="en-US" sz="1200" dirty="0">
-                <a:solidFill>
-                  <a:srgbClr val="1C2833"/>
-                </a:solidFill>
-                <a:latin typeface="Arial" pitchFamily="34" charset="0"/>
-                <a:ea typeface="Arial" pitchFamily="34" charset="-122"/>
-                <a:cs typeface="Arial" pitchFamily="34" charset="-120"/>
-              </a:rPr>
-              <a:t> A 5:30 share embarrasses the next presenter who has only 4. The discipline of compression is one of the lessons.</a:t>
-            </a:r>
-            <a:endParaRPr lang="en-US" sz="1200" dirty="0"/>
-          </a:p>
-          <a:p>
-            <a:pPr algn="l" marL="342900" indent="-342900">
-              <a:lnSpc>
-                <a:spcPts val="1620"/>
-              </a:lnSpc>
-              <a:spcAft>
-                <a:spcPts val="300"/>
-              </a:spcAft>
-              <a:buSzPct val="100000"/>
-              <a:buChar char="•"/>
-            </a:pPr>
-            <a:r>
-              <a:rPr lang="en-US" sz="1200" b="1" dirty="0">
-                <a:solidFill>
-                  <a:srgbClr val="1C2833"/>
-                </a:solidFill>
-                <a:latin typeface="Arial" pitchFamily="34" charset="0"/>
-                <a:ea typeface="Arial" pitchFamily="34" charset="-122"/>
-                <a:cs typeface="Arial" pitchFamily="34" charset="-120"/>
-              </a:rPr>
-              <a:t>Mark in real time.</a:t>
-            </a:r>
-            <a:pPr algn="l" indent="0" marL="0">
-              <a:lnSpc>
-                <a:spcPts val="1620"/>
-              </a:lnSpc>
-              <a:spcAft>
-                <a:spcPts val="300"/>
-              </a:spcAft>
-              <a:buNone/>
-            </a:pPr>
-            <a:r>
-              <a:rPr lang="en-US" sz="1200" dirty="0">
-                <a:solidFill>
-                  <a:srgbClr val="1C2833"/>
-                </a:solidFill>
-                <a:latin typeface="Arial" pitchFamily="34" charset="0"/>
-                <a:ea typeface="Arial" pitchFamily="34" charset="-122"/>
-                <a:cs typeface="Arial" pitchFamily="34" charset="-120"/>
-              </a:rPr>
-              <a:t> Use a clipboard with the rubric printed. Quick numbers, no comments yet — those come later.</a:t>
-            </a:r>
-            <a:endParaRPr lang="en-US" sz="1200" dirty="0"/>
-          </a:p>
-          <a:p>
-            <a:pPr algn="l" marL="342900" indent="-342900">
-              <a:lnSpc>
-                <a:spcPts val="1620"/>
-              </a:lnSpc>
-              <a:spcAft>
-                <a:spcPts val="300"/>
-              </a:spcAft>
-              <a:buSzPct val="100000"/>
-              <a:buChar char="•"/>
-            </a:pPr>
-            <a:r>
-              <a:rPr lang="en-US" sz="1200" b="1" dirty="0">
-                <a:solidFill>
-                  <a:srgbClr val="1C2833"/>
-                </a:solidFill>
-                <a:latin typeface="Arial" pitchFamily="34" charset="0"/>
-                <a:ea typeface="Arial" pitchFamily="34" charset="-122"/>
-                <a:cs typeface="Arial" pitchFamily="34" charset="-120"/>
-              </a:rPr>
-              <a:t>The Q&amp;A discipline is on the audience too.</a:t>
-            </a:r>
-            <a:pPr algn="l" indent="0" marL="0">
-              <a:lnSpc>
-                <a:spcPts val="1620"/>
-              </a:lnSpc>
-              <a:spcAft>
-                <a:spcPts val="300"/>
-              </a:spcAft>
-              <a:buNone/>
-            </a:pPr>
-            <a:r>
-              <a:rPr lang="en-US" sz="1200" dirty="0">
-                <a:solidFill>
-                  <a:srgbClr val="1C2833"/>
-                </a:solidFill>
-                <a:latin typeface="Arial" pitchFamily="34" charset="0"/>
-                <a:ea typeface="Arial" pitchFamily="34" charset="-122"/>
-                <a:cs typeface="Arial" pitchFamily="34" charset="-120"/>
-              </a:rPr>
-              <a:t> If a parent question goes too long, gently cut: </a:t>
-            </a:r>
-            <a:pPr algn="l" indent="0" marL="0">
-              <a:lnSpc>
-                <a:spcPts val="1620"/>
-              </a:lnSpc>
-              <a:spcAft>
-                <a:spcPts val="300"/>
-              </a:spcAft>
-              <a:buNone/>
-            </a:pPr>
-            <a:r>
-              <a:rPr lang="en-US" sz="1200" i="1" dirty="0">
-                <a:solidFill>
-                  <a:srgbClr val="1C2833"/>
-                </a:solidFill>
-                <a:latin typeface="Arial" pitchFamily="34" charset="0"/>
-                <a:ea typeface="Arial" pitchFamily="34" charset="-122"/>
-                <a:cs typeface="Arial" pitchFamily="34" charset="-120"/>
-              </a:rPr>
-              <a:t>"Thank you, let's hold further questions for after."</a:t>
-            </a:r>
-            <a:endParaRPr lang="en-US" sz="1200" dirty="0"/>
-          </a:p>
-          <a:p>
-            <a:pPr algn="l" marL="342900" indent="-342900">
-              <a:lnSpc>
-                <a:spcPts val="1620"/>
-              </a:lnSpc>
-              <a:spcAft>
-                <a:spcPts val="300"/>
-              </a:spcAft>
-              <a:buSzPct val="100000"/>
-              <a:buChar char="•"/>
-            </a:pPr>
-            <a:r>
-              <a:rPr lang="en-US" sz="1200" b="1" dirty="0">
-                <a:solidFill>
-                  <a:srgbClr val="1C2833"/>
-                </a:solidFill>
-                <a:latin typeface="Arial" pitchFamily="34" charset="0"/>
-                <a:ea typeface="Arial" pitchFamily="34" charset="-122"/>
-                <a:cs typeface="Arial" pitchFamily="34" charset="-120"/>
-              </a:rPr>
-              <a:t>The summative quiz is not the grade-driver</a:t>
-            </a:r>
-            <a:pPr algn="l" indent="0" marL="0">
-              <a:lnSpc>
-                <a:spcPts val="1620"/>
-              </a:lnSpc>
-              <a:spcAft>
-                <a:spcPts val="300"/>
-              </a:spcAft>
-              <a:buNone/>
-            </a:pPr>
-            <a:r>
-              <a:rPr lang="en-US" sz="1200" dirty="0">
-                <a:solidFill>
-                  <a:srgbClr val="1C2833"/>
-                </a:solidFill>
-                <a:latin typeface="Arial" pitchFamily="34" charset="0"/>
-                <a:ea typeface="Arial" pitchFamily="34" charset="-122"/>
-                <a:cs typeface="Arial" pitchFamily="34" charset="-120"/>
-              </a:rPr>
-              <a:t> — the project + rubric is. The quiz is a final check that the </a:t>
-            </a:r>
-            <a:pPr algn="l" indent="0" marL="0">
-              <a:lnSpc>
-                <a:spcPts val="1620"/>
-              </a:lnSpc>
-              <a:spcAft>
-                <a:spcPts val="300"/>
-              </a:spcAft>
-              <a:buNone/>
-            </a:pPr>
-            <a:r>
-              <a:rPr lang="en-US" sz="1200" i="1" dirty="0">
-                <a:solidFill>
-                  <a:srgbClr val="1C2833"/>
-                </a:solidFill>
-                <a:latin typeface="Arial" pitchFamily="34" charset="0"/>
-                <a:ea typeface="Arial" pitchFamily="34" charset="-122"/>
-                <a:cs typeface="Arial" pitchFamily="34" charset="-120"/>
-              </a:rPr>
-              <a:t>process language</a:t>
-            </a:r>
-            <a:pPr algn="l" indent="0" marL="0">
-              <a:lnSpc>
-                <a:spcPts val="1620"/>
-              </a:lnSpc>
-              <a:spcAft>
-                <a:spcPts val="300"/>
-              </a:spcAft>
-              <a:buNone/>
-            </a:pPr>
-            <a:r>
-              <a:rPr lang="en-US" sz="1200" dirty="0">
-                <a:solidFill>
-                  <a:srgbClr val="1C2833"/>
-                </a:solidFill>
-                <a:latin typeface="Arial" pitchFamily="34" charset="0"/>
-                <a:ea typeface="Arial" pitchFamily="34" charset="-122"/>
-                <a:cs typeface="Arial" pitchFamily="34" charset="-120"/>
-              </a:rPr>
-              <a:t> of the module landed (the six phases, the two new Sanskrit terms, the citation rule, the honesty rule).</a:t>
-            </a:r>
-            <a:endParaRPr lang="en-US" sz="1200" dirty="0"/>
-          </a:p>
-        </p:txBody>
-      </p:sp>
-      <p:sp>
-        <p:nvSpPr>
-          <p:cNvPr id="5" name="Text 3"/>
-          <p:cNvSpPr/>
-          <p:nvPr/>
-        </p:nvSpPr>
-        <p:spPr>
-          <a:xfrm>
-            <a:off x="406301" y="2602706"/>
-            <a:ext cx="8498026" cy="639812"/>
+            <a:pPr algn="l" indent="0" marL="0">
+              <a:lnSpc>
+                <a:spcPts val="1375"/>
+              </a:lnSpc>
+              <a:buNone/>
+            </a:pPr>
+            <a:r>
+              <a:rPr lang="en-US" sz="1100" dirty="0">
+                <a:solidFill>
+                  <a:srgbClr val="1C2833"/>
+                </a:solidFill>
+                <a:latin typeface="Courier New" pitchFamily="34" charset="0"/>
+                <a:ea typeface="Courier New" pitchFamily="34" charset="-122"/>
+                <a:cs typeface="Courier New" pitchFamily="34" charset="-120"/>
+              </a:rPr>
+              <a:t>SELF + PEER REFLECTION — Module 15</a:t>
+            </a:r>
+            <a:endParaRPr lang="en-US" sz="1100" dirty="0"/>
+          </a:p>
+        </p:txBody>
+      </p:sp>
+      <p:sp>
+        <p:nvSpPr>
+          <p:cNvPr id="7" name="Text 5"/>
+          <p:cNvSpPr/>
+          <p:nvPr/>
+        </p:nvSpPr>
+        <p:spPr>
+          <a:xfrm>
+            <a:off x="631627" y="1359694"/>
+            <a:ext cx="8086939" cy="174575"/>
           </a:xfrm>
           <a:prstGeom prst="rect">
             <a:avLst/>
@@ -3302,40 +3766,622 @@
           <a:p>
             <a:pPr algn="l" indent="0" marL="0">
               <a:lnSpc>
-                <a:spcPts val="1680"/>
-              </a:lnSpc>
-              <a:spcBef>
-                <a:spcPts val="300"/>
-              </a:spcBef>
-              <a:spcAft>
-                <a:spcPts val="300"/>
-              </a:spcAft>
-              <a:buNone/>
-            </a:pPr>
-            <a:r>
-              <a:rPr lang="en-US" sz="1200" dirty="0">
-                <a:solidFill>
-                  <a:srgbClr val="1C2833"/>
-                </a:solidFill>
-                <a:latin typeface="Arial" pitchFamily="34" charset="0"/>
-                <a:ea typeface="Arial" pitchFamily="34" charset="-122"/>
-                <a:cs typeface="Arial" pitchFamily="34" charset="-120"/>
-              </a:rPr>
-              <a:t>– After class, photograph every artefact + the marked rubric + the documentation, one folder per student. This is your evidence for the school records and for next year's exemplars. – Within one week, return marked rubrics with one paragraph of written feedback each.</a:t>
-            </a:r>
-            <a:endParaRPr lang="en-US" sz="1200" dirty="0"/>
-          </a:p>
-        </p:txBody>
-      </p:sp>
-      <p:sp>
-        <p:nvSpPr>
-          <p:cNvPr id="6" name="Text 4"/>
-          <p:cNvSpPr/>
-          <p:nvPr/>
-        </p:nvSpPr>
-        <p:spPr>
-          <a:xfrm>
-            <a:off x="406301" y="4434929"/>
+                <a:spcPts val="1375"/>
+              </a:lnSpc>
+              <a:buNone/>
+            </a:pPr>
+            <a:r>
+              <a:rPr lang="en-US" sz="1100" dirty="0">
+                <a:solidFill>
+                  <a:srgbClr val="1C2833"/>
+                </a:solidFill>
+                <a:latin typeface="Courier New" pitchFamily="34" charset="0"/>
+                <a:ea typeface="Courier New" pitchFamily="34" charset="-122"/>
+                <a:cs typeface="Courier New" pitchFamily="34" charset="-120"/>
+              </a:rPr>
+              <a:t>Name: _________________________</a:t>
+            </a:r>
+            <a:endParaRPr lang="en-US" sz="1100" dirty="0"/>
+          </a:p>
+        </p:txBody>
+      </p:sp>
+      <p:sp>
+        <p:nvSpPr>
+          <p:cNvPr id="8" name="Text 6"/>
+          <p:cNvSpPr/>
+          <p:nvPr/>
+        </p:nvSpPr>
+        <p:spPr>
+          <a:xfrm>
+            <a:off x="631627" y="1708845"/>
+            <a:ext cx="8086939" cy="174575"/>
+          </a:xfrm>
+          <a:prstGeom prst="rect">
+            <a:avLst/>
+          </a:prstGeom>
+          <a:noFill/>
+          <a:ln/>
+        </p:spPr>
+        <p:txBody>
+          <a:bodyPr wrap="square" lIns="0" tIns="0" rIns="0" bIns="0" rtlCol="0" anchor="t"/>
+          <a:lstStyle/>
+          <a:p>
+            <a:pPr algn="l" indent="0" marL="0">
+              <a:lnSpc>
+                <a:spcPts val="1375"/>
+              </a:lnSpc>
+              <a:buNone/>
+            </a:pPr>
+            <a:r>
+              <a:rPr lang="en-US" sz="1100" dirty="0">
+                <a:solidFill>
+                  <a:srgbClr val="1C2833"/>
+                </a:solidFill>
+                <a:latin typeface="Courier New" pitchFamily="34" charset="0"/>
+                <a:ea typeface="Courier New" pitchFamily="34" charset="-122"/>
+                <a:cs typeface="Courier New" pitchFamily="34" charset="-120"/>
+              </a:rPr>
+              <a:t>PART A — MY OWN PROJECT (self-mark out of 4 on each, with one-line reason)</a:t>
+            </a:r>
+            <a:endParaRPr lang="en-US" sz="1100" dirty="0"/>
+          </a:p>
+        </p:txBody>
+      </p:sp>
+      <p:sp>
+        <p:nvSpPr>
+          <p:cNvPr id="9" name="Text 7"/>
+          <p:cNvSpPr/>
+          <p:nvPr/>
+        </p:nvSpPr>
+        <p:spPr>
+          <a:xfrm>
+            <a:off x="631627" y="2057995"/>
+            <a:ext cx="8086939" cy="174575"/>
+          </a:xfrm>
+          <a:prstGeom prst="rect">
+            <a:avLst/>
+          </a:prstGeom>
+          <a:noFill/>
+          <a:ln/>
+        </p:spPr>
+        <p:txBody>
+          <a:bodyPr wrap="square" lIns="0" tIns="0" rIns="0" bIns="0" rtlCol="0" anchor="t"/>
+          <a:lstStyle/>
+          <a:p>
+            <a:pPr algn="l" indent="0" marL="0">
+              <a:lnSpc>
+                <a:spcPts val="1375"/>
+              </a:lnSpc>
+              <a:buNone/>
+            </a:pPr>
+            <a:r>
+              <a:rPr lang="en-US" sz="1100" dirty="0">
+                <a:solidFill>
+                  <a:srgbClr val="1C2833"/>
+                </a:solidFill>
+                <a:latin typeface="Courier New" pitchFamily="34" charset="0"/>
+                <a:ea typeface="Courier New" pitchFamily="34" charset="-122"/>
+                <a:cs typeface="Courier New" pitchFamily="34" charset="-120"/>
+              </a:rPr>
+              <a:t>a) Conceptual accuracy:  4 / 3 / 2 / 1   Reason: ____________</a:t>
+            </a:r>
+            <a:endParaRPr lang="en-US" sz="1100" dirty="0"/>
+          </a:p>
+        </p:txBody>
+      </p:sp>
+      <p:sp>
+        <p:nvSpPr>
+          <p:cNvPr id="10" name="Text 8"/>
+          <p:cNvSpPr/>
+          <p:nvPr/>
+        </p:nvSpPr>
+        <p:spPr>
+          <a:xfrm>
+            <a:off x="631627" y="2232571"/>
+            <a:ext cx="8086939" cy="174575"/>
+          </a:xfrm>
+          <a:prstGeom prst="rect">
+            <a:avLst/>
+          </a:prstGeom>
+          <a:noFill/>
+          <a:ln/>
+        </p:spPr>
+        <p:txBody>
+          <a:bodyPr wrap="square" lIns="0" tIns="0" rIns="0" bIns="0" rtlCol="0" anchor="t"/>
+          <a:lstStyle/>
+          <a:p>
+            <a:pPr algn="l" indent="0" marL="0">
+              <a:lnSpc>
+                <a:spcPts val="1375"/>
+              </a:lnSpc>
+              <a:buNone/>
+            </a:pPr>
+            <a:r>
+              <a:rPr lang="en-US" sz="1100" dirty="0">
+                <a:solidFill>
+                  <a:srgbClr val="1C2833"/>
+                </a:solidFill>
+                <a:latin typeface="Courier New" pitchFamily="34" charset="0"/>
+                <a:ea typeface="Courier New" pitchFamily="34" charset="-122"/>
+                <a:cs typeface="Courier New" pitchFamily="34" charset="-120"/>
+              </a:rPr>
+              <a:t>b) Use of sources:        4 / 3 / 2 / 1   Reason: ____________</a:t>
+            </a:r>
+            <a:endParaRPr lang="en-US" sz="1100" dirty="0"/>
+          </a:p>
+        </p:txBody>
+      </p:sp>
+      <p:sp>
+        <p:nvSpPr>
+          <p:cNvPr id="11" name="Text 9"/>
+          <p:cNvSpPr/>
+          <p:nvPr/>
+        </p:nvSpPr>
+        <p:spPr>
+          <a:xfrm>
+            <a:off x="631627" y="2407146"/>
+            <a:ext cx="8086939" cy="174575"/>
+          </a:xfrm>
+          <a:prstGeom prst="rect">
+            <a:avLst/>
+          </a:prstGeom>
+          <a:noFill/>
+          <a:ln/>
+        </p:spPr>
+        <p:txBody>
+          <a:bodyPr wrap="square" lIns="0" tIns="0" rIns="0" bIns="0" rtlCol="0" anchor="t"/>
+          <a:lstStyle/>
+          <a:p>
+            <a:pPr algn="l" indent="0" marL="0">
+              <a:lnSpc>
+                <a:spcPts val="1375"/>
+              </a:lnSpc>
+              <a:buNone/>
+            </a:pPr>
+            <a:r>
+              <a:rPr lang="en-US" sz="1100" dirty="0">
+                <a:solidFill>
+                  <a:srgbClr val="1C2833"/>
+                </a:solidFill>
+                <a:latin typeface="Courier New" pitchFamily="34" charset="0"/>
+                <a:ea typeface="Courier New" pitchFamily="34" charset="-122"/>
+                <a:cs typeface="Courier New" pitchFamily="34" charset="-120"/>
+              </a:rPr>
+              <a:t>c) Process documentation: 4 / 3 / 2 / 1   Reason: ____________</a:t>
+            </a:r>
+            <a:endParaRPr lang="en-US" sz="1100" dirty="0"/>
+          </a:p>
+        </p:txBody>
+      </p:sp>
+      <p:sp>
+        <p:nvSpPr>
+          <p:cNvPr id="12" name="Text 10"/>
+          <p:cNvSpPr/>
+          <p:nvPr/>
+        </p:nvSpPr>
+        <p:spPr>
+          <a:xfrm>
+            <a:off x="631627" y="2581721"/>
+            <a:ext cx="8086939" cy="174575"/>
+          </a:xfrm>
+          <a:prstGeom prst="rect">
+            <a:avLst/>
+          </a:prstGeom>
+          <a:noFill/>
+          <a:ln/>
+        </p:spPr>
+        <p:txBody>
+          <a:bodyPr wrap="square" lIns="0" tIns="0" rIns="0" bIns="0" rtlCol="0" anchor="t"/>
+          <a:lstStyle/>
+          <a:p>
+            <a:pPr algn="l" indent="0" marL="0">
+              <a:lnSpc>
+                <a:spcPts val="1375"/>
+              </a:lnSpc>
+              <a:buNone/>
+            </a:pPr>
+            <a:r>
+              <a:rPr lang="en-US" sz="1100" dirty="0">
+                <a:solidFill>
+                  <a:srgbClr val="1C2833"/>
+                </a:solidFill>
+                <a:latin typeface="Courier New" pitchFamily="34" charset="0"/>
+                <a:ea typeface="Courier New" pitchFamily="34" charset="-122"/>
+                <a:cs typeface="Courier New" pitchFamily="34" charset="-120"/>
+              </a:rPr>
+              <a:t>d) Artefact quality:      4 / 3 / 2 / 1   Reason: ____________</a:t>
+            </a:r>
+            <a:endParaRPr lang="en-US" sz="1100" dirty="0"/>
+          </a:p>
+        </p:txBody>
+      </p:sp>
+      <p:sp>
+        <p:nvSpPr>
+          <p:cNvPr id="13" name="Text 11"/>
+          <p:cNvSpPr/>
+          <p:nvPr/>
+        </p:nvSpPr>
+        <p:spPr>
+          <a:xfrm>
+            <a:off x="631627" y="2756297"/>
+            <a:ext cx="8086939" cy="174575"/>
+          </a:xfrm>
+          <a:prstGeom prst="rect">
+            <a:avLst/>
+          </a:prstGeom>
+          <a:noFill/>
+          <a:ln/>
+        </p:spPr>
+        <p:txBody>
+          <a:bodyPr wrap="square" lIns="0" tIns="0" rIns="0" bIns="0" rtlCol="0" anchor="t"/>
+          <a:lstStyle/>
+          <a:p>
+            <a:pPr algn="l" indent="0" marL="0">
+              <a:lnSpc>
+                <a:spcPts val="1375"/>
+              </a:lnSpc>
+              <a:buNone/>
+            </a:pPr>
+            <a:r>
+              <a:rPr lang="en-US" sz="1100" dirty="0">
+                <a:solidFill>
+                  <a:srgbClr val="1C2833"/>
+                </a:solidFill>
+                <a:latin typeface="Courier New" pitchFamily="34" charset="0"/>
+                <a:ea typeface="Courier New" pitchFamily="34" charset="-122"/>
+                <a:cs typeface="Courier New" pitchFamily="34" charset="-120"/>
+              </a:rPr>
+              <a:t>e) Honest reflection:     4 / 3 / 2 / 1   Reason: ____________</a:t>
+            </a:r>
+            <a:endParaRPr lang="en-US" sz="1100" dirty="0"/>
+          </a:p>
+        </p:txBody>
+      </p:sp>
+      <p:sp>
+        <p:nvSpPr>
+          <p:cNvPr id="14" name="Text 12"/>
+          <p:cNvSpPr/>
+          <p:nvPr/>
+        </p:nvSpPr>
+        <p:spPr>
+          <a:xfrm>
+            <a:off x="631627" y="3105448"/>
+            <a:ext cx="8086939" cy="174575"/>
+          </a:xfrm>
+          <a:prstGeom prst="rect">
+            <a:avLst/>
+          </a:prstGeom>
+          <a:noFill/>
+          <a:ln/>
+        </p:spPr>
+        <p:txBody>
+          <a:bodyPr wrap="square" lIns="0" tIns="0" rIns="0" bIns="0" rtlCol="0" anchor="t"/>
+          <a:lstStyle/>
+          <a:p>
+            <a:pPr algn="l" indent="0" marL="0">
+              <a:lnSpc>
+                <a:spcPts val="1375"/>
+              </a:lnSpc>
+              <a:buNone/>
+            </a:pPr>
+            <a:r>
+              <a:rPr lang="en-US" sz="1100" dirty="0">
+                <a:solidFill>
+                  <a:srgbClr val="1C2833"/>
+                </a:solidFill>
+                <a:latin typeface="Courier New" pitchFamily="34" charset="0"/>
+                <a:ea typeface="Courier New" pitchFamily="34" charset="-122"/>
+                <a:cs typeface="Courier New" pitchFamily="34" charset="-120"/>
+              </a:rPr>
+              <a:t>PART B — TWO PEER SHARES</a:t>
+            </a:r>
+            <a:endParaRPr lang="en-US" sz="1100" dirty="0"/>
+          </a:p>
+        </p:txBody>
+      </p:sp>
+      <p:sp>
+        <p:nvSpPr>
+          <p:cNvPr id="15" name="Text 13"/>
+          <p:cNvSpPr/>
+          <p:nvPr/>
+        </p:nvSpPr>
+        <p:spPr>
+          <a:xfrm>
+            <a:off x="631627" y="3454598"/>
+            <a:ext cx="8086939" cy="174575"/>
+          </a:xfrm>
+          <a:prstGeom prst="rect">
+            <a:avLst/>
+          </a:prstGeom>
+          <a:noFill/>
+          <a:ln/>
+        </p:spPr>
+        <p:txBody>
+          <a:bodyPr wrap="square" lIns="0" tIns="0" rIns="0" bIns="0" rtlCol="0" anchor="t"/>
+          <a:lstStyle/>
+          <a:p>
+            <a:pPr algn="l" indent="0" marL="0">
+              <a:lnSpc>
+                <a:spcPts val="1375"/>
+              </a:lnSpc>
+              <a:buNone/>
+            </a:pPr>
+            <a:r>
+              <a:rPr lang="en-US" sz="1100" dirty="0">
+                <a:solidFill>
+                  <a:srgbClr val="1C2833"/>
+                </a:solidFill>
+                <a:latin typeface="Courier New" pitchFamily="34" charset="0"/>
+                <a:ea typeface="Courier New" pitchFamily="34" charset="-122"/>
+                <a:cs typeface="Courier New" pitchFamily="34" charset="-120"/>
+              </a:rPr>
+              <a:t>Peer 1: _______________  One thing I learned: ____________</a:t>
+            </a:r>
+            <a:endParaRPr lang="en-US" sz="1100" dirty="0"/>
+          </a:p>
+        </p:txBody>
+      </p:sp>
+      <p:sp>
+        <p:nvSpPr>
+          <p:cNvPr id="16" name="Text 14"/>
+          <p:cNvSpPr/>
+          <p:nvPr/>
+        </p:nvSpPr>
+        <p:spPr>
+          <a:xfrm>
+            <a:off x="631627" y="3629174"/>
+            <a:ext cx="8086939" cy="174575"/>
+          </a:xfrm>
+          <a:prstGeom prst="rect">
+            <a:avLst/>
+          </a:prstGeom>
+          <a:noFill/>
+          <a:ln/>
+        </p:spPr>
+        <p:txBody>
+          <a:bodyPr wrap="square" lIns="0" tIns="0" rIns="0" bIns="0" rtlCol="0" anchor="t"/>
+          <a:lstStyle/>
+          <a:p>
+            <a:pPr algn="l" indent="0" marL="0">
+              <a:lnSpc>
+                <a:spcPts val="1375"/>
+              </a:lnSpc>
+              <a:buNone/>
+            </a:pPr>
+            <a:r>
+              <a:rPr lang="en-US" sz="1100" dirty="0">
+                <a:solidFill>
+                  <a:srgbClr val="1C2833"/>
+                </a:solidFill>
+                <a:latin typeface="Courier New" pitchFamily="34" charset="0"/>
+                <a:ea typeface="Courier New" pitchFamily="34" charset="-122"/>
+                <a:cs typeface="Courier New" pitchFamily="34" charset="-120"/>
+              </a:rPr>
+              <a:t>Peer 2: _______________  One thing I learned: ____________</a:t>
+            </a:r>
+            <a:endParaRPr lang="en-US" sz="1100" dirty="0"/>
+          </a:p>
+        </p:txBody>
+      </p:sp>
+      <p:sp>
+        <p:nvSpPr>
+          <p:cNvPr id="17" name="Text 15"/>
+          <p:cNvSpPr/>
+          <p:nvPr/>
+        </p:nvSpPr>
+        <p:spPr>
+          <a:xfrm>
+            <a:off x="631627" y="3978325"/>
+            <a:ext cx="8086939" cy="174575"/>
+          </a:xfrm>
+          <a:prstGeom prst="rect">
+            <a:avLst/>
+          </a:prstGeom>
+          <a:noFill/>
+          <a:ln/>
+        </p:spPr>
+        <p:txBody>
+          <a:bodyPr wrap="square" lIns="0" tIns="0" rIns="0" bIns="0" rtlCol="0" anchor="t"/>
+          <a:lstStyle/>
+          <a:p>
+            <a:pPr algn="l" indent="0" marL="0">
+              <a:lnSpc>
+                <a:spcPts val="1375"/>
+              </a:lnSpc>
+              <a:buNone/>
+            </a:pPr>
+            <a:r>
+              <a:rPr lang="en-US" sz="1100" dirty="0">
+                <a:solidFill>
+                  <a:srgbClr val="1C2833"/>
+                </a:solidFill>
+                <a:latin typeface="Courier New" pitchFamily="34" charset="0"/>
+                <a:ea typeface="Courier New" pitchFamily="34" charset="-122"/>
+                <a:cs typeface="Courier New" pitchFamily="34" charset="-120"/>
+              </a:rPr>
+              <a:t>PART C — ONE QUESTION I'M LEAVING WITH</a:t>
+            </a:r>
+            <a:endParaRPr lang="en-US" sz="1100" dirty="0"/>
+          </a:p>
+        </p:txBody>
+      </p:sp>
+      <p:sp>
+        <p:nvSpPr>
+          <p:cNvPr id="18" name="Text 16"/>
+          <p:cNvSpPr/>
+          <p:nvPr/>
+        </p:nvSpPr>
+        <p:spPr>
+          <a:xfrm>
+            <a:off x="631627" y="4327475"/>
+            <a:ext cx="8086939" cy="174575"/>
+          </a:xfrm>
+          <a:prstGeom prst="rect">
+            <a:avLst/>
+          </a:prstGeom>
+          <a:noFill/>
+          <a:ln/>
+        </p:spPr>
+        <p:txBody>
+          <a:bodyPr wrap="square" lIns="0" tIns="0" rIns="0" bIns="0" rtlCol="0" anchor="t"/>
+          <a:lstStyle/>
+          <a:p>
+            <a:pPr algn="l" indent="0" marL="0">
+              <a:lnSpc>
+                <a:spcPts val="1375"/>
+              </a:lnSpc>
+              <a:buNone/>
+            </a:pPr>
+            <a:r>
+              <a:rPr lang="en-US" sz="1100" dirty="0">
+                <a:solidFill>
+                  <a:srgbClr val="1C2833"/>
+                </a:solidFill>
+                <a:latin typeface="Courier New" pitchFamily="34" charset="0"/>
+                <a:ea typeface="Courier New" pitchFamily="34" charset="-122"/>
+                <a:cs typeface="Courier New" pitchFamily="34" charset="-120"/>
+              </a:rPr>
+              <a:t>(Something you're still curious about, related to ANY framework</a:t>
+            </a:r>
+            <a:endParaRPr lang="en-US" sz="1100" dirty="0"/>
+          </a:p>
+        </p:txBody>
+      </p:sp>
+      <p:sp>
+        <p:nvSpPr>
+          <p:cNvPr id="19" name="Text 17"/>
+          <p:cNvSpPr/>
+          <p:nvPr/>
+        </p:nvSpPr>
+        <p:spPr>
+          <a:xfrm>
+            <a:off x="631627" y="4502051"/>
+            <a:ext cx="8086939" cy="174575"/>
+          </a:xfrm>
+          <a:prstGeom prst="rect">
+            <a:avLst/>
+          </a:prstGeom>
+          <a:noFill/>
+          <a:ln/>
+        </p:spPr>
+        <p:txBody>
+          <a:bodyPr wrap="square" lIns="0" tIns="0" rIns="0" bIns="0" rtlCol="0" anchor="t"/>
+          <a:lstStyle/>
+          <a:p>
+            <a:pPr algn="l" indent="0" marL="0">
+              <a:lnSpc>
+                <a:spcPts val="1375"/>
+              </a:lnSpc>
+              <a:buNone/>
+            </a:pPr>
+            <a:r>
+              <a:rPr lang="en-US" sz="1100" dirty="0">
+                <a:solidFill>
+                  <a:srgbClr val="1C2833"/>
+                </a:solidFill>
+                <a:latin typeface="Courier New" pitchFamily="34" charset="0"/>
+                <a:ea typeface="Courier New" pitchFamily="34" charset="-122"/>
+                <a:cs typeface="Courier New" pitchFamily="34" charset="-120"/>
+              </a:rPr>
+              <a:t>from any prior module that came up today):</a:t>
+            </a:r>
+            <a:endParaRPr lang="en-US" sz="1100" dirty="0"/>
+          </a:p>
+        </p:txBody>
+      </p:sp>
+      <p:sp>
+        <p:nvSpPr>
+          <p:cNvPr id="20" name="Text 18"/>
+          <p:cNvSpPr/>
+          <p:nvPr/>
+        </p:nvSpPr>
+        <p:spPr>
+          <a:xfrm>
+            <a:off x="631627" y="4851202"/>
+            <a:ext cx="8086939" cy="174575"/>
+          </a:xfrm>
+          <a:prstGeom prst="rect">
+            <a:avLst/>
+          </a:prstGeom>
+          <a:noFill/>
+          <a:ln/>
+        </p:spPr>
+        <p:txBody>
+          <a:bodyPr wrap="square" lIns="0" tIns="0" rIns="0" bIns="0" rtlCol="0" anchor="t"/>
+          <a:lstStyle/>
+          <a:p>
+            <a:pPr algn="l" indent="0" marL="0">
+              <a:lnSpc>
+                <a:spcPts val="1375"/>
+              </a:lnSpc>
+              <a:buNone/>
+            </a:pPr>
+            <a:r>
+              <a:rPr lang="en-US" sz="1100" dirty="0">
+                <a:solidFill>
+                  <a:srgbClr val="1C2833"/>
+                </a:solidFill>
+                <a:latin typeface="Courier New" pitchFamily="34" charset="0"/>
+                <a:ea typeface="Courier New" pitchFamily="34" charset="-122"/>
+                <a:cs typeface="Courier New" pitchFamily="34" charset="-120"/>
+              </a:rPr>
+              <a:t>____________________________________________________</a:t>
+            </a:r>
+            <a:endParaRPr lang="en-US" sz="1100" dirty="0"/>
+          </a:p>
+        </p:txBody>
+      </p:sp>
+      <p:sp>
+        <p:nvSpPr>
+          <p:cNvPr id="21" name="Text 19"/>
+          <p:cNvSpPr/>
+          <p:nvPr/>
+        </p:nvSpPr>
+        <p:spPr>
+          <a:xfrm>
+            <a:off x="631627" y="5025777"/>
+            <a:ext cx="8086939" cy="174575"/>
+          </a:xfrm>
+          <a:prstGeom prst="rect">
+            <a:avLst/>
+          </a:prstGeom>
+          <a:noFill/>
+          <a:ln/>
+        </p:spPr>
+        <p:txBody>
+          <a:bodyPr wrap="square" lIns="0" tIns="0" rIns="0" bIns="0" rtlCol="0" anchor="t"/>
+          <a:lstStyle/>
+          <a:p>
+            <a:pPr algn="l" indent="0" marL="0">
+              <a:lnSpc>
+                <a:spcPts val="1375"/>
+              </a:lnSpc>
+              <a:buNone/>
+            </a:pPr>
+            <a:r>
+              <a:rPr lang="en-US" sz="1100" dirty="0">
+                <a:solidFill>
+                  <a:srgbClr val="1C2833"/>
+                </a:solidFill>
+                <a:latin typeface="Courier New" pitchFamily="34" charset="0"/>
+                <a:ea typeface="Courier New" pitchFamily="34" charset="-122"/>
+                <a:cs typeface="Courier New" pitchFamily="34" charset="-120"/>
+              </a:rPr>
+              <a:t>____________________________________________________</a:t>
+            </a:r>
+            <a:endParaRPr lang="en-US" sz="1100" dirty="0"/>
+          </a:p>
+        </p:txBody>
+      </p:sp>
+      <p:sp>
+        <p:nvSpPr>
+          <p:cNvPr id="22" name="Text 20"/>
+          <p:cNvSpPr/>
+          <p:nvPr/>
+        </p:nvSpPr>
+        <p:spPr>
+          <a:xfrm>
+            <a:off x="406301" y="5492353"/>
             <a:ext cx="8498026" cy="213271"/>
           </a:xfrm>
           <a:prstGeom prst="rect">
@@ -3479,6 +4525,1230 @@
                 <a:ea typeface="Georgia" pitchFamily="34" charset="-122"/>
                 <a:cs typeface="Georgia" pitchFamily="34" charset="-120"/>
               </a:rPr>
+              <a:t>Homework</a:t>
+            </a:r>
+            <a:endParaRPr lang="en-US" sz="1800" dirty="0"/>
+          </a:p>
+        </p:txBody>
+      </p:sp>
+      <p:sp>
+        <p:nvSpPr>
+          <p:cNvPr id="4" name="Text 2"/>
+          <p:cNvSpPr/>
+          <p:nvPr/>
+        </p:nvSpPr>
+        <p:spPr>
+          <a:xfrm>
+            <a:off x="634901" y="883593"/>
+            <a:ext cx="8102798" cy="788491"/>
+          </a:xfrm>
+          <a:prstGeom prst="rect">
+            <a:avLst/>
+          </a:prstGeom>
+          <a:noFill/>
+          <a:ln/>
+        </p:spPr>
+        <p:txBody>
+          <a:bodyPr wrap="square" lIns="0" tIns="0" rIns="0" bIns="0" rtlCol="0" anchor="t"/>
+          <a:lstStyle/>
+          <a:p>
+            <a:pPr algn="l" marL="342900" indent="-342900">
+              <a:lnSpc>
+                <a:spcPts val="1620"/>
+              </a:lnSpc>
+              <a:spcAft>
+                <a:spcPts val="300"/>
+              </a:spcAft>
+              <a:buSzPct val="100000"/>
+              <a:buChar char="•"/>
+            </a:pPr>
+            <a:r>
+              <a:rPr lang="en-US" sz="1200" b="1" dirty="0">
+                <a:solidFill>
+                  <a:srgbClr val="1C2833"/>
+                </a:solidFill>
+                <a:latin typeface="Arial" pitchFamily="34" charset="0"/>
+                <a:ea typeface="Arial" pitchFamily="34" charset="-122"/>
+                <a:cs typeface="Arial" pitchFamily="34" charset="-120"/>
+              </a:rPr>
+              <a:t>No homework after today.</a:t>
+            </a:r>
+            <a:pPr algn="l" indent="0" marL="0">
+              <a:lnSpc>
+                <a:spcPts val="1620"/>
+              </a:lnSpc>
+              <a:spcAft>
+                <a:spcPts val="300"/>
+              </a:spcAft>
+              <a:buNone/>
+            </a:pPr>
+            <a:r>
+              <a:rPr lang="en-US" sz="1200" dirty="0">
+                <a:solidFill>
+                  <a:srgbClr val="1C2833"/>
+                </a:solidFill>
+                <a:latin typeface="Arial" pitchFamily="34" charset="0"/>
+                <a:ea typeface="Arial" pitchFamily="34" charset="-122"/>
+                <a:cs typeface="Arial" pitchFamily="34" charset="-120"/>
+              </a:rPr>
+              <a:t> Module is complete.</a:t>
+            </a:r>
+            <a:endParaRPr lang="en-US" sz="1200" dirty="0"/>
+          </a:p>
+          <a:p>
+            <a:pPr algn="l" marL="342900" indent="-342900">
+              <a:lnSpc>
+                <a:spcPts val="1620"/>
+              </a:lnSpc>
+              <a:spcAft>
+                <a:spcPts val="300"/>
+              </a:spcAft>
+              <a:buSzPct val="100000"/>
+              <a:buChar char="•"/>
+            </a:pPr>
+            <a:r>
+              <a:rPr lang="en-US" sz="1200" dirty="0">
+                <a:solidFill>
+                  <a:srgbClr val="1C2833"/>
+                </a:solidFill>
+                <a:latin typeface="Arial" pitchFamily="34" charset="0"/>
+                <a:ea typeface="Arial" pitchFamily="34" charset="-122"/>
+                <a:cs typeface="Arial" pitchFamily="34" charset="-120"/>
+              </a:rPr>
+              <a:t>If your next module begins immediately, look at that module's </a:t>
+            </a:r>
+            <a:pPr algn="l" indent="0" marL="0">
+              <a:lnSpc>
+                <a:spcPts val="1620"/>
+              </a:lnSpc>
+              <a:spcAft>
+                <a:spcPts val="300"/>
+              </a:spcAft>
+              <a:buNone/>
+            </a:pPr>
+            <a:r>
+              <a:rPr lang="en-US" sz="1200" dirty="0">
+                <a:solidFill>
+                  <a:srgbClr val="1C2833"/>
+                </a:solidFill>
+                <a:latin typeface="Arial" pitchFamily="34" charset="0"/>
+                <a:ea typeface="Arial" pitchFamily="34" charset="-122"/>
+                <a:cs typeface="Arial" pitchFamily="34" charset="-120"/>
+              </a:rPr>
+              <a:t>README.md</a:t>
+            </a:r>
+            <a:pPr algn="l" indent="0" marL="0">
+              <a:lnSpc>
+                <a:spcPts val="1620"/>
+              </a:lnSpc>
+              <a:spcAft>
+                <a:spcPts val="300"/>
+              </a:spcAft>
+              <a:buNone/>
+            </a:pPr>
+            <a:r>
+              <a:rPr lang="en-US" sz="1200" dirty="0">
+                <a:solidFill>
+                  <a:srgbClr val="1C2833"/>
+                </a:solidFill>
+                <a:latin typeface="Arial" pitchFamily="34" charset="0"/>
+                <a:ea typeface="Arial" pitchFamily="34" charset="-122"/>
+                <a:cs typeface="Arial" pitchFamily="34" charset="-120"/>
+              </a:rPr>
+              <a:t> for the prerequisite reading. Otherwise, rest.</a:t>
+            </a:r>
+            <a:endParaRPr lang="en-US" sz="1200" dirty="0"/>
+          </a:p>
+          <a:p>
+            <a:pPr algn="l" marL="342900" indent="-342900">
+              <a:lnSpc>
+                <a:spcPts val="1620"/>
+              </a:lnSpc>
+              <a:spcAft>
+                <a:spcPts val="300"/>
+              </a:spcAft>
+              <a:buSzPct val="100000"/>
+              <a:buChar char="•"/>
+            </a:pPr>
+            <a:r>
+              <a:rPr lang="en-US" sz="1200" dirty="0">
+                <a:solidFill>
+                  <a:srgbClr val="1C2833"/>
+                </a:solidFill>
+                <a:latin typeface="Arial" pitchFamily="34" charset="0"/>
+                <a:ea typeface="Arial" pitchFamily="34" charset="-122"/>
+                <a:cs typeface="Arial" pitchFamily="34" charset="-120"/>
+              </a:rPr>
+              <a:t>Keep your artefact at school for one week — the teacher will return it after marking and may share photos with families.</a:t>
+            </a:r>
+            <a:endParaRPr lang="en-US" sz="1200" dirty="0"/>
+          </a:p>
+        </p:txBody>
+      </p:sp>
+      <p:sp>
+        <p:nvSpPr>
+          <p:cNvPr id="5" name="Text 3"/>
+          <p:cNvSpPr/>
+          <p:nvPr/>
+        </p:nvSpPr>
+        <p:spPr>
+          <a:xfrm>
+            <a:off x="406301" y="4434929"/>
+            <a:ext cx="8498026" cy="213271"/>
+          </a:xfrm>
+          <a:prstGeom prst="rect">
+            <a:avLst/>
+          </a:prstGeom>
+          <a:noFill/>
+          <a:ln/>
+        </p:spPr>
+        <p:txBody>
+          <a:bodyPr wrap="square" lIns="0" tIns="0" rIns="0" bIns="0" rtlCol="0" anchor="t"/>
+          <a:lstStyle/>
+          <a:p>
+            <a:pPr algn="l" indent="0" marL="0">
+              <a:lnSpc>
+                <a:spcPts val="1680"/>
+              </a:lnSpc>
+              <a:spcBef>
+                <a:spcPts val="300"/>
+              </a:spcBef>
+              <a:spcAft>
+                <a:spcPts val="300"/>
+              </a:spcAft>
+              <a:buNone/>
+            </a:pPr>
+            <a:r>
+              <a:rPr lang="en-US" sz="1200" dirty="0">
+                <a:solidFill>
+                  <a:srgbClr val="1C2833"/>
+                </a:solidFill>
+                <a:latin typeface="Arial" pitchFamily="34" charset="0"/>
+                <a:ea typeface="Arial" pitchFamily="34" charset="-122"/>
+                <a:cs typeface="Arial" pitchFamily="34" charset="-120"/>
+              </a:rPr>
+              <a:t>Middle ·  · IKS Curriculum</a:t>
+            </a:r>
+            <a:endParaRPr lang="en-US" sz="1200" dirty="0"/>
+          </a:p>
+        </p:txBody>
+      </p:sp>
+    </p:spTree>
+  </p:cSld>
+  <p:clrMapOvr>
+    <a:masterClrMapping/>
+  </p:clrMapOvr>
+</p:sld>
+</file>
+
+<file path=ppt/slides/slide14.xml><?xml version="1.0" encoding="utf-8"?>
+<p:sld xmlns:a="http://schemas.openxmlformats.org/drawingml/2006/main" xmlns:r="http://schemas.openxmlformats.org/officeDocument/2006/relationships" xmlns:p="http://schemas.openxmlformats.org/presentationml/2006/main">
+  <p:cSld name="Slide 14">
+    <p:bg>
+      <p:bgPr>
+        <a:solidFill>
+          <a:srgbClr val="FFFFFF"/>
+        </a:solidFill>
+      </p:bgPr>
+    </p:bg>
+    <p:spTree>
+      <p:nvGrpSpPr>
+        <p:cNvPr id="1" name=""/>
+        <p:cNvGrpSpPr/>
+        <p:nvPr/>
+      </p:nvGrpSpPr>
+      <p:grpSpPr>
+        <a:xfrm>
+          <a:off x="0" y="0"/>
+          <a:ext cx="0" cy="0"/>
+          <a:chOff x="0" y="0"/>
+          <a:chExt cx="0" cy="0"/>
+        </a:xfrm>
+      </p:grpSpPr>
+      <p:sp>
+        <p:nvSpPr>
+          <p:cNvPr id="2" name="Text 0"/>
+          <p:cNvSpPr/>
+          <p:nvPr/>
+        </p:nvSpPr>
+        <p:spPr>
+          <a:xfrm>
+            <a:off x="0" y="0"/>
+            <a:ext cx="9144000" cy="101501"/>
+          </a:xfrm>
+          <a:prstGeom prst="rect">
+            <a:avLst/>
+          </a:prstGeom>
+          <a:solidFill>
+            <a:srgbClr val="277884"/>
+          </a:solidFill>
+          <a:ln/>
+        </p:spPr>
+        <p:txBody>
+          <a:bodyPr wrap="square" rtlCol="0" anchor="ctr"/>
+          <a:lstStyle/>
+          <a:p>
+            <a:pPr indent="0" marL="0">
+              <a:buNone/>
+            </a:pPr>
+            <a:endParaRPr lang="en-US" dirty="0"/>
+          </a:p>
+        </p:txBody>
+      </p:sp>
+      <p:sp>
+        <p:nvSpPr>
+          <p:cNvPr id="3" name="Text 1"/>
+          <p:cNvSpPr/>
+          <p:nvPr/>
+        </p:nvSpPr>
+        <p:spPr>
+          <a:xfrm>
+            <a:off x="406301" y="457051"/>
+            <a:ext cx="8498026" cy="274290"/>
+          </a:xfrm>
+          <a:prstGeom prst="rect">
+            <a:avLst/>
+          </a:prstGeom>
+          <a:noFill/>
+          <a:ln/>
+        </p:spPr>
+        <p:txBody>
+          <a:bodyPr wrap="square" lIns="0" tIns="0" rIns="0" bIns="0" rtlCol="0" anchor="t"/>
+          <a:lstStyle/>
+          <a:p>
+            <a:pPr algn="l" indent="0" marL="0">
+              <a:lnSpc>
+                <a:spcPts val="2160"/>
+              </a:lnSpc>
+              <a:spcBef>
+                <a:spcPts val="600"/>
+              </a:spcBef>
+              <a:spcAft>
+                <a:spcPts val="800"/>
+              </a:spcAft>
+              <a:buNone/>
+            </a:pPr>
+            <a:r>
+              <a:rPr lang="en-US" sz="1800" b="1" dirty="0">
+                <a:solidFill>
+                  <a:srgbClr val="FE4447"/>
+                </a:solidFill>
+                <a:latin typeface="Georgia" pitchFamily="34" charset="0"/>
+                <a:ea typeface="Georgia" pitchFamily="34" charset="-122"/>
+                <a:cs typeface="Georgia" pitchFamily="34" charset="-120"/>
+              </a:rPr>
+              <a:t>Differentiation</a:t>
+            </a:r>
+            <a:endParaRPr lang="en-US" sz="1800" dirty="0"/>
+          </a:p>
+        </p:txBody>
+      </p:sp>
+      <p:sp>
+        <p:nvSpPr>
+          <p:cNvPr id="4" name="Text 2"/>
+          <p:cNvSpPr/>
+          <p:nvPr/>
+        </p:nvSpPr>
+        <p:spPr>
+          <a:xfrm>
+            <a:off x="634901" y="883593"/>
+            <a:ext cx="8102798" cy="937022"/>
+          </a:xfrm>
+          <a:prstGeom prst="rect">
+            <a:avLst/>
+          </a:prstGeom>
+          <a:noFill/>
+          <a:ln/>
+        </p:spPr>
+        <p:txBody>
+          <a:bodyPr wrap="square" lIns="0" tIns="0" rIns="0" bIns="0" rtlCol="0" anchor="t"/>
+          <a:lstStyle/>
+          <a:p>
+            <a:pPr algn="l" marL="342900" indent="-342900">
+              <a:lnSpc>
+                <a:spcPts val="1620"/>
+              </a:lnSpc>
+              <a:spcAft>
+                <a:spcPts val="300"/>
+              </a:spcAft>
+              <a:buSzPct val="100000"/>
+              <a:buChar char="•"/>
+            </a:pPr>
+            <a:r>
+              <a:rPr lang="en-US" sz="1200" b="1" dirty="0">
+                <a:solidFill>
+                  <a:srgbClr val="1C2833"/>
+                </a:solidFill>
+                <a:latin typeface="Arial" pitchFamily="34" charset="0"/>
+                <a:ea typeface="Arial" pitchFamily="34" charset="-122"/>
+                <a:cs typeface="Arial" pitchFamily="34" charset="-120"/>
+              </a:rPr>
+              <a:t>One tier up:</a:t>
+            </a:r>
+            <a:pPr algn="l" indent="0" marL="0">
+              <a:lnSpc>
+                <a:spcPts val="1620"/>
+              </a:lnSpc>
+              <a:spcAft>
+                <a:spcPts val="300"/>
+              </a:spcAft>
+              <a:buNone/>
+            </a:pPr>
+            <a:r>
+              <a:rPr lang="en-US" sz="1200" dirty="0">
+                <a:solidFill>
+                  <a:srgbClr val="1C2833"/>
+                </a:solidFill>
+                <a:latin typeface="Arial" pitchFamily="34" charset="0"/>
+                <a:ea typeface="Arial" pitchFamily="34" charset="-122"/>
+                <a:cs typeface="Arial" pitchFamily="34" charset="-120"/>
+              </a:rPr>
+              <a:t> Volunteer to present early in the running order — by doing so you set a tone of honesty (especially in the reflection) that helps the room. Bonus marks: nil. Bonus learning: real.</a:t>
+            </a:r>
+            <a:endParaRPr lang="en-US" sz="1200" dirty="0"/>
+          </a:p>
+          <a:p>
+            <a:pPr algn="l" marL="342900" indent="-342900">
+              <a:lnSpc>
+                <a:spcPts val="1620"/>
+              </a:lnSpc>
+              <a:spcAft>
+                <a:spcPts val="300"/>
+              </a:spcAft>
+              <a:buSzPct val="100000"/>
+              <a:buChar char="•"/>
+            </a:pPr>
+            <a:r>
+              <a:rPr lang="en-US" sz="1200" b="1" dirty="0">
+                <a:solidFill>
+                  <a:srgbClr val="1C2833"/>
+                </a:solidFill>
+                <a:latin typeface="Arial" pitchFamily="34" charset="0"/>
+                <a:ea typeface="Arial" pitchFamily="34" charset="-122"/>
+                <a:cs typeface="Arial" pitchFamily="34" charset="-120"/>
+              </a:rPr>
+              <a:t>One tier down:</a:t>
+            </a:r>
+            <a:pPr algn="l" indent="0" marL="0">
+              <a:lnSpc>
+                <a:spcPts val="1620"/>
+              </a:lnSpc>
+              <a:spcAft>
+                <a:spcPts val="300"/>
+              </a:spcAft>
+              <a:buNone/>
+            </a:pPr>
+            <a:r>
+              <a:rPr lang="en-US" sz="1200" dirty="0">
+                <a:solidFill>
+                  <a:srgbClr val="1C2833"/>
+                </a:solidFill>
+                <a:latin typeface="Arial" pitchFamily="34" charset="0"/>
+                <a:ea typeface="Arial" pitchFamily="34" charset="-122"/>
+                <a:cs typeface="Arial" pitchFamily="34" charset="-120"/>
+              </a:rPr>
+              <a:t> Recorded video presentation accepted (sent by Day 10 morning). Same rubric, same Q&amp;A in writing (one peer asks one written question, you reply with two sentences).</a:t>
+            </a:r>
+            <a:endParaRPr lang="en-US" sz="1200" dirty="0"/>
+          </a:p>
+        </p:txBody>
+      </p:sp>
+      <p:sp>
+        <p:nvSpPr>
+          <p:cNvPr id="5" name="Text 3"/>
+          <p:cNvSpPr/>
+          <p:nvPr/>
+        </p:nvSpPr>
+        <p:spPr>
+          <a:xfrm>
+            <a:off x="406301" y="4434929"/>
+            <a:ext cx="8498026" cy="213271"/>
+          </a:xfrm>
+          <a:prstGeom prst="rect">
+            <a:avLst/>
+          </a:prstGeom>
+          <a:noFill/>
+          <a:ln/>
+        </p:spPr>
+        <p:txBody>
+          <a:bodyPr wrap="square" lIns="0" tIns="0" rIns="0" bIns="0" rtlCol="0" anchor="t"/>
+          <a:lstStyle/>
+          <a:p>
+            <a:pPr algn="l" indent="0" marL="0">
+              <a:lnSpc>
+                <a:spcPts val="1680"/>
+              </a:lnSpc>
+              <a:spcBef>
+                <a:spcPts val="300"/>
+              </a:spcBef>
+              <a:spcAft>
+                <a:spcPts val="300"/>
+              </a:spcAft>
+              <a:buNone/>
+            </a:pPr>
+            <a:r>
+              <a:rPr lang="en-US" sz="1200" dirty="0">
+                <a:solidFill>
+                  <a:srgbClr val="1C2833"/>
+                </a:solidFill>
+                <a:latin typeface="Arial" pitchFamily="34" charset="0"/>
+                <a:ea typeface="Arial" pitchFamily="34" charset="-122"/>
+                <a:cs typeface="Arial" pitchFamily="34" charset="-120"/>
+              </a:rPr>
+              <a:t>Middle ·  · IKS Curriculum</a:t>
+            </a:r>
+            <a:endParaRPr lang="en-US" sz="1200" dirty="0"/>
+          </a:p>
+        </p:txBody>
+      </p:sp>
+    </p:spTree>
+  </p:cSld>
+  <p:clrMapOvr>
+    <a:masterClrMapping/>
+  </p:clrMapOvr>
+</p:sld>
+</file>
+
+<file path=ppt/slides/slide15.xml><?xml version="1.0" encoding="utf-8"?>
+<p:sld xmlns:a="http://schemas.openxmlformats.org/drawingml/2006/main" xmlns:r="http://schemas.openxmlformats.org/officeDocument/2006/relationships" xmlns:p="http://schemas.openxmlformats.org/presentationml/2006/main">
+  <p:cSld name="Slide 15">
+    <p:bg>
+      <p:bgPr>
+        <a:solidFill>
+          <a:srgbClr val="FFFFFF"/>
+        </a:solidFill>
+      </p:bgPr>
+    </p:bg>
+    <p:spTree>
+      <p:nvGrpSpPr>
+        <p:cNvPr id="1" name=""/>
+        <p:cNvGrpSpPr/>
+        <p:nvPr/>
+      </p:nvGrpSpPr>
+      <p:grpSpPr>
+        <a:xfrm>
+          <a:off x="0" y="0"/>
+          <a:ext cx="0" cy="0"/>
+          <a:chOff x="0" y="0"/>
+          <a:chExt cx="0" cy="0"/>
+        </a:xfrm>
+      </p:grpSpPr>
+      <p:sp>
+        <p:nvSpPr>
+          <p:cNvPr id="2" name="Text 0"/>
+          <p:cNvSpPr/>
+          <p:nvPr/>
+        </p:nvSpPr>
+        <p:spPr>
+          <a:xfrm>
+            <a:off x="0" y="0"/>
+            <a:ext cx="9144000" cy="101501"/>
+          </a:xfrm>
+          <a:prstGeom prst="rect">
+            <a:avLst/>
+          </a:prstGeom>
+          <a:solidFill>
+            <a:srgbClr val="277884"/>
+          </a:solidFill>
+          <a:ln/>
+        </p:spPr>
+        <p:txBody>
+          <a:bodyPr wrap="square" rtlCol="0" anchor="ctr"/>
+          <a:lstStyle/>
+          <a:p>
+            <a:pPr indent="0" marL="0">
+              <a:buNone/>
+            </a:pPr>
+            <a:endParaRPr lang="en-US" dirty="0"/>
+          </a:p>
+        </p:txBody>
+      </p:sp>
+      <p:sp>
+        <p:nvSpPr>
+          <p:cNvPr id="3" name="Text 1"/>
+          <p:cNvSpPr/>
+          <p:nvPr/>
+        </p:nvSpPr>
+        <p:spPr>
+          <a:xfrm>
+            <a:off x="406301" y="457051"/>
+            <a:ext cx="8498026" cy="274290"/>
+          </a:xfrm>
+          <a:prstGeom prst="rect">
+            <a:avLst/>
+          </a:prstGeom>
+          <a:noFill/>
+          <a:ln/>
+        </p:spPr>
+        <p:txBody>
+          <a:bodyPr wrap="square" lIns="0" tIns="0" rIns="0" bIns="0" rtlCol="0" anchor="t"/>
+          <a:lstStyle/>
+          <a:p>
+            <a:pPr algn="l" indent="0" marL="0">
+              <a:lnSpc>
+                <a:spcPts val="2160"/>
+              </a:lnSpc>
+              <a:spcBef>
+                <a:spcPts val="600"/>
+              </a:spcBef>
+              <a:spcAft>
+                <a:spcPts val="800"/>
+              </a:spcAft>
+              <a:buNone/>
+            </a:pPr>
+            <a:r>
+              <a:rPr lang="en-US" sz="1800" b="1" dirty="0">
+                <a:solidFill>
+                  <a:srgbClr val="FE4447"/>
+                </a:solidFill>
+                <a:latin typeface="Georgia" pitchFamily="34" charset="0"/>
+                <a:ea typeface="Georgia" pitchFamily="34" charset="-122"/>
+                <a:cs typeface="Georgia" pitchFamily="34" charset="-120"/>
+              </a:rPr>
+              <a:t>Teacher notes</a:t>
+            </a:r>
+            <a:endParaRPr lang="en-US" sz="1800" dirty="0"/>
+          </a:p>
+        </p:txBody>
+      </p:sp>
+      <p:sp>
+        <p:nvSpPr>
+          <p:cNvPr id="4" name="Text 2"/>
+          <p:cNvSpPr/>
+          <p:nvPr/>
+        </p:nvSpPr>
+        <p:spPr>
+          <a:xfrm>
+            <a:off x="634901" y="883593"/>
+            <a:ext cx="8102798" cy="1630263"/>
+          </a:xfrm>
+          <a:prstGeom prst="rect">
+            <a:avLst/>
+          </a:prstGeom>
+          <a:noFill/>
+          <a:ln/>
+        </p:spPr>
+        <p:txBody>
+          <a:bodyPr wrap="square" lIns="0" tIns="0" rIns="0" bIns="0" rtlCol="0" anchor="t"/>
+          <a:lstStyle/>
+          <a:p>
+            <a:pPr algn="l" marL="342900" indent="-342900">
+              <a:lnSpc>
+                <a:spcPts val="1620"/>
+              </a:lnSpc>
+              <a:spcAft>
+                <a:spcPts val="300"/>
+              </a:spcAft>
+              <a:buSzPct val="100000"/>
+              <a:buChar char="•"/>
+            </a:pPr>
+            <a:r>
+              <a:rPr lang="en-US" sz="1200" b="1" dirty="0">
+                <a:solidFill>
+                  <a:srgbClr val="1C2833"/>
+                </a:solidFill>
+                <a:latin typeface="Arial" pitchFamily="34" charset="0"/>
+                <a:ea typeface="Arial" pitchFamily="34" charset="-122"/>
+                <a:cs typeface="Arial" pitchFamily="34" charset="-120"/>
+              </a:rPr>
+              <a:t>Run the timer strictly.</a:t>
+            </a:r>
+            <a:pPr algn="l" indent="0" marL="0">
+              <a:lnSpc>
+                <a:spcPts val="1620"/>
+              </a:lnSpc>
+              <a:spcAft>
+                <a:spcPts val="300"/>
+              </a:spcAft>
+              <a:buNone/>
+            </a:pPr>
+            <a:r>
+              <a:rPr lang="en-US" sz="1200" dirty="0">
+                <a:solidFill>
+                  <a:srgbClr val="1C2833"/>
+                </a:solidFill>
+                <a:latin typeface="Arial" pitchFamily="34" charset="0"/>
+                <a:ea typeface="Arial" pitchFamily="34" charset="-122"/>
+                <a:cs typeface="Arial" pitchFamily="34" charset="-120"/>
+              </a:rPr>
+              <a:t> A 5:30 share embarrasses the next presenter who has only 4. The discipline of compression is one of the lessons.</a:t>
+            </a:r>
+            <a:endParaRPr lang="en-US" sz="1200" dirty="0"/>
+          </a:p>
+          <a:p>
+            <a:pPr algn="l" marL="342900" indent="-342900">
+              <a:lnSpc>
+                <a:spcPts val="1620"/>
+              </a:lnSpc>
+              <a:spcAft>
+                <a:spcPts val="300"/>
+              </a:spcAft>
+              <a:buSzPct val="100000"/>
+              <a:buChar char="•"/>
+            </a:pPr>
+            <a:r>
+              <a:rPr lang="en-US" sz="1200" b="1" dirty="0">
+                <a:solidFill>
+                  <a:srgbClr val="1C2833"/>
+                </a:solidFill>
+                <a:latin typeface="Arial" pitchFamily="34" charset="0"/>
+                <a:ea typeface="Arial" pitchFamily="34" charset="-122"/>
+                <a:cs typeface="Arial" pitchFamily="34" charset="-120"/>
+              </a:rPr>
+              <a:t>Mark in real time.</a:t>
+            </a:r>
+            <a:pPr algn="l" indent="0" marL="0">
+              <a:lnSpc>
+                <a:spcPts val="1620"/>
+              </a:lnSpc>
+              <a:spcAft>
+                <a:spcPts val="300"/>
+              </a:spcAft>
+              <a:buNone/>
+            </a:pPr>
+            <a:r>
+              <a:rPr lang="en-US" sz="1200" dirty="0">
+                <a:solidFill>
+                  <a:srgbClr val="1C2833"/>
+                </a:solidFill>
+                <a:latin typeface="Arial" pitchFamily="34" charset="0"/>
+                <a:ea typeface="Arial" pitchFamily="34" charset="-122"/>
+                <a:cs typeface="Arial" pitchFamily="34" charset="-120"/>
+              </a:rPr>
+              <a:t> Use a clipboard with the rubric printed. Quick numbers, no comments yet — those come later.</a:t>
+            </a:r>
+            <a:endParaRPr lang="en-US" sz="1200" dirty="0"/>
+          </a:p>
+          <a:p>
+            <a:pPr algn="l" marL="342900" indent="-342900">
+              <a:lnSpc>
+                <a:spcPts val="1620"/>
+              </a:lnSpc>
+              <a:spcAft>
+                <a:spcPts val="300"/>
+              </a:spcAft>
+              <a:buSzPct val="100000"/>
+              <a:buChar char="•"/>
+            </a:pPr>
+            <a:r>
+              <a:rPr lang="en-US" sz="1200" b="1" dirty="0">
+                <a:solidFill>
+                  <a:srgbClr val="1C2833"/>
+                </a:solidFill>
+                <a:latin typeface="Arial" pitchFamily="34" charset="0"/>
+                <a:ea typeface="Arial" pitchFamily="34" charset="-122"/>
+                <a:cs typeface="Arial" pitchFamily="34" charset="-120"/>
+              </a:rPr>
+              <a:t>The Q&amp;A discipline is on the audience too.</a:t>
+            </a:r>
+            <a:pPr algn="l" indent="0" marL="0">
+              <a:lnSpc>
+                <a:spcPts val="1620"/>
+              </a:lnSpc>
+              <a:spcAft>
+                <a:spcPts val="300"/>
+              </a:spcAft>
+              <a:buNone/>
+            </a:pPr>
+            <a:r>
+              <a:rPr lang="en-US" sz="1200" dirty="0">
+                <a:solidFill>
+                  <a:srgbClr val="1C2833"/>
+                </a:solidFill>
+                <a:latin typeface="Arial" pitchFamily="34" charset="0"/>
+                <a:ea typeface="Arial" pitchFamily="34" charset="-122"/>
+                <a:cs typeface="Arial" pitchFamily="34" charset="-120"/>
+              </a:rPr>
+              <a:t> If a parent question goes too long, gently cut: </a:t>
+            </a:r>
+            <a:pPr algn="l" indent="0" marL="0">
+              <a:lnSpc>
+                <a:spcPts val="1620"/>
+              </a:lnSpc>
+              <a:spcAft>
+                <a:spcPts val="300"/>
+              </a:spcAft>
+              <a:buNone/>
+            </a:pPr>
+            <a:r>
+              <a:rPr lang="en-US" sz="1200" i="1" dirty="0">
+                <a:solidFill>
+                  <a:srgbClr val="1C2833"/>
+                </a:solidFill>
+                <a:latin typeface="Arial" pitchFamily="34" charset="0"/>
+                <a:ea typeface="Arial" pitchFamily="34" charset="-122"/>
+                <a:cs typeface="Arial" pitchFamily="34" charset="-120"/>
+              </a:rPr>
+              <a:t>"Thank you, let's hold further questions for after."</a:t>
+            </a:r>
+            <a:endParaRPr lang="en-US" sz="1200" dirty="0"/>
+          </a:p>
+          <a:p>
+            <a:pPr algn="l" marL="342900" indent="-342900">
+              <a:lnSpc>
+                <a:spcPts val="1620"/>
+              </a:lnSpc>
+              <a:spcAft>
+                <a:spcPts val="300"/>
+              </a:spcAft>
+              <a:buSzPct val="100000"/>
+              <a:buChar char="•"/>
+            </a:pPr>
+            <a:r>
+              <a:rPr lang="en-US" sz="1200" b="1" dirty="0">
+                <a:solidFill>
+                  <a:srgbClr val="1C2833"/>
+                </a:solidFill>
+                <a:latin typeface="Arial" pitchFamily="34" charset="0"/>
+                <a:ea typeface="Arial" pitchFamily="34" charset="-122"/>
+                <a:cs typeface="Arial" pitchFamily="34" charset="-120"/>
+              </a:rPr>
+              <a:t>The summative quiz is not the grade-driver</a:t>
+            </a:r>
+            <a:pPr algn="l" indent="0" marL="0">
+              <a:lnSpc>
+                <a:spcPts val="1620"/>
+              </a:lnSpc>
+              <a:spcAft>
+                <a:spcPts val="300"/>
+              </a:spcAft>
+              <a:buNone/>
+            </a:pPr>
+            <a:r>
+              <a:rPr lang="en-US" sz="1200" dirty="0">
+                <a:solidFill>
+                  <a:srgbClr val="1C2833"/>
+                </a:solidFill>
+                <a:latin typeface="Arial" pitchFamily="34" charset="0"/>
+                <a:ea typeface="Arial" pitchFamily="34" charset="-122"/>
+                <a:cs typeface="Arial" pitchFamily="34" charset="-120"/>
+              </a:rPr>
+              <a:t> — the project + rubric is. The quiz is a final check that the </a:t>
+            </a:r>
+            <a:pPr algn="l" indent="0" marL="0">
+              <a:lnSpc>
+                <a:spcPts val="1620"/>
+              </a:lnSpc>
+              <a:spcAft>
+                <a:spcPts val="300"/>
+              </a:spcAft>
+              <a:buNone/>
+            </a:pPr>
+            <a:r>
+              <a:rPr lang="en-US" sz="1200" i="1" dirty="0">
+                <a:solidFill>
+                  <a:srgbClr val="1C2833"/>
+                </a:solidFill>
+                <a:latin typeface="Arial" pitchFamily="34" charset="0"/>
+                <a:ea typeface="Arial" pitchFamily="34" charset="-122"/>
+                <a:cs typeface="Arial" pitchFamily="34" charset="-120"/>
+              </a:rPr>
+              <a:t>process language</a:t>
+            </a:r>
+            <a:pPr algn="l" indent="0" marL="0">
+              <a:lnSpc>
+                <a:spcPts val="1620"/>
+              </a:lnSpc>
+              <a:spcAft>
+                <a:spcPts val="300"/>
+              </a:spcAft>
+              <a:buNone/>
+            </a:pPr>
+            <a:r>
+              <a:rPr lang="en-US" sz="1200" dirty="0">
+                <a:solidFill>
+                  <a:srgbClr val="1C2833"/>
+                </a:solidFill>
+                <a:latin typeface="Arial" pitchFamily="34" charset="0"/>
+                <a:ea typeface="Arial" pitchFamily="34" charset="-122"/>
+                <a:cs typeface="Arial" pitchFamily="34" charset="-120"/>
+              </a:rPr>
+              <a:t> of the module landed (the six phases, the two new Sanskrit terms, the citation rule, the honesty rule).</a:t>
+            </a:r>
+            <a:endParaRPr lang="en-US" sz="1200" dirty="0"/>
+          </a:p>
+        </p:txBody>
+      </p:sp>
+      <p:sp>
+        <p:nvSpPr>
+          <p:cNvPr id="5" name="Text 3"/>
+          <p:cNvSpPr/>
+          <p:nvPr/>
+        </p:nvSpPr>
+        <p:spPr>
+          <a:xfrm>
+            <a:off x="406301" y="4434929"/>
+            <a:ext cx="8498026" cy="213271"/>
+          </a:xfrm>
+          <a:prstGeom prst="rect">
+            <a:avLst/>
+          </a:prstGeom>
+          <a:noFill/>
+          <a:ln/>
+        </p:spPr>
+        <p:txBody>
+          <a:bodyPr wrap="square" lIns="0" tIns="0" rIns="0" bIns="0" rtlCol="0" anchor="t"/>
+          <a:lstStyle/>
+          <a:p>
+            <a:pPr algn="l" indent="0" marL="0">
+              <a:lnSpc>
+                <a:spcPts val="1680"/>
+              </a:lnSpc>
+              <a:spcBef>
+                <a:spcPts val="300"/>
+              </a:spcBef>
+              <a:spcAft>
+                <a:spcPts val="300"/>
+              </a:spcAft>
+              <a:buNone/>
+            </a:pPr>
+            <a:r>
+              <a:rPr lang="en-US" sz="1200" dirty="0">
+                <a:solidFill>
+                  <a:srgbClr val="1C2833"/>
+                </a:solidFill>
+                <a:latin typeface="Arial" pitchFamily="34" charset="0"/>
+                <a:ea typeface="Arial" pitchFamily="34" charset="-122"/>
+                <a:cs typeface="Arial" pitchFamily="34" charset="-120"/>
+              </a:rPr>
+              <a:t>Middle ·  · IKS Curriculum</a:t>
+            </a:r>
+            <a:endParaRPr lang="en-US" sz="1200" dirty="0"/>
+          </a:p>
+        </p:txBody>
+      </p:sp>
+    </p:spTree>
+  </p:cSld>
+  <p:clrMapOvr>
+    <a:masterClrMapping/>
+  </p:clrMapOvr>
+</p:sld>
+</file>
+
+<file path=ppt/slides/slide16.xml><?xml version="1.0" encoding="utf-8"?>
+<p:sld xmlns:a="http://schemas.openxmlformats.org/drawingml/2006/main" xmlns:r="http://schemas.openxmlformats.org/officeDocument/2006/relationships" xmlns:p="http://schemas.openxmlformats.org/presentationml/2006/main">
+  <p:cSld name="Slide 16">
+    <p:bg>
+      <p:bgPr>
+        <a:solidFill>
+          <a:srgbClr val="FFFFFF"/>
+        </a:solidFill>
+      </p:bgPr>
+    </p:bg>
+    <p:spTree>
+      <p:nvGrpSpPr>
+        <p:cNvPr id="1" name=""/>
+        <p:cNvGrpSpPr/>
+        <p:nvPr/>
+      </p:nvGrpSpPr>
+      <p:grpSpPr>
+        <a:xfrm>
+          <a:off x="0" y="0"/>
+          <a:ext cx="0" cy="0"/>
+          <a:chOff x="0" y="0"/>
+          <a:chExt cx="0" cy="0"/>
+        </a:xfrm>
+      </p:grpSpPr>
+      <p:sp>
+        <p:nvSpPr>
+          <p:cNvPr id="2" name="Text 0"/>
+          <p:cNvSpPr/>
+          <p:nvPr/>
+        </p:nvSpPr>
+        <p:spPr>
+          <a:xfrm>
+            <a:off x="0" y="0"/>
+            <a:ext cx="9144000" cy="101501"/>
+          </a:xfrm>
+          <a:prstGeom prst="rect">
+            <a:avLst/>
+          </a:prstGeom>
+          <a:solidFill>
+            <a:srgbClr val="277884"/>
+          </a:solidFill>
+          <a:ln/>
+        </p:spPr>
+        <p:txBody>
+          <a:bodyPr wrap="square" rtlCol="0" anchor="ctr"/>
+          <a:lstStyle/>
+          <a:p>
+            <a:pPr indent="0" marL="0">
+              <a:buNone/>
+            </a:pPr>
+            <a:endParaRPr lang="en-US" dirty="0"/>
+          </a:p>
+        </p:txBody>
+      </p:sp>
+      <p:sp>
+        <p:nvSpPr>
+          <p:cNvPr id="3" name="Text 1"/>
+          <p:cNvSpPr/>
+          <p:nvPr/>
+        </p:nvSpPr>
+        <p:spPr>
+          <a:xfrm>
+            <a:off x="406301" y="457051"/>
+            <a:ext cx="8498026" cy="274290"/>
+          </a:xfrm>
+          <a:prstGeom prst="rect">
+            <a:avLst/>
+          </a:prstGeom>
+          <a:noFill/>
+          <a:ln/>
+        </p:spPr>
+        <p:txBody>
+          <a:bodyPr wrap="square" lIns="0" tIns="0" rIns="0" bIns="0" rtlCol="0" anchor="t"/>
+          <a:lstStyle/>
+          <a:p>
+            <a:pPr algn="l" indent="0" marL="0">
+              <a:lnSpc>
+                <a:spcPts val="2160"/>
+              </a:lnSpc>
+              <a:spcBef>
+                <a:spcPts val="600"/>
+              </a:spcBef>
+              <a:spcAft>
+                <a:spcPts val="800"/>
+              </a:spcAft>
+              <a:buNone/>
+            </a:pPr>
+            <a:r>
+              <a:rPr lang="en-US" sz="1800" b="1" dirty="0">
+                <a:solidFill>
+                  <a:srgbClr val="FE4447"/>
+                </a:solidFill>
+                <a:latin typeface="Georgia" pitchFamily="34" charset="0"/>
+                <a:ea typeface="Georgia" pitchFamily="34" charset="-122"/>
+                <a:cs typeface="Georgia" pitchFamily="34" charset="-120"/>
+              </a:rPr>
+              <a:t>Teacher notes (cont.)</a:t>
+            </a:r>
+            <a:endParaRPr lang="en-US" sz="1800" dirty="0"/>
+          </a:p>
+        </p:txBody>
+      </p:sp>
+      <p:sp>
+        <p:nvSpPr>
+          <p:cNvPr id="4" name="Text 2"/>
+          <p:cNvSpPr/>
+          <p:nvPr/>
+        </p:nvSpPr>
+        <p:spPr>
+          <a:xfrm>
+            <a:off x="634901" y="883593"/>
+            <a:ext cx="8102798" cy="731341"/>
+          </a:xfrm>
+          <a:prstGeom prst="rect">
+            <a:avLst/>
+          </a:prstGeom>
+          <a:noFill/>
+          <a:ln/>
+        </p:spPr>
+        <p:txBody>
+          <a:bodyPr wrap="square" lIns="0" tIns="0" rIns="0" bIns="0" rtlCol="0" anchor="t"/>
+          <a:lstStyle/>
+          <a:p>
+            <a:pPr algn="l" marL="342900" indent="-342900">
+              <a:lnSpc>
+                <a:spcPts val="1620"/>
+              </a:lnSpc>
+              <a:spcAft>
+                <a:spcPts val="300"/>
+              </a:spcAft>
+              <a:buSzPct val="100000"/>
+              <a:buChar char="•"/>
+            </a:pPr>
+            <a:r>
+              <a:rPr lang="en-US" sz="1200" dirty="0">
+                <a:solidFill>
+                  <a:srgbClr val="1C2833"/>
+                </a:solidFill>
+                <a:latin typeface="Arial" pitchFamily="34" charset="0"/>
+                <a:ea typeface="Arial" pitchFamily="34" charset="-122"/>
+                <a:cs typeface="Arial" pitchFamily="34" charset="-120"/>
+              </a:rPr>
+              <a:t>After class, photograph every artefact + the marked rubric + the documentation, one folder per student. This is your evidence for the school records and for next year's exemplars.</a:t>
+            </a:r>
+            <a:endParaRPr lang="en-US" sz="1200" dirty="0"/>
+          </a:p>
+          <a:p>
+            <a:pPr algn="l" marL="342900" indent="-342900">
+              <a:lnSpc>
+                <a:spcPts val="1620"/>
+              </a:lnSpc>
+              <a:spcAft>
+                <a:spcPts val="300"/>
+              </a:spcAft>
+              <a:buSzPct val="100000"/>
+              <a:buChar char="•"/>
+            </a:pPr>
+            <a:r>
+              <a:rPr lang="en-US" sz="1200" dirty="0">
+                <a:solidFill>
+                  <a:srgbClr val="1C2833"/>
+                </a:solidFill>
+                <a:latin typeface="Arial" pitchFamily="34" charset="0"/>
+                <a:ea typeface="Arial" pitchFamily="34" charset="-122"/>
+                <a:cs typeface="Arial" pitchFamily="34" charset="-120"/>
+              </a:rPr>
+              <a:t>Within one week, return marked rubrics with one paragraph of written feedback each.</a:t>
+            </a:r>
+            <a:endParaRPr lang="en-US" sz="1200" dirty="0"/>
+          </a:p>
+        </p:txBody>
+      </p:sp>
+      <p:sp>
+        <p:nvSpPr>
+          <p:cNvPr id="5" name="Text 3"/>
+          <p:cNvSpPr/>
+          <p:nvPr/>
+        </p:nvSpPr>
+        <p:spPr>
+          <a:xfrm>
+            <a:off x="406301" y="4434929"/>
+            <a:ext cx="8498026" cy="213271"/>
+          </a:xfrm>
+          <a:prstGeom prst="rect">
+            <a:avLst/>
+          </a:prstGeom>
+          <a:noFill/>
+          <a:ln/>
+        </p:spPr>
+        <p:txBody>
+          <a:bodyPr wrap="square" lIns="0" tIns="0" rIns="0" bIns="0" rtlCol="0" anchor="t"/>
+          <a:lstStyle/>
+          <a:p>
+            <a:pPr algn="l" indent="0" marL="0">
+              <a:lnSpc>
+                <a:spcPts val="1680"/>
+              </a:lnSpc>
+              <a:spcBef>
+                <a:spcPts val="300"/>
+              </a:spcBef>
+              <a:spcAft>
+                <a:spcPts val="300"/>
+              </a:spcAft>
+              <a:buNone/>
+            </a:pPr>
+            <a:r>
+              <a:rPr lang="en-US" sz="1200" dirty="0">
+                <a:solidFill>
+                  <a:srgbClr val="1C2833"/>
+                </a:solidFill>
+                <a:latin typeface="Arial" pitchFamily="34" charset="0"/>
+                <a:ea typeface="Arial" pitchFamily="34" charset="-122"/>
+                <a:cs typeface="Arial" pitchFamily="34" charset="-120"/>
+              </a:rPr>
+              <a:t>Middle ·  · IKS Curriculum</a:t>
+            </a:r>
+            <a:endParaRPr lang="en-US" sz="1200" dirty="0"/>
+          </a:p>
+        </p:txBody>
+      </p:sp>
+    </p:spTree>
+  </p:cSld>
+  <p:clrMapOvr>
+    <a:masterClrMapping/>
+  </p:clrMapOvr>
+</p:sld>
+</file>
+
+<file path=ppt/slides/slide17.xml><?xml version="1.0" encoding="utf-8"?>
+<p:sld xmlns:a="http://schemas.openxmlformats.org/drawingml/2006/main" xmlns:r="http://schemas.openxmlformats.org/officeDocument/2006/relationships" xmlns:p="http://schemas.openxmlformats.org/presentationml/2006/main">
+  <p:cSld name="Slide 17">
+    <p:bg>
+      <p:bgPr>
+        <a:solidFill>
+          <a:srgbClr val="FFFFFF"/>
+        </a:solidFill>
+      </p:bgPr>
+    </p:bg>
+    <p:spTree>
+      <p:nvGrpSpPr>
+        <p:cNvPr id="1" name=""/>
+        <p:cNvGrpSpPr/>
+        <p:nvPr/>
+      </p:nvGrpSpPr>
+      <p:grpSpPr>
+        <a:xfrm>
+          <a:off x="0" y="0"/>
+          <a:ext cx="0" cy="0"/>
+          <a:chOff x="0" y="0"/>
+          <a:chExt cx="0" cy="0"/>
+        </a:xfrm>
+      </p:grpSpPr>
+      <p:sp>
+        <p:nvSpPr>
+          <p:cNvPr id="2" name="Text 0"/>
+          <p:cNvSpPr/>
+          <p:nvPr/>
+        </p:nvSpPr>
+        <p:spPr>
+          <a:xfrm>
+            <a:off x="0" y="0"/>
+            <a:ext cx="9144000" cy="101501"/>
+          </a:xfrm>
+          <a:prstGeom prst="rect">
+            <a:avLst/>
+          </a:prstGeom>
+          <a:solidFill>
+            <a:srgbClr val="277884"/>
+          </a:solidFill>
+          <a:ln/>
+        </p:spPr>
+        <p:txBody>
+          <a:bodyPr wrap="square" rtlCol="0" anchor="ctr"/>
+          <a:lstStyle/>
+          <a:p>
+            <a:pPr indent="0" marL="0">
+              <a:buNone/>
+            </a:pPr>
+            <a:endParaRPr lang="en-US" dirty="0"/>
+          </a:p>
+        </p:txBody>
+      </p:sp>
+      <p:sp>
+        <p:nvSpPr>
+          <p:cNvPr id="3" name="Text 1"/>
+          <p:cNvSpPr/>
+          <p:nvPr/>
+        </p:nvSpPr>
+        <p:spPr>
+          <a:xfrm>
+            <a:off x="406301" y="457051"/>
+            <a:ext cx="8498026" cy="274290"/>
+          </a:xfrm>
+          <a:prstGeom prst="rect">
+            <a:avLst/>
+          </a:prstGeom>
+          <a:noFill/>
+          <a:ln/>
+        </p:spPr>
+        <p:txBody>
+          <a:bodyPr wrap="square" lIns="0" tIns="0" rIns="0" bIns="0" rtlCol="0" anchor="t"/>
+          <a:lstStyle/>
+          <a:p>
+            <a:pPr algn="l" indent="0" marL="0">
+              <a:lnSpc>
+                <a:spcPts val="2160"/>
+              </a:lnSpc>
+              <a:spcBef>
+                <a:spcPts val="600"/>
+              </a:spcBef>
+              <a:spcAft>
+                <a:spcPts val="800"/>
+              </a:spcAft>
+              <a:buNone/>
+            </a:pPr>
+            <a:r>
+              <a:rPr lang="en-US" sz="1800" b="1" dirty="0">
+                <a:solidFill>
+                  <a:srgbClr val="FE4447"/>
+                </a:solidFill>
+                <a:latin typeface="Georgia" pitchFamily="34" charset="0"/>
+                <a:ea typeface="Georgia" pitchFamily="34" charset="-122"/>
+                <a:cs typeface="Georgia" pitchFamily="34" charset="-120"/>
+              </a:rPr>
               <a:t>Citation(s) used in this lesson</a:t>
             </a:r>
             <a:endParaRPr lang="en-US" sz="1800" dirty="0"/>
@@ -3493,8 +5763,8 @@
         </p:nvSpPr>
         <p:spPr>
           <a:xfrm>
-            <a:off x="406301" y="870942"/>
-            <a:ext cx="8498026" cy="426541"/>
+            <a:off x="634901" y="883593"/>
+            <a:ext cx="8102798" cy="487561"/>
           </a:xfrm>
           <a:prstGeom prst="rect">
             <a:avLst/>
@@ -3506,17 +5776,15 @@
           <a:bodyPr wrap="square" lIns="0" tIns="0" rIns="0" bIns="0" rtlCol="0" anchor="t"/>
           <a:lstStyle/>
           <a:p>
-            <a:pPr algn="l" indent="0" marL="0">
-              <a:lnSpc>
-                <a:spcPts val="1680"/>
-              </a:lnSpc>
-              <a:spcBef>
-                <a:spcPts val="300"/>
-              </a:spcBef>
-              <a:spcAft>
-                <a:spcPts val="300"/>
-              </a:spcAft>
-              <a:buNone/>
+            <a:pPr algn="l" marL="342900" indent="-342900">
+              <a:lnSpc>
+                <a:spcPts val="1620"/>
+              </a:lnSpc>
+              <a:spcAft>
+                <a:spcPts val="300"/>
+              </a:spcAft>
+              <a:buSzPct val="100000"/>
+              <a:buChar char="•"/>
             </a:pPr>
             <a:r>
               <a:rPr lang="en-US" sz="1200" dirty="0">
@@ -3527,15 +5795,12 @@
                 <a:ea typeface="Arial" pitchFamily="34" charset="-122"/>
                 <a:cs typeface="Arial" pitchFamily="34" charset="-120"/>
               </a:rPr>
-              <a:t>– The closing line </a:t>
-            </a:r>
-            <a:pPr algn="l" indent="0" marL="0">
-              <a:lnSpc>
-                <a:spcPts val="1680"/>
-              </a:lnSpc>
-              <a:spcBef>
-                <a:spcPts val="300"/>
-              </a:spcBef>
+              <a:t>The closing line </a:t>
+            </a:r>
+            <a:pPr algn="l" indent="0" marL="0">
+              <a:lnSpc>
+                <a:spcPts val="1620"/>
+              </a:lnSpc>
               <a:spcAft>
                 <a:spcPts val="300"/>
               </a:spcAft>
@@ -3554,11 +5819,8 @@
             </a:r>
             <a:pPr algn="l" indent="0" marL="0">
               <a:lnSpc>
-                <a:spcPts val="1680"/>
-              </a:lnSpc>
-              <a:spcBef>
-                <a:spcPts val="300"/>
-              </a:spcBef>
+                <a:spcPts val="1620"/>
+              </a:lnSpc>
               <a:spcAft>
                 <a:spcPts val="300"/>
               </a:spcAft>
@@ -3577,11 +5839,8 @@
             </a:r>
             <a:pPr algn="l" indent="0" marL="0">
               <a:lnSpc>
-                <a:spcPts val="1680"/>
-              </a:lnSpc>
-              <a:spcBef>
-                <a:spcPts val="300"/>
-              </a:spcBef>
+                <a:spcPts val="1620"/>
+              </a:lnSpc>
               <a:spcAft>
                 <a:spcPts val="300"/>
               </a:spcAft>
@@ -3600,11 +5859,8 @@
             </a:r>
             <a:pPr algn="l" indent="0" marL="0">
               <a:lnSpc>
-                <a:spcPts val="1680"/>
-              </a:lnSpc>
-              <a:spcBef>
-                <a:spcPts val="300"/>
-              </a:spcBef>
+                <a:spcPts val="1620"/>
+              </a:lnSpc>
               <a:spcAft>
                 <a:spcPts val="300"/>
               </a:spcAft>
@@ -3623,11 +5879,8 @@
             </a:r>
             <a:pPr algn="l" indent="0" marL="0">
               <a:lnSpc>
-                <a:spcPts val="1680"/>
-              </a:lnSpc>
-              <a:spcBef>
-                <a:spcPts val="300"/>
-              </a:spcBef>
+                <a:spcPts val="1620"/>
+              </a:lnSpc>
               <a:spcAft>
                 <a:spcPts val="300"/>
               </a:spcAft>
@@ -3646,11 +5899,8 @@
             </a:r>
             <a:pPr algn="l" indent="0" marL="0">
               <a:lnSpc>
-                <a:spcPts val="1680"/>
-              </a:lnSpc>
-              <a:spcBef>
-                <a:spcPts val="300"/>
-              </a:spcBef>
+                <a:spcPts val="1620"/>
+              </a:lnSpc>
               <a:spcAft>
                 <a:spcPts val="300"/>
               </a:spcAft>
@@ -3823,7 +6073,7 @@
                 <a:ea typeface="Georgia" pitchFamily="34" charset="-122"/>
                 <a:cs typeface="Georgia" pitchFamily="34" charset="-120"/>
               </a:rPr>
-              <a:t>Materials</a:t>
+              <a:t>Learning objective</a:t>
             </a:r>
             <a:endParaRPr lang="en-US" sz="1800" dirty="0"/>
           </a:p>
@@ -3838,7 +6088,7 @@
         <p:spPr>
           <a:xfrm>
             <a:off x="406301" y="870942"/>
-            <a:ext cx="8498026" cy="872133"/>
+            <a:ext cx="8498026" cy="426541"/>
           </a:xfrm>
           <a:prstGeom prst="rect">
             <a:avLst/>
@@ -3871,237 +6121,7 @@
                 <a:ea typeface="Arial" pitchFamily="34" charset="-122"/>
                 <a:cs typeface="Arial" pitchFamily="34" charset="-120"/>
               </a:rPr>
-              <a:t>– A presentation space — front of room or library / hall, set up by Day 9 evening – Timer visible to presenter (a large countdown on the screen helps) – The full </a:t>
-            </a:r>
-            <a:pPr algn="l" indent="0" marL="0">
-              <a:lnSpc>
-                <a:spcPts val="1680"/>
-              </a:lnSpc>
-              <a:spcBef>
-                <a:spcPts val="300"/>
-              </a:spcBef>
-              <a:spcAft>
-                <a:spcPts val="300"/>
-              </a:spcAft>
-              <a:buNone/>
-            </a:pPr>
-            <a:r>
-              <a:rPr lang="en-US" sz="1200" b="1" dirty="0">
-                <a:solidFill>
-                  <a:srgbClr val="1C2833"/>
-                </a:solidFill>
-                <a:latin typeface="Arial" pitchFamily="34" charset="0"/>
-                <a:ea typeface="Arial" pitchFamily="34" charset="-122"/>
-                <a:cs typeface="Arial" pitchFamily="34" charset="-120"/>
-              </a:rPr>
-              <a:t>rubric</a:t>
-            </a:r>
-            <a:pPr algn="l" indent="0" marL="0">
-              <a:lnSpc>
-                <a:spcPts val="1680"/>
-              </a:lnSpc>
-              <a:spcBef>
-                <a:spcPts val="300"/>
-              </a:spcBef>
-              <a:spcAft>
-                <a:spcPts val="300"/>
-              </a:spcAft>
-              <a:buNone/>
-            </a:pPr>
-            <a:r>
-              <a:rPr lang="en-US" sz="1200" dirty="0">
-                <a:solidFill>
-                  <a:srgbClr val="1C2833"/>
-                </a:solidFill>
-                <a:latin typeface="Arial" pitchFamily="34" charset="0"/>
-                <a:ea typeface="Arial" pitchFamily="34" charset="-122"/>
-                <a:cs typeface="Arial" pitchFamily="34" charset="-120"/>
-              </a:rPr>
-              <a:t> (</a:t>
-            </a:r>
-            <a:pPr algn="l" indent="0" marL="0">
-              <a:lnSpc>
-                <a:spcPts val="1680"/>
-              </a:lnSpc>
-              <a:spcBef>
-                <a:spcPts val="300"/>
-              </a:spcBef>
-              <a:spcAft>
-                <a:spcPts val="300"/>
-              </a:spcAft>
-              <a:buNone/>
-            </a:pPr>
-            <a:r>
-              <a:rPr lang="en-US" sz="1200" dirty="0">
-                <a:solidFill>
-                  <a:srgbClr val="1C2833"/>
-                </a:solidFill>
-                <a:latin typeface="Arial" pitchFamily="34" charset="0"/>
-                <a:ea typeface="Arial" pitchFamily="34" charset="-122"/>
-                <a:cs typeface="Arial" pitchFamily="34" charset="-120"/>
-              </a:rPr>
-              <a:t>assessments/rubric.md</a:t>
-            </a:r>
-            <a:pPr algn="l" indent="0" marL="0">
-              <a:lnSpc>
-                <a:spcPts val="1680"/>
-              </a:lnSpc>
-              <a:spcBef>
-                <a:spcPts val="300"/>
-              </a:spcBef>
-              <a:spcAft>
-                <a:spcPts val="300"/>
-              </a:spcAft>
-              <a:buNone/>
-            </a:pPr>
-            <a:r>
-              <a:rPr lang="en-US" sz="1200" dirty="0">
-                <a:solidFill>
-                  <a:srgbClr val="1C2833"/>
-                </a:solidFill>
-                <a:latin typeface="Arial" pitchFamily="34" charset="0"/>
-                <a:ea typeface="Arial" pitchFamily="34" charset="-122"/>
-                <a:cs typeface="Arial" pitchFamily="34" charset="-120"/>
-              </a:rPr>
-              <a:t>) — teacher carries the marking copy – Printed </a:t>
-            </a:r>
-            <a:pPr algn="l" indent="0" marL="0">
-              <a:lnSpc>
-                <a:spcPts val="1680"/>
-              </a:lnSpc>
-              <a:spcBef>
-                <a:spcPts val="300"/>
-              </a:spcBef>
-              <a:spcAft>
-                <a:spcPts val="300"/>
-              </a:spcAft>
-              <a:buNone/>
-            </a:pPr>
-            <a:r>
-              <a:rPr lang="en-US" sz="1200" b="1" dirty="0">
-                <a:solidFill>
-                  <a:srgbClr val="1C2833"/>
-                </a:solidFill>
-                <a:latin typeface="Arial" pitchFamily="34" charset="0"/>
-                <a:ea typeface="Arial" pitchFamily="34" charset="-122"/>
-                <a:cs typeface="Arial" pitchFamily="34" charset="-120"/>
-              </a:rPr>
-              <a:t>summative quiz</a:t>
-            </a:r>
-            <a:pPr algn="l" indent="0" marL="0">
-              <a:lnSpc>
-                <a:spcPts val="1680"/>
-              </a:lnSpc>
-              <a:spcBef>
-                <a:spcPts val="300"/>
-              </a:spcBef>
-              <a:spcAft>
-                <a:spcPts val="300"/>
-              </a:spcAft>
-              <a:buNone/>
-            </a:pPr>
-            <a:r>
-              <a:rPr lang="en-US" sz="1200" dirty="0">
-                <a:solidFill>
-                  <a:srgbClr val="1C2833"/>
-                </a:solidFill>
-                <a:latin typeface="Arial" pitchFamily="34" charset="0"/>
-                <a:ea typeface="Arial" pitchFamily="34" charset="-122"/>
-                <a:cs typeface="Arial" pitchFamily="34" charset="-120"/>
-              </a:rPr>
-              <a:t> (</a:t>
-            </a:r>
-            <a:pPr algn="l" indent="0" marL="0">
-              <a:lnSpc>
-                <a:spcPts val="1680"/>
-              </a:lnSpc>
-              <a:spcBef>
-                <a:spcPts val="300"/>
-              </a:spcBef>
-              <a:spcAft>
-                <a:spcPts val="300"/>
-              </a:spcAft>
-              <a:buNone/>
-            </a:pPr>
-            <a:r>
-              <a:rPr lang="en-US" sz="1200" dirty="0">
-                <a:solidFill>
-                  <a:srgbClr val="1C2833"/>
-                </a:solidFill>
-                <a:latin typeface="Arial" pitchFamily="34" charset="0"/>
-                <a:ea typeface="Arial" pitchFamily="34" charset="-122"/>
-                <a:cs typeface="Arial" pitchFamily="34" charset="-120"/>
-              </a:rPr>
-              <a:t>quizzes/summative.md</a:t>
-            </a:r>
-            <a:pPr algn="l" indent="0" marL="0">
-              <a:lnSpc>
-                <a:spcPts val="1680"/>
-              </a:lnSpc>
-              <a:spcBef>
-                <a:spcPts val="300"/>
-              </a:spcBef>
-              <a:spcAft>
-                <a:spcPts val="300"/>
-              </a:spcAft>
-              <a:buNone/>
-            </a:pPr>
-            <a:r>
-              <a:rPr lang="en-US" sz="1200" dirty="0">
-                <a:solidFill>
-                  <a:srgbClr val="1C2833"/>
-                </a:solidFill>
-                <a:latin typeface="Arial" pitchFamily="34" charset="0"/>
-                <a:ea typeface="Arial" pitchFamily="34" charset="-122"/>
-                <a:cs typeface="Arial" pitchFamily="34" charset="-120"/>
-              </a:rPr>
-              <a:t>), one per student, distributed after the shares – Printed </a:t>
-            </a:r>
-            <a:pPr algn="l" indent="0" marL="0">
-              <a:lnSpc>
-                <a:spcPts val="1680"/>
-              </a:lnSpc>
-              <a:spcBef>
-                <a:spcPts val="300"/>
-              </a:spcBef>
-              <a:spcAft>
-                <a:spcPts val="300"/>
-              </a:spcAft>
-              <a:buNone/>
-            </a:pPr>
-            <a:r>
-              <a:rPr lang="en-US" sz="1200" b="1" dirty="0">
-                <a:solidFill>
-                  <a:srgbClr val="1C2833"/>
-                </a:solidFill>
-                <a:latin typeface="Arial" pitchFamily="34" charset="0"/>
-                <a:ea typeface="Arial" pitchFamily="34" charset="-122"/>
-                <a:cs typeface="Arial" pitchFamily="34" charset="-120"/>
-              </a:rPr>
-              <a:t>peer-reflection slip</a:t>
-            </a:r>
-            <a:pPr algn="l" indent="0" marL="0">
-              <a:lnSpc>
-                <a:spcPts val="1680"/>
-              </a:lnSpc>
-              <a:spcBef>
-                <a:spcPts val="300"/>
-              </a:spcBef>
-              <a:spcAft>
-                <a:spcPts val="300"/>
-              </a:spcAft>
-              <a:buNone/>
-            </a:pPr>
-            <a:r>
-              <a:rPr lang="en-US" sz="1200" dirty="0">
-                <a:solidFill>
-                  <a:srgbClr val="1C2833"/>
-                </a:solidFill>
-                <a:latin typeface="Arial" pitchFamily="34" charset="0"/>
-                <a:ea typeface="Arial" pitchFamily="34" charset="-122"/>
-                <a:cs typeface="Arial" pitchFamily="34" charset="-120"/>
-              </a:rPr>
-              <a:t> (see template below) – Water, chairs, programme handout</a:t>
+              <a:t>Students deliver a 4-minute share + 1-minute Q&amp;A to a small audience of peers and invited parents/staff, submit their final artefact and documentation, and complete the summative quiz and self+peer reflection.</a:t>
             </a:r>
             <a:endParaRPr lang="en-US" sz="1200" dirty="0"/>
           </a:p>
@@ -4259,7 +6279,7 @@
                 <a:ea typeface="Georgia" pitchFamily="34" charset="-122"/>
                 <a:cs typeface="Georgia" pitchFamily="34" charset="-120"/>
               </a:rPr>
-              <a:t>Lesson flow</a:t>
+              <a:t>Materials</a:t>
             </a:r>
             <a:endParaRPr lang="en-US" sz="1800" dirty="0"/>
           </a:p>
@@ -4268,6 +6288,372 @@
       <p:sp>
         <p:nvSpPr>
           <p:cNvPr id="4" name="Text 2"/>
+          <p:cNvSpPr/>
+          <p:nvPr/>
+        </p:nvSpPr>
+        <p:spPr>
+          <a:xfrm>
+            <a:off x="634901" y="883593"/>
+            <a:ext cx="8102798" cy="1538883"/>
+          </a:xfrm>
+          <a:prstGeom prst="rect">
+            <a:avLst/>
+          </a:prstGeom>
+          <a:noFill/>
+          <a:ln/>
+        </p:spPr>
+        <p:txBody>
+          <a:bodyPr wrap="square" lIns="0" tIns="0" rIns="0" bIns="0" rtlCol="0" anchor="t"/>
+          <a:lstStyle/>
+          <a:p>
+            <a:pPr algn="l" marL="342900" indent="-342900">
+              <a:lnSpc>
+                <a:spcPts val="1620"/>
+              </a:lnSpc>
+              <a:spcAft>
+                <a:spcPts val="300"/>
+              </a:spcAft>
+              <a:buSzPct val="100000"/>
+              <a:buChar char="•"/>
+            </a:pPr>
+            <a:r>
+              <a:rPr lang="en-US" sz="1200" dirty="0">
+                <a:solidFill>
+                  <a:srgbClr val="1C2833"/>
+                </a:solidFill>
+                <a:latin typeface="Arial" pitchFamily="34" charset="0"/>
+                <a:ea typeface="Arial" pitchFamily="34" charset="-122"/>
+                <a:cs typeface="Arial" pitchFamily="34" charset="-120"/>
+              </a:rPr>
+              <a:t>A presentation space — front of room or library / hall, set up by Day 9 evening</a:t>
+            </a:r>
+            <a:endParaRPr lang="en-US" sz="1200" dirty="0"/>
+          </a:p>
+          <a:p>
+            <a:pPr algn="l" marL="342900" indent="-342900">
+              <a:lnSpc>
+                <a:spcPts val="1620"/>
+              </a:lnSpc>
+              <a:spcAft>
+                <a:spcPts val="300"/>
+              </a:spcAft>
+              <a:buSzPct val="100000"/>
+              <a:buChar char="•"/>
+            </a:pPr>
+            <a:r>
+              <a:rPr lang="en-US" sz="1200" dirty="0">
+                <a:solidFill>
+                  <a:srgbClr val="1C2833"/>
+                </a:solidFill>
+                <a:latin typeface="Arial" pitchFamily="34" charset="0"/>
+                <a:ea typeface="Arial" pitchFamily="34" charset="-122"/>
+                <a:cs typeface="Arial" pitchFamily="34" charset="-120"/>
+              </a:rPr>
+              <a:t>Timer visible to presenter (a large countdown on the screen helps)</a:t>
+            </a:r>
+            <a:endParaRPr lang="en-US" sz="1200" dirty="0"/>
+          </a:p>
+          <a:p>
+            <a:pPr algn="l" marL="342900" indent="-342900">
+              <a:lnSpc>
+                <a:spcPts val="1620"/>
+              </a:lnSpc>
+              <a:spcAft>
+                <a:spcPts val="300"/>
+              </a:spcAft>
+              <a:buSzPct val="100000"/>
+              <a:buChar char="•"/>
+            </a:pPr>
+            <a:r>
+              <a:rPr lang="en-US" sz="1200" dirty="0">
+                <a:solidFill>
+                  <a:srgbClr val="1C2833"/>
+                </a:solidFill>
+                <a:latin typeface="Arial" pitchFamily="34" charset="0"/>
+                <a:ea typeface="Arial" pitchFamily="34" charset="-122"/>
+                <a:cs typeface="Arial" pitchFamily="34" charset="-120"/>
+              </a:rPr>
+              <a:t>The full </a:t>
+            </a:r>
+            <a:pPr algn="l" indent="0" marL="0">
+              <a:lnSpc>
+                <a:spcPts val="1620"/>
+              </a:lnSpc>
+              <a:spcAft>
+                <a:spcPts val="300"/>
+              </a:spcAft>
+              <a:buNone/>
+            </a:pPr>
+            <a:r>
+              <a:rPr lang="en-US" sz="1200" b="1" dirty="0">
+                <a:solidFill>
+                  <a:srgbClr val="1C2833"/>
+                </a:solidFill>
+                <a:latin typeface="Arial" pitchFamily="34" charset="0"/>
+                <a:ea typeface="Arial" pitchFamily="34" charset="-122"/>
+                <a:cs typeface="Arial" pitchFamily="34" charset="-120"/>
+              </a:rPr>
+              <a:t>rubric</a:t>
+            </a:r>
+            <a:pPr algn="l" indent="0" marL="0">
+              <a:lnSpc>
+                <a:spcPts val="1620"/>
+              </a:lnSpc>
+              <a:spcAft>
+                <a:spcPts val="300"/>
+              </a:spcAft>
+              <a:buNone/>
+            </a:pPr>
+            <a:r>
+              <a:rPr lang="en-US" sz="1200" dirty="0">
+                <a:solidFill>
+                  <a:srgbClr val="1C2833"/>
+                </a:solidFill>
+                <a:latin typeface="Arial" pitchFamily="34" charset="0"/>
+                <a:ea typeface="Arial" pitchFamily="34" charset="-122"/>
+                <a:cs typeface="Arial" pitchFamily="34" charset="-120"/>
+              </a:rPr>
+              <a:t> (</a:t>
+            </a:r>
+            <a:pPr algn="l" indent="0" marL="0">
+              <a:lnSpc>
+                <a:spcPts val="1620"/>
+              </a:lnSpc>
+              <a:spcAft>
+                <a:spcPts val="300"/>
+              </a:spcAft>
+              <a:buNone/>
+            </a:pPr>
+            <a:r>
+              <a:rPr lang="en-US" sz="1200" dirty="0">
+                <a:solidFill>
+                  <a:srgbClr val="1C2833"/>
+                </a:solidFill>
+                <a:latin typeface="Arial" pitchFamily="34" charset="0"/>
+                <a:ea typeface="Arial" pitchFamily="34" charset="-122"/>
+                <a:cs typeface="Arial" pitchFamily="34" charset="-120"/>
+              </a:rPr>
+              <a:t>assessments/rubric.md</a:t>
+            </a:r>
+            <a:pPr algn="l" indent="0" marL="0">
+              <a:lnSpc>
+                <a:spcPts val="1620"/>
+              </a:lnSpc>
+              <a:spcAft>
+                <a:spcPts val="300"/>
+              </a:spcAft>
+              <a:buNone/>
+            </a:pPr>
+            <a:r>
+              <a:rPr lang="en-US" sz="1200" dirty="0">
+                <a:solidFill>
+                  <a:srgbClr val="1C2833"/>
+                </a:solidFill>
+                <a:latin typeface="Arial" pitchFamily="34" charset="0"/>
+                <a:ea typeface="Arial" pitchFamily="34" charset="-122"/>
+                <a:cs typeface="Arial" pitchFamily="34" charset="-120"/>
+              </a:rPr>
+              <a:t>) — teacher carries the marking copy</a:t>
+            </a:r>
+            <a:endParaRPr lang="en-US" sz="1200" dirty="0"/>
+          </a:p>
+          <a:p>
+            <a:pPr algn="l" marL="342900" indent="-342900">
+              <a:lnSpc>
+                <a:spcPts val="1620"/>
+              </a:lnSpc>
+              <a:spcAft>
+                <a:spcPts val="300"/>
+              </a:spcAft>
+              <a:buSzPct val="100000"/>
+              <a:buChar char="•"/>
+            </a:pPr>
+            <a:r>
+              <a:rPr lang="en-US" sz="1200" dirty="0">
+                <a:solidFill>
+                  <a:srgbClr val="1C2833"/>
+                </a:solidFill>
+                <a:latin typeface="Arial" pitchFamily="34" charset="0"/>
+                <a:ea typeface="Arial" pitchFamily="34" charset="-122"/>
+                <a:cs typeface="Arial" pitchFamily="34" charset="-120"/>
+              </a:rPr>
+              <a:t>Printed </a:t>
+            </a:r>
+            <a:pPr algn="l" indent="0" marL="0">
+              <a:lnSpc>
+                <a:spcPts val="1620"/>
+              </a:lnSpc>
+              <a:spcAft>
+                <a:spcPts val="300"/>
+              </a:spcAft>
+              <a:buNone/>
+            </a:pPr>
+            <a:r>
+              <a:rPr lang="en-US" sz="1200" b="1" dirty="0">
+                <a:solidFill>
+                  <a:srgbClr val="1C2833"/>
+                </a:solidFill>
+                <a:latin typeface="Arial" pitchFamily="34" charset="0"/>
+                <a:ea typeface="Arial" pitchFamily="34" charset="-122"/>
+                <a:cs typeface="Arial" pitchFamily="34" charset="-120"/>
+              </a:rPr>
+              <a:t>summative quiz</a:t>
+            </a:r>
+            <a:pPr algn="l" indent="0" marL="0">
+              <a:lnSpc>
+                <a:spcPts val="1620"/>
+              </a:lnSpc>
+              <a:spcAft>
+                <a:spcPts val="300"/>
+              </a:spcAft>
+              <a:buNone/>
+            </a:pPr>
+            <a:r>
+              <a:rPr lang="en-US" sz="1200" dirty="0">
+                <a:solidFill>
+                  <a:srgbClr val="1C2833"/>
+                </a:solidFill>
+                <a:latin typeface="Arial" pitchFamily="34" charset="0"/>
+                <a:ea typeface="Arial" pitchFamily="34" charset="-122"/>
+                <a:cs typeface="Arial" pitchFamily="34" charset="-120"/>
+              </a:rPr>
+              <a:t> (</a:t>
+            </a:r>
+            <a:pPr algn="l" indent="0" marL="0">
+              <a:lnSpc>
+                <a:spcPts val="1620"/>
+              </a:lnSpc>
+              <a:spcAft>
+                <a:spcPts val="300"/>
+              </a:spcAft>
+              <a:buNone/>
+            </a:pPr>
+            <a:r>
+              <a:rPr lang="en-US" sz="1200" dirty="0">
+                <a:solidFill>
+                  <a:srgbClr val="1C2833"/>
+                </a:solidFill>
+                <a:latin typeface="Arial" pitchFamily="34" charset="0"/>
+                <a:ea typeface="Arial" pitchFamily="34" charset="-122"/>
+                <a:cs typeface="Arial" pitchFamily="34" charset="-120"/>
+              </a:rPr>
+              <a:t>quizzes/summative.md</a:t>
+            </a:r>
+            <a:pPr algn="l" indent="0" marL="0">
+              <a:lnSpc>
+                <a:spcPts val="1620"/>
+              </a:lnSpc>
+              <a:spcAft>
+                <a:spcPts val="300"/>
+              </a:spcAft>
+              <a:buNone/>
+            </a:pPr>
+            <a:r>
+              <a:rPr lang="en-US" sz="1200" dirty="0">
+                <a:solidFill>
+                  <a:srgbClr val="1C2833"/>
+                </a:solidFill>
+                <a:latin typeface="Arial" pitchFamily="34" charset="0"/>
+                <a:ea typeface="Arial" pitchFamily="34" charset="-122"/>
+                <a:cs typeface="Arial" pitchFamily="34" charset="-120"/>
+              </a:rPr>
+              <a:t>), one per student, distributed after the shares</a:t>
+            </a:r>
+            <a:endParaRPr lang="en-US" sz="1200" dirty="0"/>
+          </a:p>
+          <a:p>
+            <a:pPr algn="l" marL="342900" indent="-342900">
+              <a:lnSpc>
+                <a:spcPts val="1620"/>
+              </a:lnSpc>
+              <a:spcAft>
+                <a:spcPts val="300"/>
+              </a:spcAft>
+              <a:buSzPct val="100000"/>
+              <a:buChar char="•"/>
+            </a:pPr>
+            <a:r>
+              <a:rPr lang="en-US" sz="1200" dirty="0">
+                <a:solidFill>
+                  <a:srgbClr val="1C2833"/>
+                </a:solidFill>
+                <a:latin typeface="Arial" pitchFamily="34" charset="0"/>
+                <a:ea typeface="Arial" pitchFamily="34" charset="-122"/>
+                <a:cs typeface="Arial" pitchFamily="34" charset="-120"/>
+              </a:rPr>
+              <a:t>Printed </a:t>
+            </a:r>
+            <a:pPr algn="l" indent="0" marL="0">
+              <a:lnSpc>
+                <a:spcPts val="1620"/>
+              </a:lnSpc>
+              <a:spcAft>
+                <a:spcPts val="300"/>
+              </a:spcAft>
+              <a:buNone/>
+            </a:pPr>
+            <a:r>
+              <a:rPr lang="en-US" sz="1200" b="1" dirty="0">
+                <a:solidFill>
+                  <a:srgbClr val="1C2833"/>
+                </a:solidFill>
+                <a:latin typeface="Arial" pitchFamily="34" charset="0"/>
+                <a:ea typeface="Arial" pitchFamily="34" charset="-122"/>
+                <a:cs typeface="Arial" pitchFamily="34" charset="-120"/>
+              </a:rPr>
+              <a:t>peer-reflection slip</a:t>
+            </a:r>
+            <a:pPr algn="l" indent="0" marL="0">
+              <a:lnSpc>
+                <a:spcPts val="1620"/>
+              </a:lnSpc>
+              <a:spcAft>
+                <a:spcPts val="300"/>
+              </a:spcAft>
+              <a:buNone/>
+            </a:pPr>
+            <a:r>
+              <a:rPr lang="en-US" sz="1200" dirty="0">
+                <a:solidFill>
+                  <a:srgbClr val="1C2833"/>
+                </a:solidFill>
+                <a:latin typeface="Arial" pitchFamily="34" charset="0"/>
+                <a:ea typeface="Arial" pitchFamily="34" charset="-122"/>
+                <a:cs typeface="Arial" pitchFamily="34" charset="-120"/>
+              </a:rPr>
+              <a:t> (see template below)</a:t>
+            </a:r>
+            <a:endParaRPr lang="en-US" sz="1200" dirty="0"/>
+          </a:p>
+          <a:p>
+            <a:pPr algn="l" marL="342900" indent="-342900">
+              <a:lnSpc>
+                <a:spcPts val="1620"/>
+              </a:lnSpc>
+              <a:spcAft>
+                <a:spcPts val="300"/>
+              </a:spcAft>
+              <a:buSzPct val="100000"/>
+              <a:buChar char="•"/>
+            </a:pPr>
+            <a:r>
+              <a:rPr lang="en-US" sz="1200" dirty="0">
+                <a:solidFill>
+                  <a:srgbClr val="1C2833"/>
+                </a:solidFill>
+                <a:latin typeface="Arial" pitchFamily="34" charset="0"/>
+                <a:ea typeface="Arial" pitchFamily="34" charset="-122"/>
+                <a:cs typeface="Arial" pitchFamily="34" charset="-120"/>
+              </a:rPr>
+              <a:t>Water, chairs, programme handout</a:t>
+            </a:r>
+            <a:endParaRPr lang="en-US" sz="1200" dirty="0"/>
+          </a:p>
+        </p:txBody>
+      </p:sp>
+      <p:sp>
+        <p:nvSpPr>
+          <p:cNvPr id="5" name="Text 3"/>
           <p:cNvSpPr/>
           <p:nvPr/>
         </p:nvSpPr>
@@ -4417,7 +6803,7 @@
                 <a:ea typeface="Georgia" pitchFamily="34" charset="-122"/>
                 <a:cs typeface="Georgia" pitchFamily="34" charset="-120"/>
               </a:rPr>
-              <a:t>Welcome (5 min)</a:t>
+              <a:t>Lesson flow</a:t>
             </a:r>
             <a:endParaRPr lang="en-US" sz="1800" dirty="0"/>
           </a:p>
@@ -4426,125 +6812,6 @@
       <p:sp>
         <p:nvSpPr>
           <p:cNvPr id="4" name="Text 2"/>
-          <p:cNvSpPr/>
-          <p:nvPr/>
-        </p:nvSpPr>
-        <p:spPr>
-          <a:xfrm>
-            <a:off x="406301" y="870942"/>
-            <a:ext cx="8498026" cy="853083"/>
-          </a:xfrm>
-          <a:prstGeom prst="rect">
-            <a:avLst/>
-          </a:prstGeom>
-          <a:noFill/>
-          <a:ln/>
-        </p:spPr>
-        <p:txBody>
-          <a:bodyPr wrap="square" lIns="0" tIns="0" rIns="0" bIns="0" rtlCol="0" anchor="t"/>
-          <a:lstStyle/>
-          <a:p>
-            <a:pPr algn="l" indent="0" marL="0">
-              <a:lnSpc>
-                <a:spcPts val="1680"/>
-              </a:lnSpc>
-              <a:spcBef>
-                <a:spcPts val="300"/>
-              </a:spcBef>
-              <a:spcAft>
-                <a:spcPts val="300"/>
-              </a:spcAft>
-              <a:buNone/>
-            </a:pPr>
-            <a:r>
-              <a:rPr lang="en-US" sz="1200" dirty="0">
-                <a:solidFill>
-                  <a:srgbClr val="1C2833"/>
-                </a:solidFill>
-                <a:latin typeface="Arial" pitchFamily="34" charset="0"/>
-                <a:ea typeface="Arial" pitchFamily="34" charset="-122"/>
-                <a:cs typeface="Arial" pitchFamily="34" charset="-120"/>
-              </a:rPr>
-              <a:t>– Brief the audience aloud: &gt; </a:t>
-            </a:r>
-            <a:pPr algn="l" indent="0" marL="0">
-              <a:lnSpc>
-                <a:spcPts val="1680"/>
-              </a:lnSpc>
-              <a:spcBef>
-                <a:spcPts val="300"/>
-              </a:spcBef>
-              <a:spcAft>
-                <a:spcPts val="300"/>
-              </a:spcAft>
-              <a:buNone/>
-            </a:pPr>
-            <a:r>
-              <a:rPr lang="en-US" sz="1200" i="1" dirty="0">
-                <a:solidFill>
-                  <a:srgbClr val="1C2833"/>
-                </a:solidFill>
-                <a:latin typeface="Arial" pitchFamily="34" charset="0"/>
-                <a:ea typeface="Arial" pitchFamily="34" charset="-122"/>
-                <a:cs typeface="Arial" pitchFamily="34" charset="-120"/>
-              </a:rPr>
-              <a:t>"Thank you for being here. The students have spent two weeks on their projects. Each will present for 4 minutes followed by 1 minute of questions. The shares are honest — students will say what didn't work as well as what did. Please applaud both. Hold any feedback for after the share; the goal of the questions is curiosity, not evaluation."</a:t>
-            </a:r>
-            <a:endParaRPr lang="en-US" sz="1200" dirty="0"/>
-          </a:p>
-        </p:txBody>
-      </p:sp>
-      <p:sp>
-        <p:nvSpPr>
-          <p:cNvPr id="5" name="Text 3"/>
-          <p:cNvSpPr/>
-          <p:nvPr/>
-        </p:nvSpPr>
-        <p:spPr>
-          <a:xfrm>
-            <a:off x="406301" y="1800225"/>
-            <a:ext cx="8498026" cy="426541"/>
-          </a:xfrm>
-          <a:prstGeom prst="rect">
-            <a:avLst/>
-          </a:prstGeom>
-          <a:noFill/>
-          <a:ln/>
-        </p:spPr>
-        <p:txBody>
-          <a:bodyPr wrap="square" lIns="0" tIns="0" rIns="0" bIns="0" rtlCol="0" anchor="t"/>
-          <a:lstStyle/>
-          <a:p>
-            <a:pPr algn="l" indent="0" marL="0">
-              <a:lnSpc>
-                <a:spcPts val="1680"/>
-              </a:lnSpc>
-              <a:spcBef>
-                <a:spcPts val="300"/>
-              </a:spcBef>
-              <a:spcAft>
-                <a:spcPts val="300"/>
-              </a:spcAft>
-              <a:buNone/>
-            </a:pPr>
-            <a:r>
-              <a:rPr lang="en-US" sz="1200" dirty="0">
-                <a:solidFill>
-                  <a:srgbClr val="1C2833"/>
-                </a:solidFill>
-                <a:latin typeface="Arial" pitchFamily="34" charset="0"/>
-                <a:ea typeface="Arial" pitchFamily="34" charset="-122"/>
-                <a:cs typeface="Arial" pitchFamily="34" charset="-120"/>
-              </a:rPr>
-              <a:t>– Hand out the programme (the running order). Audience members get a peer-reflection slip with checkboxes — they're invited to write one positive observation per share.</a:t>
-            </a:r>
-            <a:endParaRPr lang="en-US" sz="1200" dirty="0"/>
-          </a:p>
-        </p:txBody>
-      </p:sp>
-      <p:sp>
-        <p:nvSpPr>
-          <p:cNvPr id="6" name="Text 4"/>
           <p:cNvSpPr/>
           <p:nvPr/>
         </p:nvSpPr>
@@ -4694,7 +6961,7 @@
                 <a:ea typeface="Georgia" pitchFamily="34" charset="-122"/>
                 <a:cs typeface="Georgia" pitchFamily="34" charset="-120"/>
               </a:rPr>
-              <a:t>Shares (35 min)</a:t>
+              <a:t>Welcome (5 min)</a:t>
             </a:r>
             <a:endParaRPr lang="en-US" sz="1800" dirty="0"/>
           </a:p>
@@ -4732,26 +6999,6 @@
               <a:buChar char="•"/>
             </a:pPr>
             <a:r>
-              <a:rPr lang="en-US" sz="1200" b="1" dirty="0">
-                <a:solidFill>
-                  <a:srgbClr val="1C2833"/>
-                </a:solidFill>
-                <a:latin typeface="Arial" pitchFamily="34" charset="0"/>
-                <a:ea typeface="Arial" pitchFamily="34" charset="-122"/>
-                <a:cs typeface="Arial" pitchFamily="34" charset="-120"/>
-              </a:rPr>
-              <a:t>5 minutes per student</a:t>
-            </a:r>
-            <a:pPr algn="l" indent="0" marL="0">
-              <a:lnSpc>
-                <a:spcPts val="1620"/>
-              </a:lnSpc>
-              <a:spcAft>
-                <a:spcPts val="300"/>
-              </a:spcAft>
-              <a:buNone/>
-            </a:pPr>
-            <a:r>
               <a:rPr lang="en-US" sz="1200" dirty="0">
                 <a:solidFill>
                   <a:srgbClr val="1C2833"/>
@@ -4760,7 +7007,7 @@
                 <a:ea typeface="Arial" pitchFamily="34" charset="-122"/>
                 <a:cs typeface="Arial" pitchFamily="34" charset="-120"/>
               </a:rPr>
-              <a:t> (4 share + 1 Q&amp;A). Strict.</a:t>
+              <a:t>Brief the audience aloud:</a:t>
             </a:r>
             <a:endParaRPr lang="en-US" sz="1200" dirty="0"/>
           </a:p>
@@ -4774,13 +7021,66 @@
         </p:nvSpPr>
         <p:spPr>
           <a:xfrm>
-            <a:off x="406301" y="1254323"/>
-            <a:ext cx="8498026" cy="426541"/>
-          </a:xfrm>
-          <a:prstGeom prst="rect">
+            <a:off x="406301" y="1266974"/>
+            <a:ext cx="8331398" cy="1304925"/>
+          </a:xfrm>
+          <a:prstGeom prst="rect">
+            <a:avLst/>
+          </a:prstGeom>
+          <a:solidFill>
+            <a:srgbClr val="F4F8F9"/>
+          </a:solidFill>
+          <a:ln/>
+        </p:spPr>
+        <p:txBody>
+          <a:bodyPr wrap="square" rtlCol="0" anchor="ctr"/>
+          <a:lstStyle/>
+          <a:p>
+            <a:pPr indent="0" marL="0">
+              <a:buNone/>
+            </a:pPr>
+            <a:endParaRPr lang="en-US" dirty="0"/>
+          </a:p>
+        </p:txBody>
+      </p:sp>
+      <p:sp>
+        <p:nvSpPr>
+          <p:cNvPr id="6" name="Shape 4"/>
+          <p:cNvSpPr/>
+          <p:nvPr/>
+        </p:nvSpPr>
+        <p:spPr>
+          <a:xfrm>
+            <a:off x="434876" y="1266974"/>
+            <a:ext cx="0" cy="1304925"/>
+          </a:xfrm>
+          <a:prstGeom prst="line">
             <a:avLst/>
           </a:prstGeom>
           <a:noFill/>
+          <a:ln w="57150">
+            <a:solidFill>
+              <a:srgbClr val="FE4447"/>
+            </a:solidFill>
+            <a:prstDash val="solid"/>
+          </a:ln>
+        </p:spPr>
+      </p:sp>
+      <p:sp>
+        <p:nvSpPr>
+          <p:cNvPr id="7" name="Text 5"/>
+          <p:cNvSpPr/>
+          <p:nvPr/>
+        </p:nvSpPr>
+        <p:spPr>
+          <a:xfrm>
+            <a:off x="692051" y="1457474"/>
+            <a:ext cx="7973389" cy="923925"/>
+          </a:xfrm>
+          <a:prstGeom prst="rect">
+            <a:avLst/>
+          </a:prstGeom>
+          <a:noFill/>
           <a:ln/>
         </p:spPr>
         <p:txBody>
@@ -4789,7 +7089,7 @@
           <a:p>
             <a:pPr algn="l" indent="0" marL="0">
               <a:lnSpc>
-                <a:spcPts val="1680"/>
+                <a:spcPts val="1820"/>
               </a:lnSpc>
               <a:spcBef>
                 <a:spcPts val="300"/>
@@ -4800,113 +7100,17 @@
               <a:buNone/>
             </a:pPr>
             <a:r>
-              <a:rPr lang="en-US" sz="1200" dirty="0">
-                <a:solidFill>
-                  <a:srgbClr val="1C2833"/>
-                </a:solidFill>
-                <a:latin typeface="Arial" pitchFamily="34" charset="0"/>
-                <a:ea typeface="Arial" pitchFamily="34" charset="-122"/>
-                <a:cs typeface="Arial" pitchFamily="34" charset="-120"/>
-              </a:rPr>
-              <a:t>– A timekeeper at the front (could be a student) gives a quiet "30 seconds left" signal. – After each share: 30 seconds of applause + the next student is up. No transition speeches.</a:t>
-            </a:r>
-            <a:endParaRPr lang="en-US" sz="1200" dirty="0"/>
-          </a:p>
-        </p:txBody>
-      </p:sp>
-      <p:sp>
-        <p:nvSpPr>
-          <p:cNvPr id="6" name="Text 4"/>
-          <p:cNvSpPr/>
-          <p:nvPr/>
-        </p:nvSpPr>
-        <p:spPr>
-          <a:xfrm>
-            <a:off x="406301" y="1757065"/>
-            <a:ext cx="8498026" cy="426541"/>
-          </a:xfrm>
-          <a:prstGeom prst="rect">
-            <a:avLst/>
-          </a:prstGeom>
-          <a:noFill/>
-          <a:ln/>
-        </p:spPr>
-        <p:txBody>
-          <a:bodyPr wrap="square" lIns="0" tIns="0" rIns="0" bIns="0" rtlCol="0" anchor="t"/>
-          <a:lstStyle/>
-          <a:p>
-            <a:pPr algn="l" indent="0" marL="0">
-              <a:lnSpc>
-                <a:spcPts val="1680"/>
-              </a:lnSpc>
-              <a:spcBef>
-                <a:spcPts val="300"/>
-              </a:spcBef>
-              <a:spcAft>
-                <a:spcPts val="300"/>
-              </a:spcAft>
-              <a:buNone/>
-            </a:pPr>
-            <a:r>
-              <a:rPr lang="en-US" sz="1200" dirty="0">
-                <a:solidFill>
-                  <a:srgbClr val="1C2833"/>
-                </a:solidFill>
-                <a:latin typeface="Arial" pitchFamily="34" charset="0"/>
-                <a:ea typeface="Arial" pitchFamily="34" charset="-122"/>
-                <a:cs typeface="Arial" pitchFamily="34" charset="-120"/>
-              </a:rPr>
-              <a:t>For a class of 28, this fits in two 45-min slots (14 shares per slot) or one 70-minute extended slot. Plan accordingly with the timetable team.</a:t>
-            </a:r>
-            <a:endParaRPr lang="en-US" sz="1200" dirty="0"/>
-          </a:p>
-        </p:txBody>
-      </p:sp>
-      <p:sp>
-        <p:nvSpPr>
-          <p:cNvPr id="7" name="Text 5"/>
-          <p:cNvSpPr/>
-          <p:nvPr/>
-        </p:nvSpPr>
-        <p:spPr>
-          <a:xfrm>
-            <a:off x="406301" y="2259806"/>
-            <a:ext cx="8498026" cy="213271"/>
-          </a:xfrm>
-          <a:prstGeom prst="rect">
-            <a:avLst/>
-          </a:prstGeom>
-          <a:noFill/>
-          <a:ln/>
-        </p:spPr>
-        <p:txBody>
-          <a:bodyPr wrap="square" lIns="0" tIns="0" rIns="0" bIns="0" rtlCol="0" anchor="t"/>
-          <a:lstStyle/>
-          <a:p>
-            <a:pPr algn="l" indent="0" marL="0">
-              <a:lnSpc>
-                <a:spcPts val="1680"/>
-              </a:lnSpc>
-              <a:spcBef>
-                <a:spcPts val="300"/>
-              </a:spcBef>
-              <a:spcAft>
-                <a:spcPts val="300"/>
-              </a:spcAft>
-              <a:buNone/>
-            </a:pPr>
-            <a:r>
-              <a:rPr lang="en-US" sz="1200" dirty="0">
-                <a:solidFill>
-                  <a:srgbClr val="1C2833"/>
-                </a:solidFill>
-                <a:latin typeface="Arial" pitchFamily="34" charset="0"/>
-                <a:ea typeface="Arial" pitchFamily="34" charset="-122"/>
-                <a:cs typeface="Arial" pitchFamily="34" charset="-120"/>
-              </a:rPr>
-              <a:t>The teacher marks each share in real time on the rubric. Notes only, no reactions.</a:t>
-            </a:r>
-            <a:endParaRPr lang="en-US" sz="1200" dirty="0"/>
+              <a:rPr lang="en-US" sz="1300" i="1" dirty="0">
+                <a:solidFill>
+                  <a:srgbClr val="1C2833"/>
+                </a:solidFill>
+                <a:latin typeface="Georgia" pitchFamily="34" charset="0"/>
+                <a:ea typeface="Georgia" pitchFamily="34" charset="-122"/>
+                <a:cs typeface="Georgia" pitchFamily="34" charset="-120"/>
+              </a:rPr>
+              <a:t>"Thank you for being here. The students have spent two weeks on their projects. Each will present for 4 minutes followed by 1 minute of questions. The shares are honest — students will say what didn't work as well as what did. Please applaud both. Hold any feedback for after the share; the goal of the questions is curiosity, not evaluation."</a:t>
+            </a:r>
+            <a:endParaRPr lang="en-US" sz="1300" dirty="0"/>
           </a:p>
         </p:txBody>
       </p:sp>
@@ -5062,7 +7266,7 @@
                 <a:ea typeface="Georgia" pitchFamily="34" charset="-122"/>
                 <a:cs typeface="Georgia" pitchFamily="34" charset="-120"/>
               </a:rPr>
-              <a:t>Summative quiz (15 min)</a:t>
+              <a:t>Welcome (5 min) (cont.)</a:t>
             </a:r>
             <a:endParaRPr lang="en-US" sz="1800" dirty="0"/>
           </a:p>
@@ -5076,8 +7280,8 @@
         </p:nvSpPr>
         <p:spPr>
           <a:xfrm>
-            <a:off x="406301" y="870942"/>
-            <a:ext cx="8498026" cy="862608"/>
+            <a:off x="634901" y="883593"/>
+            <a:ext cx="8102798" cy="487561"/>
           </a:xfrm>
           <a:prstGeom prst="rect">
             <a:avLst/>
@@ -5089,17 +7293,15 @@
           <a:bodyPr wrap="square" lIns="0" tIns="0" rIns="0" bIns="0" rtlCol="0" anchor="t"/>
           <a:lstStyle/>
           <a:p>
-            <a:pPr algn="l" indent="0" marL="0">
-              <a:lnSpc>
-                <a:spcPts val="1680"/>
-              </a:lnSpc>
-              <a:spcBef>
-                <a:spcPts val="300"/>
-              </a:spcBef>
-              <a:spcAft>
-                <a:spcPts val="300"/>
-              </a:spcAft>
-              <a:buNone/>
+            <a:pPr algn="l" marL="342900" indent="-342900">
+              <a:lnSpc>
+                <a:spcPts val="1620"/>
+              </a:lnSpc>
+              <a:spcAft>
+                <a:spcPts val="300"/>
+              </a:spcAft>
+              <a:buSzPct val="100000"/>
+              <a:buChar char="•"/>
             </a:pPr>
             <a:r>
               <a:rPr lang="en-US" sz="1200" dirty="0">
@@ -5110,145 +7312,7 @@
                 <a:ea typeface="Arial" pitchFamily="34" charset="-122"/>
                 <a:cs typeface="Arial" pitchFamily="34" charset="-120"/>
               </a:rPr>
-              <a:t>– After all shares are done — or, if the share day is extended, immediately after the share block — students sit and complete the summative quiz (</a:t>
-            </a:r>
-            <a:pPr algn="l" indent="0" marL="0">
-              <a:lnSpc>
-                <a:spcPts val="1680"/>
-              </a:lnSpc>
-              <a:spcBef>
-                <a:spcPts val="300"/>
-              </a:spcBef>
-              <a:spcAft>
-                <a:spcPts val="300"/>
-              </a:spcAft>
-              <a:buNone/>
-            </a:pPr>
-            <a:r>
-              <a:rPr lang="en-US" sz="1200" dirty="0">
-                <a:solidFill>
-                  <a:srgbClr val="1C2833"/>
-                </a:solidFill>
-                <a:latin typeface="Arial" pitchFamily="34" charset="0"/>
-                <a:ea typeface="Arial" pitchFamily="34" charset="-122"/>
-                <a:cs typeface="Arial" pitchFamily="34" charset="-120"/>
-              </a:rPr>
-              <a:t>quizzes/summative.md</a:t>
-            </a:r>
-            <a:pPr algn="l" indent="0" marL="0">
-              <a:lnSpc>
-                <a:spcPts val="1680"/>
-              </a:lnSpc>
-              <a:spcBef>
-                <a:spcPts val="300"/>
-              </a:spcBef>
-              <a:spcAft>
-                <a:spcPts val="300"/>
-              </a:spcAft>
-              <a:buNone/>
-            </a:pPr>
-            <a:r>
-              <a:rPr lang="en-US" sz="1200" dirty="0">
-                <a:solidFill>
-                  <a:srgbClr val="1C2833"/>
-                </a:solidFill>
-                <a:latin typeface="Arial" pitchFamily="34" charset="0"/>
-                <a:ea typeface="Arial" pitchFamily="34" charset="-122"/>
-                <a:cs typeface="Arial" pitchFamily="34" charset="-120"/>
-              </a:rPr>
-              <a:t>). 15 minutes, closed book, no notes. – The quiz is short and focused on the </a:t>
-            </a:r>
-            <a:pPr algn="l" indent="0" marL="0">
-              <a:lnSpc>
-                <a:spcPts val="1680"/>
-              </a:lnSpc>
-              <a:spcBef>
-                <a:spcPts val="300"/>
-              </a:spcBef>
-              <a:spcAft>
-                <a:spcPts val="300"/>
-              </a:spcAft>
-              <a:buNone/>
-            </a:pPr>
-            <a:r>
-              <a:rPr lang="en-US" sz="1200" i="1" dirty="0">
-                <a:solidFill>
-                  <a:srgbClr val="1C2833"/>
-                </a:solidFill>
-                <a:latin typeface="Arial" pitchFamily="34" charset="0"/>
-                <a:ea typeface="Arial" pitchFamily="34" charset="-122"/>
-                <a:cs typeface="Arial" pitchFamily="34" charset="-120"/>
-              </a:rPr>
-              <a:t>process</a:t>
-            </a:r>
-            <a:pPr algn="l" indent="0" marL="0">
-              <a:lnSpc>
-                <a:spcPts val="1680"/>
-              </a:lnSpc>
-              <a:spcBef>
-                <a:spcPts val="300"/>
-              </a:spcBef>
-              <a:spcAft>
-                <a:spcPts val="300"/>
-              </a:spcAft>
-              <a:buNone/>
-            </a:pPr>
-            <a:r>
-              <a:rPr lang="en-US" sz="1200" dirty="0">
-                <a:solidFill>
-                  <a:srgbClr val="1C2833"/>
-                </a:solidFill>
-                <a:latin typeface="Arial" pitchFamily="34" charset="0"/>
-                <a:ea typeface="Arial" pitchFamily="34" charset="-122"/>
-                <a:cs typeface="Arial" pitchFamily="34" charset="-120"/>
-              </a:rPr>
-              <a:t> of the module — not on content. (E.g.: "Name the six phases of the project sprint." "What does the term </a:t>
-            </a:r>
-            <a:pPr algn="l" indent="0" marL="0">
-              <a:lnSpc>
-                <a:spcPts val="1680"/>
-              </a:lnSpc>
-              <a:spcBef>
-                <a:spcPts val="300"/>
-              </a:spcBef>
-              <a:spcAft>
-                <a:spcPts val="300"/>
-              </a:spcAft>
-              <a:buNone/>
-            </a:pPr>
-            <a:r>
-              <a:rPr lang="en-US" sz="1200" i="1" dirty="0">
-                <a:solidFill>
-                  <a:srgbClr val="1C2833"/>
-                </a:solidFill>
-                <a:latin typeface="Arial" pitchFamily="34" charset="0"/>
-                <a:ea typeface="Arial" pitchFamily="34" charset="-122"/>
-                <a:cs typeface="Arial" pitchFamily="34" charset="-120"/>
-              </a:rPr>
-              <a:t>abhyāsa</a:t>
-            </a:r>
-            <a:pPr algn="l" indent="0" marL="0">
-              <a:lnSpc>
-                <a:spcPts val="1680"/>
-              </a:lnSpc>
-              <a:spcBef>
-                <a:spcPts val="300"/>
-              </a:spcBef>
-              <a:spcAft>
-                <a:spcPts val="300"/>
-              </a:spcAft>
-              <a:buNone/>
-            </a:pPr>
-            <a:r>
-              <a:rPr lang="en-US" sz="1200" dirty="0">
-                <a:solidFill>
-                  <a:srgbClr val="1C2833"/>
-                </a:solidFill>
-                <a:latin typeface="Arial" pitchFamily="34" charset="0"/>
-                <a:ea typeface="Arial" pitchFamily="34" charset="-122"/>
-                <a:cs typeface="Arial" pitchFamily="34" charset="-120"/>
-              </a:rPr>
-              <a:t> refer to in this module?")</a:t>
+              <a:t>Hand out the programme (the running order). Audience members get a peer-reflection slip with checkboxes — they're invited to write one positive observation per share.</a:t>
             </a:r>
             <a:endParaRPr lang="en-US" sz="1200" dirty="0"/>
           </a:p>
@@ -5406,7 +7470,7 @@
                 <a:ea typeface="Georgia" pitchFamily="34" charset="-122"/>
                 <a:cs typeface="Georgia" pitchFamily="34" charset="-120"/>
               </a:rPr>
-              <a:t>Reflection + close (5 min)</a:t>
+              <a:t>Shares (35 min)</a:t>
             </a:r>
             <a:endParaRPr lang="en-US" sz="1800" dirty="0"/>
           </a:p>
@@ -5420,8 +7484,8 @@
         </p:nvSpPr>
         <p:spPr>
           <a:xfrm>
-            <a:off x="406301" y="870942"/>
-            <a:ext cx="8498026" cy="639812"/>
+            <a:off x="634901" y="883593"/>
+            <a:ext cx="8102798" cy="769441"/>
           </a:xfrm>
           <a:prstGeom prst="rect">
             <a:avLst/>
@@ -5433,6 +7497,120 @@
           <a:bodyPr wrap="square" lIns="0" tIns="0" rIns="0" bIns="0" rtlCol="0" anchor="t"/>
           <a:lstStyle/>
           <a:p>
+            <a:pPr algn="l" marL="342900" indent="-342900">
+              <a:lnSpc>
+                <a:spcPts val="1620"/>
+              </a:lnSpc>
+              <a:spcAft>
+                <a:spcPts val="300"/>
+              </a:spcAft>
+              <a:buSzPct val="100000"/>
+              <a:buChar char="•"/>
+            </a:pPr>
+            <a:r>
+              <a:rPr lang="en-US" sz="1200" b="1" dirty="0">
+                <a:solidFill>
+                  <a:srgbClr val="1C2833"/>
+                </a:solidFill>
+                <a:latin typeface="Arial" pitchFamily="34" charset="0"/>
+                <a:ea typeface="Arial" pitchFamily="34" charset="-122"/>
+                <a:cs typeface="Arial" pitchFamily="34" charset="-120"/>
+              </a:rPr>
+              <a:t>5 minutes per student</a:t>
+            </a:r>
+            <a:pPr algn="l" indent="0" marL="0">
+              <a:lnSpc>
+                <a:spcPts val="1620"/>
+              </a:lnSpc>
+              <a:spcAft>
+                <a:spcPts val="300"/>
+              </a:spcAft>
+              <a:buNone/>
+            </a:pPr>
+            <a:r>
+              <a:rPr lang="en-US" sz="1200" dirty="0">
+                <a:solidFill>
+                  <a:srgbClr val="1C2833"/>
+                </a:solidFill>
+                <a:latin typeface="Arial" pitchFamily="34" charset="0"/>
+                <a:ea typeface="Arial" pitchFamily="34" charset="-122"/>
+                <a:cs typeface="Arial" pitchFamily="34" charset="-120"/>
+              </a:rPr>
+              <a:t> (4 share + 1 Q&amp;A). Strict.</a:t>
+            </a:r>
+            <a:endParaRPr lang="en-US" sz="1200" dirty="0"/>
+          </a:p>
+          <a:p>
+            <a:pPr algn="l" marL="342900" indent="-342900">
+              <a:lnSpc>
+                <a:spcPts val="1620"/>
+              </a:lnSpc>
+              <a:spcAft>
+                <a:spcPts val="300"/>
+              </a:spcAft>
+              <a:buSzPct val="100000"/>
+              <a:buChar char="•"/>
+            </a:pPr>
+            <a:r>
+              <a:rPr lang="en-US" sz="1200" dirty="0">
+                <a:solidFill>
+                  <a:srgbClr val="1C2833"/>
+                </a:solidFill>
+                <a:latin typeface="Arial" pitchFamily="34" charset="0"/>
+                <a:ea typeface="Arial" pitchFamily="34" charset="-122"/>
+                <a:cs typeface="Arial" pitchFamily="34" charset="-120"/>
+              </a:rPr>
+              <a:t>A timekeeper at the front (could be a student) gives a quiet "30 seconds left" signal.</a:t>
+            </a:r>
+            <a:endParaRPr lang="en-US" sz="1200" dirty="0"/>
+          </a:p>
+          <a:p>
+            <a:pPr algn="l" marL="342900" indent="-342900">
+              <a:lnSpc>
+                <a:spcPts val="1620"/>
+              </a:lnSpc>
+              <a:spcAft>
+                <a:spcPts val="300"/>
+              </a:spcAft>
+              <a:buSzPct val="100000"/>
+              <a:buChar char="•"/>
+            </a:pPr>
+            <a:r>
+              <a:rPr lang="en-US" sz="1200" dirty="0">
+                <a:solidFill>
+                  <a:srgbClr val="1C2833"/>
+                </a:solidFill>
+                <a:latin typeface="Arial" pitchFamily="34" charset="0"/>
+                <a:ea typeface="Arial" pitchFamily="34" charset="-122"/>
+                <a:cs typeface="Arial" pitchFamily="34" charset="-120"/>
+              </a:rPr>
+              <a:t>After each share: 30 seconds of applause + the next student is up. No transition speeches.</a:t>
+            </a:r>
+            <a:endParaRPr lang="en-US" sz="1200" dirty="0"/>
+          </a:p>
+        </p:txBody>
+      </p:sp>
+      <p:sp>
+        <p:nvSpPr>
+          <p:cNvPr id="5" name="Text 3"/>
+          <p:cNvSpPr/>
+          <p:nvPr/>
+        </p:nvSpPr>
+        <p:spPr>
+          <a:xfrm>
+            <a:off x="406301" y="1741884"/>
+            <a:ext cx="8498026" cy="426541"/>
+          </a:xfrm>
+          <a:prstGeom prst="rect">
+            <a:avLst/>
+          </a:prstGeom>
+          <a:noFill/>
+          <a:ln/>
+        </p:spPr>
+        <p:txBody>
+          <a:bodyPr wrap="square" lIns="0" tIns="0" rIns="0" bIns="0" rtlCol="0" anchor="t"/>
+          <a:lstStyle/>
+          <a:p>
             <a:pPr algn="l" indent="0" marL="0">
               <a:lnSpc>
                 <a:spcPts val="1680"/>
@@ -5454,76 +7632,7 @@
                 <a:ea typeface="Arial" pitchFamily="34" charset="-122"/>
                 <a:cs typeface="Arial" pitchFamily="34" charset="-120"/>
               </a:rPr>
-              <a:t>– Hand out the </a:t>
-            </a:r>
-            <a:pPr algn="l" indent="0" marL="0">
-              <a:lnSpc>
-                <a:spcPts val="1680"/>
-              </a:lnSpc>
-              <a:spcBef>
-                <a:spcPts val="300"/>
-              </a:spcBef>
-              <a:spcAft>
-                <a:spcPts val="300"/>
-              </a:spcAft>
-              <a:buNone/>
-            </a:pPr>
-            <a:r>
-              <a:rPr lang="en-US" sz="1200" b="1" dirty="0">
-                <a:solidFill>
-                  <a:srgbClr val="1C2833"/>
-                </a:solidFill>
-                <a:latin typeface="Arial" pitchFamily="34" charset="0"/>
-                <a:ea typeface="Arial" pitchFamily="34" charset="-122"/>
-                <a:cs typeface="Arial" pitchFamily="34" charset="-120"/>
-              </a:rPr>
-              <a:t>peer + self-reflection slip</a:t>
-            </a:r>
-            <a:pPr algn="l" indent="0" marL="0">
-              <a:lnSpc>
-                <a:spcPts val="1680"/>
-              </a:lnSpc>
-              <a:spcBef>
-                <a:spcPts val="300"/>
-              </a:spcBef>
-              <a:spcAft>
-                <a:spcPts val="300"/>
-              </a:spcAft>
-              <a:buNone/>
-            </a:pPr>
-            <a:r>
-              <a:rPr lang="en-US" sz="1200" dirty="0">
-                <a:solidFill>
-                  <a:srgbClr val="1C2833"/>
-                </a:solidFill>
-                <a:latin typeface="Arial" pitchFamily="34" charset="0"/>
-                <a:ea typeface="Arial" pitchFamily="34" charset="-122"/>
-                <a:cs typeface="Arial" pitchFamily="34" charset="-120"/>
-              </a:rPr>
-              <a:t>. 4 minutes silent writing. – Final journal entry: "If I started Module 15 again, the one thing I would do differently is ___ ." – Closing: </a:t>
-            </a:r>
-            <a:pPr algn="l" indent="0" marL="0">
-              <a:lnSpc>
-                <a:spcPts val="1680"/>
-              </a:lnSpc>
-              <a:spcBef>
-                <a:spcPts val="300"/>
-              </a:spcBef>
-              <a:spcAft>
-                <a:spcPts val="300"/>
-              </a:spcAft>
-              <a:buNone/>
-            </a:pPr>
-            <a:r>
-              <a:rPr lang="en-US" sz="1200" i="1" dirty="0">
-                <a:solidFill>
-                  <a:srgbClr val="1C2833"/>
-                </a:solidFill>
-                <a:latin typeface="Arial" pitchFamily="34" charset="0"/>
-                <a:ea typeface="Arial" pitchFamily="34" charset="-122"/>
-                <a:cs typeface="Arial" pitchFamily="34" charset="-120"/>
-              </a:rPr>
-              <a:t>"What you did over the past two weeks is the real thing — small, finished work delivered to a real audience. That's the practice we want you to carry into Module 16 and beyond. Well done."</a:t>
+              <a:t>For a class of 28, this fits in two 45-min slots (14 shares per slot) or one 70-minute extended slot. Plan accordingly with the timetable team.</a:t>
             </a:r>
             <a:endParaRPr lang="en-US" sz="1200" dirty="0"/>
           </a:p>
@@ -5531,7 +7640,7 @@
       </p:sp>
       <p:sp>
         <p:nvSpPr>
-          <p:cNvPr id="5" name="Text 3"/>
+          <p:cNvPr id="6" name="Text 4"/>
           <p:cNvSpPr/>
           <p:nvPr/>
         </p:nvSpPr>
@@ -5681,7 +7790,7 @@
                 <a:ea typeface="Georgia" pitchFamily="34" charset="-122"/>
                 <a:cs typeface="Georgia" pitchFamily="34" charset="-120"/>
               </a:rPr>
-              <a:t>Student-facing content</a:t>
+              <a:t>Shares (35 min) (cont.)</a:t>
             </a:r>
             <a:endParaRPr lang="en-US" sz="1800" dirty="0"/>
           </a:p>
@@ -5695,66 +7804,13 @@
         </p:nvSpPr>
         <p:spPr>
           <a:xfrm>
-            <a:off x="406301" y="883593"/>
-            <a:ext cx="8331398" cy="2843213"/>
-          </a:xfrm>
-          <a:prstGeom prst="rect">
-            <a:avLst/>
-          </a:prstGeom>
-          <a:solidFill>
-            <a:srgbClr val="F4F8F9"/>
-          </a:solidFill>
-          <a:ln/>
-        </p:spPr>
-        <p:txBody>
-          <a:bodyPr wrap="square" rtlCol="0" anchor="ctr"/>
-          <a:lstStyle/>
-          <a:p>
-            <a:pPr indent="0" marL="0">
-              <a:buNone/>
-            </a:pPr>
-            <a:endParaRPr lang="en-US" dirty="0"/>
-          </a:p>
-        </p:txBody>
-      </p:sp>
-      <p:sp>
-        <p:nvSpPr>
-          <p:cNvPr id="5" name="Shape 3"/>
-          <p:cNvSpPr/>
-          <p:nvPr/>
-        </p:nvSpPr>
-        <p:spPr>
-          <a:xfrm>
-            <a:off x="434876" y="883593"/>
-            <a:ext cx="0" cy="2843213"/>
-          </a:xfrm>
-          <a:prstGeom prst="line">
+            <a:off x="406301" y="870942"/>
+            <a:ext cx="8498026" cy="213271"/>
+          </a:xfrm>
+          <a:prstGeom prst="rect">
             <a:avLst/>
           </a:prstGeom>
           <a:noFill/>
-          <a:ln w="57150">
-            <a:solidFill>
-              <a:srgbClr val="FE4447"/>
-            </a:solidFill>
-            <a:prstDash val="solid"/>
-          </a:ln>
-        </p:spPr>
-      </p:sp>
-      <p:sp>
-        <p:nvSpPr>
-          <p:cNvPr id="6" name="Text 4"/>
-          <p:cNvSpPr/>
-          <p:nvPr/>
-        </p:nvSpPr>
-        <p:spPr>
-          <a:xfrm>
-            <a:off x="692051" y="1074093"/>
-            <a:ext cx="7973389" cy="230981"/>
-          </a:xfrm>
-          <a:prstGeom prst="rect">
-            <a:avLst/>
-          </a:prstGeom>
-          <a:noFill/>
           <a:ln/>
         </p:spPr>
         <p:txBody>
@@ -5763,7 +7819,7 @@
           <a:p>
             <a:pPr algn="l" indent="0" marL="0">
               <a:lnSpc>
-                <a:spcPts val="1820"/>
+                <a:spcPts val="1680"/>
               </a:lnSpc>
               <a:spcBef>
                 <a:spcPts val="300"/>
@@ -5774,284 +7830,23 @@
               <a:buNone/>
             </a:pPr>
             <a:r>
-              <a:rPr lang="en-US" sz="1300" b="1" i="1" dirty="0">
-                <a:solidFill>
-                  <a:srgbClr val="1C2833"/>
-                </a:solidFill>
-                <a:latin typeface="Georgia" pitchFamily="34" charset="0"/>
-                <a:ea typeface="Georgia" pitchFamily="34" charset="-122"/>
-                <a:cs typeface="Georgia" pitchFamily="34" charset="-120"/>
-              </a:rPr>
-              <a:t>Today is the share.</a:t>
-            </a:r>
-            <a:endParaRPr lang="en-US" sz="1300" dirty="0"/>
-          </a:p>
-        </p:txBody>
-      </p:sp>
-      <p:sp>
-        <p:nvSpPr>
-          <p:cNvPr id="7" name="Text 5"/>
-          <p:cNvSpPr/>
-          <p:nvPr/>
-        </p:nvSpPr>
-        <p:spPr>
-          <a:xfrm>
-            <a:off x="692051" y="1343174"/>
-            <a:ext cx="7973389" cy="230981"/>
-          </a:xfrm>
-          <a:prstGeom prst="rect">
-            <a:avLst/>
-          </a:prstGeom>
-          <a:noFill/>
-          <a:ln/>
-        </p:spPr>
-        <p:txBody>
-          <a:bodyPr wrap="square" lIns="0" tIns="0" rIns="0" bIns="0" rtlCol="0" anchor="t"/>
-          <a:lstStyle/>
-          <a:p>
-            <a:pPr algn="l" indent="0" marL="0">
-              <a:lnSpc>
-                <a:spcPts val="1820"/>
-              </a:lnSpc>
-              <a:spcBef>
-                <a:spcPts val="300"/>
-              </a:spcBef>
-              <a:spcAft>
-                <a:spcPts val="300"/>
-              </a:spcAft>
-              <a:buNone/>
-            </a:pPr>
-            <a:r>
-              <a:rPr lang="en-US" sz="1300" i="1" dirty="0">
-                <a:solidFill>
-                  <a:srgbClr val="1C2833"/>
-                </a:solidFill>
-                <a:latin typeface="Georgia" pitchFamily="34" charset="0"/>
-                <a:ea typeface="Georgia" pitchFamily="34" charset="-122"/>
-                <a:cs typeface="Georgia" pitchFamily="34" charset="-120"/>
-              </a:rPr>
-              <a:t>The schedule:</a:t>
-            </a:r>
-            <a:endParaRPr lang="en-US" sz="1300" dirty="0"/>
-          </a:p>
-        </p:txBody>
-      </p:sp>
-      <p:sp>
-        <p:nvSpPr>
-          <p:cNvPr id="8" name="Text 6"/>
-          <p:cNvSpPr/>
-          <p:nvPr/>
-        </p:nvSpPr>
-        <p:spPr>
-          <a:xfrm>
-            <a:off x="692051" y="1612255"/>
-            <a:ext cx="7973389" cy="692944"/>
-          </a:xfrm>
-          <a:prstGeom prst="rect">
-            <a:avLst/>
-          </a:prstGeom>
-          <a:noFill/>
-          <a:ln/>
-        </p:spPr>
-        <p:txBody>
-          <a:bodyPr wrap="square" lIns="0" tIns="0" rIns="0" bIns="0" rtlCol="0" anchor="t"/>
-          <a:lstStyle/>
-          <a:p>
-            <a:pPr algn="l" indent="0" marL="0">
-              <a:lnSpc>
-                <a:spcPts val="1820"/>
-              </a:lnSpc>
-              <a:spcBef>
-                <a:spcPts val="300"/>
-              </a:spcBef>
-              <a:spcAft>
-                <a:spcPts val="300"/>
-              </a:spcAft>
-              <a:buNone/>
-            </a:pPr>
-            <a:r>
-              <a:rPr lang="en-US" sz="1300" i="1" dirty="0">
-                <a:solidFill>
-                  <a:srgbClr val="1C2833"/>
-                </a:solidFill>
-                <a:latin typeface="Georgia" pitchFamily="34" charset="0"/>
-                <a:ea typeface="Georgia" pitchFamily="34" charset="-122"/>
-                <a:cs typeface="Georgia" pitchFamily="34" charset="-120"/>
-              </a:rPr>
-              <a:t>| Block | What happens | |-------|---------------| | Welcome (5 min) | Brief from teacher; audience seated | | Shares (35 min) | Each student: 4 min share + 1 min Q&amp;A | | Summative quiz (15 min) | Short, closed-book, process-focused | | Reflection + close (5 min) | Self + peer reflection slip, final journal |</a:t>
-            </a:r>
-            <a:endParaRPr lang="en-US" sz="1300" dirty="0"/>
-          </a:p>
-        </p:txBody>
-      </p:sp>
-      <p:sp>
-        <p:nvSpPr>
-          <p:cNvPr id="9" name="Text 7"/>
-          <p:cNvSpPr/>
-          <p:nvPr/>
-        </p:nvSpPr>
-        <p:spPr>
-          <a:xfrm>
-            <a:off x="692051" y="2343299"/>
-            <a:ext cx="7973389" cy="461963"/>
-          </a:xfrm>
-          <a:prstGeom prst="rect">
-            <a:avLst/>
-          </a:prstGeom>
-          <a:noFill/>
-          <a:ln/>
-        </p:spPr>
-        <p:txBody>
-          <a:bodyPr wrap="square" lIns="0" tIns="0" rIns="0" bIns="0" rtlCol="0" anchor="t"/>
-          <a:lstStyle/>
-          <a:p>
-            <a:pPr algn="l" indent="0" marL="0">
-              <a:lnSpc>
-                <a:spcPts val="1820"/>
-              </a:lnSpc>
-              <a:spcBef>
-                <a:spcPts val="300"/>
-              </a:spcBef>
-              <a:spcAft>
-                <a:spcPts val="300"/>
-              </a:spcAft>
-              <a:buNone/>
-            </a:pPr>
-            <a:r>
-              <a:rPr lang="en-US" sz="1300" b="1" i="1" dirty="0">
-                <a:solidFill>
-                  <a:srgbClr val="1C2833"/>
-                </a:solidFill>
-                <a:latin typeface="Georgia" pitchFamily="34" charset="0"/>
-                <a:ea typeface="Georgia" pitchFamily="34" charset="-122"/>
-                <a:cs typeface="Georgia" pitchFamily="34" charset="-120"/>
-              </a:rPr>
-              <a:t>The audience includes peers and a few invited parents and staff.</a:t>
-            </a:r>
-            <a:pPr algn="l" indent="0" marL="0">
-              <a:lnSpc>
-                <a:spcPts val="1820"/>
-              </a:lnSpc>
-              <a:spcBef>
-                <a:spcPts val="300"/>
-              </a:spcBef>
-              <a:spcAft>
-                <a:spcPts val="300"/>
-              </a:spcAft>
-              <a:buNone/>
-            </a:pPr>
-            <a:r>
-              <a:rPr lang="en-US" sz="1300" dirty="0">
-                <a:solidFill>
-                  <a:srgbClr val="1C2833"/>
-                </a:solidFill>
-                <a:latin typeface="Georgia" pitchFamily="34" charset="0"/>
-                <a:ea typeface="Georgia" pitchFamily="34" charset="-122"/>
-                <a:cs typeface="Georgia" pitchFamily="34" charset="-120"/>
-              </a:rPr>
-              <a:t> Speak to all of them, not just your teacher.</a:t>
-            </a:r>
-            <a:endParaRPr lang="en-US" sz="1300" dirty="0"/>
-          </a:p>
-        </p:txBody>
-      </p:sp>
-      <p:sp>
-        <p:nvSpPr>
-          <p:cNvPr id="10" name="Text 8"/>
-          <p:cNvSpPr/>
-          <p:nvPr/>
-        </p:nvSpPr>
-        <p:spPr>
-          <a:xfrm>
-            <a:off x="692051" y="2843361"/>
-            <a:ext cx="7973389" cy="692944"/>
-          </a:xfrm>
-          <a:prstGeom prst="rect">
-            <a:avLst/>
-          </a:prstGeom>
-          <a:noFill/>
-          <a:ln/>
-        </p:spPr>
-        <p:txBody>
-          <a:bodyPr wrap="square" lIns="0" tIns="0" rIns="0" bIns="0" rtlCol="0" anchor="t"/>
-          <a:lstStyle/>
-          <a:p>
-            <a:pPr algn="l" indent="0" marL="0">
-              <a:lnSpc>
-                <a:spcPts val="1820"/>
-              </a:lnSpc>
-              <a:spcBef>
-                <a:spcPts val="300"/>
-              </a:spcBef>
-              <a:spcAft>
-                <a:spcPts val="300"/>
-              </a:spcAft>
-              <a:buNone/>
-            </a:pPr>
-            <a:r>
-              <a:rPr lang="en-US" sz="1300" b="1" i="1" dirty="0">
-                <a:solidFill>
-                  <a:srgbClr val="1C2833"/>
-                </a:solidFill>
-                <a:latin typeface="Georgia" pitchFamily="34" charset="0"/>
-                <a:ea typeface="Georgia" pitchFamily="34" charset="-122"/>
-                <a:cs typeface="Georgia" pitchFamily="34" charset="-120"/>
-              </a:rPr>
-              <a:t>Three things to remember:</a:t>
-            </a:r>
-            <a:pPr algn="l" indent="0" marL="0">
-              <a:lnSpc>
-                <a:spcPts val="1820"/>
-              </a:lnSpc>
-              <a:spcBef>
-                <a:spcPts val="300"/>
-              </a:spcBef>
-              <a:spcAft>
-                <a:spcPts val="300"/>
-              </a:spcAft>
-              <a:buNone/>
-            </a:pPr>
-            <a:r>
-              <a:rPr lang="en-US" sz="1300" dirty="0">
-                <a:solidFill>
-                  <a:srgbClr val="1C2833"/>
-                </a:solidFill>
-                <a:latin typeface="Georgia" pitchFamily="34" charset="0"/>
-                <a:ea typeface="Georgia" pitchFamily="34" charset="-122"/>
-                <a:cs typeface="Georgia" pitchFamily="34" charset="-120"/>
-              </a:rPr>
-              <a:t> 1. Show the artefact early. Don't leave it as a reveal. 2. End with the reflection — one thing that worked, one that didn't. 3. If a question stumps you in Q&amp;A, say </a:t>
-            </a:r>
-            <a:pPr algn="l" indent="0" marL="0">
-              <a:lnSpc>
-                <a:spcPts val="1820"/>
-              </a:lnSpc>
-              <a:spcBef>
-                <a:spcPts val="300"/>
-              </a:spcBef>
-              <a:spcAft>
-                <a:spcPts val="300"/>
-              </a:spcAft>
-              <a:buNone/>
-            </a:pPr>
-            <a:r>
-              <a:rPr lang="en-US" sz="1300" i="1" dirty="0">
-                <a:solidFill>
-                  <a:srgbClr val="1C2833"/>
-                </a:solidFill>
-                <a:latin typeface="Georgia" pitchFamily="34" charset="0"/>
-                <a:ea typeface="Georgia" pitchFamily="34" charset="-122"/>
-                <a:cs typeface="Georgia" pitchFamily="34" charset="-120"/>
-              </a:rPr>
-              <a:t>"I don't know, but here's what I'd check…"</a:t>
-            </a:r>
-            <a:endParaRPr lang="en-US" sz="1300" dirty="0"/>
-          </a:p>
-        </p:txBody>
-      </p:sp>
-      <p:sp>
-        <p:nvSpPr>
-          <p:cNvPr id="11" name="Text 9"/>
+              <a:rPr lang="en-US" sz="1200" dirty="0">
+                <a:solidFill>
+                  <a:srgbClr val="1C2833"/>
+                </a:solidFill>
+                <a:latin typeface="Arial" pitchFamily="34" charset="0"/>
+                <a:ea typeface="Arial" pitchFamily="34" charset="-122"/>
+                <a:cs typeface="Arial" pitchFamily="34" charset="-120"/>
+              </a:rPr>
+              <a:t>The teacher marks each share in real time on the rubric. Notes only, no reactions.</a:t>
+            </a:r>
+            <a:endParaRPr lang="en-US" sz="1200" dirty="0"/>
+          </a:p>
+        </p:txBody>
+      </p:sp>
+      <p:sp>
+        <p:nvSpPr>
+          <p:cNvPr id="5" name="Text 3"/>
           <p:cNvSpPr/>
           <p:nvPr/>
         </p:nvSpPr>
@@ -6201,7 +7996,7 @@
                 <a:ea typeface="Georgia" pitchFamily="34" charset="-122"/>
                 <a:cs typeface="Georgia" pitchFamily="34" charset="-120"/>
               </a:rPr>
-              <a:t>Self + Peer Reflection Slip (template)</a:t>
+              <a:t>Summative quiz (15 min)</a:t>
             </a:r>
             <a:endParaRPr lang="en-US" sz="1800" dirty="0"/>
           </a:p>
@@ -6215,732 +8010,197 @@
         </p:nvSpPr>
         <p:spPr>
           <a:xfrm>
-            <a:off x="406301" y="883593"/>
-            <a:ext cx="8331398" cy="4443710"/>
-          </a:xfrm>
-          <a:prstGeom prst="rect">
-            <a:avLst/>
-          </a:prstGeom>
-          <a:solidFill>
-            <a:srgbClr val="F4F8F9"/>
-          </a:solidFill>
-          <a:ln/>
-        </p:spPr>
-        <p:txBody>
-          <a:bodyPr wrap="square" rtlCol="0" anchor="ctr"/>
-          <a:lstStyle/>
-          <a:p>
-            <a:pPr indent="0" marL="0">
-              <a:buNone/>
-            </a:pPr>
-            <a:endParaRPr lang="en-US" dirty="0"/>
-          </a:p>
-        </p:txBody>
-      </p:sp>
-      <p:sp>
-        <p:nvSpPr>
-          <p:cNvPr id="5" name="Shape 3"/>
-          <p:cNvSpPr/>
-          <p:nvPr/>
-        </p:nvSpPr>
-        <p:spPr>
-          <a:xfrm>
-            <a:off x="430113" y="883593"/>
-            <a:ext cx="0" cy="4443710"/>
-          </a:xfrm>
-          <a:prstGeom prst="line">
+            <a:off x="634901" y="883593"/>
+            <a:ext cx="8102798" cy="956072"/>
+          </a:xfrm>
+          <a:prstGeom prst="rect">
             <a:avLst/>
           </a:prstGeom>
           <a:noFill/>
-          <a:ln w="47625">
-            <a:solidFill>
-              <a:srgbClr val="277884"/>
-            </a:solidFill>
-            <a:prstDash val="solid"/>
-          </a:ln>
-        </p:spPr>
-      </p:sp>
-      <p:sp>
-        <p:nvSpPr>
-          <p:cNvPr id="6" name="Text 4"/>
-          <p:cNvSpPr/>
-          <p:nvPr/>
-        </p:nvSpPr>
-        <p:spPr>
-          <a:xfrm>
-            <a:off x="631627" y="1010543"/>
-            <a:ext cx="8086939" cy="174575"/>
-          </a:xfrm>
-          <a:prstGeom prst="rect">
-            <a:avLst/>
-          </a:prstGeom>
-          <a:noFill/>
           <a:ln/>
         </p:spPr>
         <p:txBody>
           <a:bodyPr wrap="square" lIns="0" tIns="0" rIns="0" bIns="0" rtlCol="0" anchor="t"/>
           <a:lstStyle/>
           <a:p>
-            <a:pPr algn="l" indent="0" marL="0">
-              <a:lnSpc>
-                <a:spcPts val="1375"/>
-              </a:lnSpc>
-              <a:buNone/>
-            </a:pPr>
-            <a:r>
-              <a:rPr lang="en-US" sz="1100" dirty="0">
-                <a:solidFill>
-                  <a:srgbClr val="1C2833"/>
-                </a:solidFill>
-                <a:latin typeface="Courier New" pitchFamily="34" charset="0"/>
-                <a:ea typeface="Courier New" pitchFamily="34" charset="-122"/>
-                <a:cs typeface="Courier New" pitchFamily="34" charset="-120"/>
-              </a:rPr>
-              <a:t>SELF + PEER REFLECTION — Module 15</a:t>
-            </a:r>
-            <a:endParaRPr lang="en-US" sz="1100" dirty="0"/>
-          </a:p>
-        </p:txBody>
-      </p:sp>
-      <p:sp>
-        <p:nvSpPr>
-          <p:cNvPr id="7" name="Text 5"/>
-          <p:cNvSpPr/>
-          <p:nvPr/>
-        </p:nvSpPr>
-        <p:spPr>
-          <a:xfrm>
-            <a:off x="631627" y="1359694"/>
-            <a:ext cx="8086939" cy="174575"/>
-          </a:xfrm>
-          <a:prstGeom prst="rect">
-            <a:avLst/>
-          </a:prstGeom>
-          <a:noFill/>
-          <a:ln/>
-        </p:spPr>
-        <p:txBody>
-          <a:bodyPr wrap="square" lIns="0" tIns="0" rIns="0" bIns="0" rtlCol="0" anchor="t"/>
-          <a:lstStyle/>
-          <a:p>
-            <a:pPr algn="l" indent="0" marL="0">
-              <a:lnSpc>
-                <a:spcPts val="1375"/>
-              </a:lnSpc>
-              <a:buNone/>
-            </a:pPr>
-            <a:r>
-              <a:rPr lang="en-US" sz="1100" dirty="0">
-                <a:solidFill>
-                  <a:srgbClr val="1C2833"/>
-                </a:solidFill>
-                <a:latin typeface="Courier New" pitchFamily="34" charset="0"/>
-                <a:ea typeface="Courier New" pitchFamily="34" charset="-122"/>
-                <a:cs typeface="Courier New" pitchFamily="34" charset="-120"/>
-              </a:rPr>
-              <a:t>Name: _________________________</a:t>
-            </a:r>
-            <a:endParaRPr lang="en-US" sz="1100" dirty="0"/>
-          </a:p>
-        </p:txBody>
-      </p:sp>
-      <p:sp>
-        <p:nvSpPr>
-          <p:cNvPr id="8" name="Text 6"/>
-          <p:cNvSpPr/>
-          <p:nvPr/>
-        </p:nvSpPr>
-        <p:spPr>
-          <a:xfrm>
-            <a:off x="631627" y="1708845"/>
-            <a:ext cx="8086939" cy="174575"/>
-          </a:xfrm>
-          <a:prstGeom prst="rect">
-            <a:avLst/>
-          </a:prstGeom>
-          <a:noFill/>
-          <a:ln/>
-        </p:spPr>
-        <p:txBody>
-          <a:bodyPr wrap="square" lIns="0" tIns="0" rIns="0" bIns="0" rtlCol="0" anchor="t"/>
-          <a:lstStyle/>
-          <a:p>
-            <a:pPr algn="l" indent="0" marL="0">
-              <a:lnSpc>
-                <a:spcPts val="1375"/>
-              </a:lnSpc>
-              <a:buNone/>
-            </a:pPr>
-            <a:r>
-              <a:rPr lang="en-US" sz="1100" dirty="0">
-                <a:solidFill>
-                  <a:srgbClr val="1C2833"/>
-                </a:solidFill>
-                <a:latin typeface="Courier New" pitchFamily="34" charset="0"/>
-                <a:ea typeface="Courier New" pitchFamily="34" charset="-122"/>
-                <a:cs typeface="Courier New" pitchFamily="34" charset="-120"/>
-              </a:rPr>
-              <a:t>PART A — MY OWN PROJECT (self-mark out of 4 on each, with one-line reason)</a:t>
-            </a:r>
-            <a:endParaRPr lang="en-US" sz="1100" dirty="0"/>
-          </a:p>
-        </p:txBody>
-      </p:sp>
-      <p:sp>
-        <p:nvSpPr>
-          <p:cNvPr id="9" name="Text 7"/>
-          <p:cNvSpPr/>
-          <p:nvPr/>
-        </p:nvSpPr>
-        <p:spPr>
-          <a:xfrm>
-            <a:off x="631627" y="2057995"/>
-            <a:ext cx="8086939" cy="174575"/>
-          </a:xfrm>
-          <a:prstGeom prst="rect">
-            <a:avLst/>
-          </a:prstGeom>
-          <a:noFill/>
-          <a:ln/>
-        </p:spPr>
-        <p:txBody>
-          <a:bodyPr wrap="square" lIns="0" tIns="0" rIns="0" bIns="0" rtlCol="0" anchor="t"/>
-          <a:lstStyle/>
-          <a:p>
-            <a:pPr algn="l" indent="0" marL="0">
-              <a:lnSpc>
-                <a:spcPts val="1375"/>
-              </a:lnSpc>
-              <a:buNone/>
-            </a:pPr>
-            <a:r>
-              <a:rPr lang="en-US" sz="1100" dirty="0">
-                <a:solidFill>
-                  <a:srgbClr val="1C2833"/>
-                </a:solidFill>
-                <a:latin typeface="Courier New" pitchFamily="34" charset="0"/>
-                <a:ea typeface="Courier New" pitchFamily="34" charset="-122"/>
-                <a:cs typeface="Courier New" pitchFamily="34" charset="-120"/>
-              </a:rPr>
-              <a:t>a) Conceptual accuracy:  4 / 3 / 2 / 1   Reason: ____________</a:t>
-            </a:r>
-            <a:endParaRPr lang="en-US" sz="1100" dirty="0"/>
-          </a:p>
-        </p:txBody>
-      </p:sp>
-      <p:sp>
-        <p:nvSpPr>
-          <p:cNvPr id="10" name="Text 8"/>
-          <p:cNvSpPr/>
-          <p:nvPr/>
-        </p:nvSpPr>
-        <p:spPr>
-          <a:xfrm>
-            <a:off x="631627" y="2232571"/>
-            <a:ext cx="8086939" cy="174575"/>
-          </a:xfrm>
-          <a:prstGeom prst="rect">
-            <a:avLst/>
-          </a:prstGeom>
-          <a:noFill/>
-          <a:ln/>
-        </p:spPr>
-        <p:txBody>
-          <a:bodyPr wrap="square" lIns="0" tIns="0" rIns="0" bIns="0" rtlCol="0" anchor="t"/>
-          <a:lstStyle/>
-          <a:p>
-            <a:pPr algn="l" indent="0" marL="0">
-              <a:lnSpc>
-                <a:spcPts val="1375"/>
-              </a:lnSpc>
-              <a:buNone/>
-            </a:pPr>
-            <a:r>
-              <a:rPr lang="en-US" sz="1100" dirty="0">
-                <a:solidFill>
-                  <a:srgbClr val="1C2833"/>
-                </a:solidFill>
-                <a:latin typeface="Courier New" pitchFamily="34" charset="0"/>
-                <a:ea typeface="Courier New" pitchFamily="34" charset="-122"/>
-                <a:cs typeface="Courier New" pitchFamily="34" charset="-120"/>
-              </a:rPr>
-              <a:t>b) Use of sources:        4 / 3 / 2 / 1   Reason: ____________</a:t>
-            </a:r>
-            <a:endParaRPr lang="en-US" sz="1100" dirty="0"/>
-          </a:p>
-        </p:txBody>
-      </p:sp>
-      <p:sp>
-        <p:nvSpPr>
-          <p:cNvPr id="11" name="Text 9"/>
-          <p:cNvSpPr/>
-          <p:nvPr/>
-        </p:nvSpPr>
-        <p:spPr>
-          <a:xfrm>
-            <a:off x="631627" y="2407146"/>
-            <a:ext cx="8086939" cy="174575"/>
-          </a:xfrm>
-          <a:prstGeom prst="rect">
-            <a:avLst/>
-          </a:prstGeom>
-          <a:noFill/>
-          <a:ln/>
-        </p:spPr>
-        <p:txBody>
-          <a:bodyPr wrap="square" lIns="0" tIns="0" rIns="0" bIns="0" rtlCol="0" anchor="t"/>
-          <a:lstStyle/>
-          <a:p>
-            <a:pPr algn="l" indent="0" marL="0">
-              <a:lnSpc>
-                <a:spcPts val="1375"/>
-              </a:lnSpc>
-              <a:buNone/>
-            </a:pPr>
-            <a:r>
-              <a:rPr lang="en-US" sz="1100" dirty="0">
-                <a:solidFill>
-                  <a:srgbClr val="1C2833"/>
-                </a:solidFill>
-                <a:latin typeface="Courier New" pitchFamily="34" charset="0"/>
-                <a:ea typeface="Courier New" pitchFamily="34" charset="-122"/>
-                <a:cs typeface="Courier New" pitchFamily="34" charset="-120"/>
-              </a:rPr>
-              <a:t>c) Process documentation: 4 / 3 / 2 / 1   Reason: ____________</a:t>
-            </a:r>
-            <a:endParaRPr lang="en-US" sz="1100" dirty="0"/>
-          </a:p>
-        </p:txBody>
-      </p:sp>
-      <p:sp>
-        <p:nvSpPr>
-          <p:cNvPr id="12" name="Text 10"/>
-          <p:cNvSpPr/>
-          <p:nvPr/>
-        </p:nvSpPr>
-        <p:spPr>
-          <a:xfrm>
-            <a:off x="631627" y="2581721"/>
-            <a:ext cx="8086939" cy="174575"/>
-          </a:xfrm>
-          <a:prstGeom prst="rect">
-            <a:avLst/>
-          </a:prstGeom>
-          <a:noFill/>
-          <a:ln/>
-        </p:spPr>
-        <p:txBody>
-          <a:bodyPr wrap="square" lIns="0" tIns="0" rIns="0" bIns="0" rtlCol="0" anchor="t"/>
-          <a:lstStyle/>
-          <a:p>
-            <a:pPr algn="l" indent="0" marL="0">
-              <a:lnSpc>
-                <a:spcPts val="1375"/>
-              </a:lnSpc>
-              <a:buNone/>
-            </a:pPr>
-            <a:r>
-              <a:rPr lang="en-US" sz="1100" dirty="0">
-                <a:solidFill>
-                  <a:srgbClr val="1C2833"/>
-                </a:solidFill>
-                <a:latin typeface="Courier New" pitchFamily="34" charset="0"/>
-                <a:ea typeface="Courier New" pitchFamily="34" charset="-122"/>
-                <a:cs typeface="Courier New" pitchFamily="34" charset="-120"/>
-              </a:rPr>
-              <a:t>d) Artefact quality:      4 / 3 / 2 / 1   Reason: ____________</a:t>
-            </a:r>
-            <a:endParaRPr lang="en-US" sz="1100" dirty="0"/>
-          </a:p>
-        </p:txBody>
-      </p:sp>
-      <p:sp>
-        <p:nvSpPr>
-          <p:cNvPr id="13" name="Text 11"/>
-          <p:cNvSpPr/>
-          <p:nvPr/>
-        </p:nvSpPr>
-        <p:spPr>
-          <a:xfrm>
-            <a:off x="631627" y="2756297"/>
-            <a:ext cx="8086939" cy="174575"/>
-          </a:xfrm>
-          <a:prstGeom prst="rect">
-            <a:avLst/>
-          </a:prstGeom>
-          <a:noFill/>
-          <a:ln/>
-        </p:spPr>
-        <p:txBody>
-          <a:bodyPr wrap="square" lIns="0" tIns="0" rIns="0" bIns="0" rtlCol="0" anchor="t"/>
-          <a:lstStyle/>
-          <a:p>
-            <a:pPr algn="l" indent="0" marL="0">
-              <a:lnSpc>
-                <a:spcPts val="1375"/>
-              </a:lnSpc>
-              <a:buNone/>
-            </a:pPr>
-            <a:r>
-              <a:rPr lang="en-US" sz="1100" dirty="0">
-                <a:solidFill>
-                  <a:srgbClr val="1C2833"/>
-                </a:solidFill>
-                <a:latin typeface="Courier New" pitchFamily="34" charset="0"/>
-                <a:ea typeface="Courier New" pitchFamily="34" charset="-122"/>
-                <a:cs typeface="Courier New" pitchFamily="34" charset="-120"/>
-              </a:rPr>
-              <a:t>e) Honest reflection:     4 / 3 / 2 / 1   Reason: ____________</a:t>
-            </a:r>
-            <a:endParaRPr lang="en-US" sz="1100" dirty="0"/>
-          </a:p>
-        </p:txBody>
-      </p:sp>
-      <p:sp>
-        <p:nvSpPr>
-          <p:cNvPr id="14" name="Text 12"/>
-          <p:cNvSpPr/>
-          <p:nvPr/>
-        </p:nvSpPr>
-        <p:spPr>
-          <a:xfrm>
-            <a:off x="631627" y="3105448"/>
-            <a:ext cx="8086939" cy="174575"/>
-          </a:xfrm>
-          <a:prstGeom prst="rect">
-            <a:avLst/>
-          </a:prstGeom>
-          <a:noFill/>
-          <a:ln/>
-        </p:spPr>
-        <p:txBody>
-          <a:bodyPr wrap="square" lIns="0" tIns="0" rIns="0" bIns="0" rtlCol="0" anchor="t"/>
-          <a:lstStyle/>
-          <a:p>
-            <a:pPr algn="l" indent="0" marL="0">
-              <a:lnSpc>
-                <a:spcPts val="1375"/>
-              </a:lnSpc>
-              <a:buNone/>
-            </a:pPr>
-            <a:r>
-              <a:rPr lang="en-US" sz="1100" dirty="0">
-                <a:solidFill>
-                  <a:srgbClr val="1C2833"/>
-                </a:solidFill>
-                <a:latin typeface="Courier New" pitchFamily="34" charset="0"/>
-                <a:ea typeface="Courier New" pitchFamily="34" charset="-122"/>
-                <a:cs typeface="Courier New" pitchFamily="34" charset="-120"/>
-              </a:rPr>
-              <a:t>PART B — TWO PEER SHARES</a:t>
-            </a:r>
-            <a:endParaRPr lang="en-US" sz="1100" dirty="0"/>
-          </a:p>
-        </p:txBody>
-      </p:sp>
-      <p:sp>
-        <p:nvSpPr>
-          <p:cNvPr id="15" name="Text 13"/>
-          <p:cNvSpPr/>
-          <p:nvPr/>
-        </p:nvSpPr>
-        <p:spPr>
-          <a:xfrm>
-            <a:off x="631627" y="3454598"/>
-            <a:ext cx="8086939" cy="174575"/>
-          </a:xfrm>
-          <a:prstGeom prst="rect">
-            <a:avLst/>
-          </a:prstGeom>
-          <a:noFill/>
-          <a:ln/>
-        </p:spPr>
-        <p:txBody>
-          <a:bodyPr wrap="square" lIns="0" tIns="0" rIns="0" bIns="0" rtlCol="0" anchor="t"/>
-          <a:lstStyle/>
-          <a:p>
-            <a:pPr algn="l" indent="0" marL="0">
-              <a:lnSpc>
-                <a:spcPts val="1375"/>
-              </a:lnSpc>
-              <a:buNone/>
-            </a:pPr>
-            <a:r>
-              <a:rPr lang="en-US" sz="1100" dirty="0">
-                <a:solidFill>
-                  <a:srgbClr val="1C2833"/>
-                </a:solidFill>
-                <a:latin typeface="Courier New" pitchFamily="34" charset="0"/>
-                <a:ea typeface="Courier New" pitchFamily="34" charset="-122"/>
-                <a:cs typeface="Courier New" pitchFamily="34" charset="-120"/>
-              </a:rPr>
-              <a:t>Peer 1: _______________  One thing I learned: ____________</a:t>
-            </a:r>
-            <a:endParaRPr lang="en-US" sz="1100" dirty="0"/>
-          </a:p>
-        </p:txBody>
-      </p:sp>
-      <p:sp>
-        <p:nvSpPr>
-          <p:cNvPr id="16" name="Text 14"/>
-          <p:cNvSpPr/>
-          <p:nvPr/>
-        </p:nvSpPr>
-        <p:spPr>
-          <a:xfrm>
-            <a:off x="631627" y="3629174"/>
-            <a:ext cx="8086939" cy="174575"/>
-          </a:xfrm>
-          <a:prstGeom prst="rect">
-            <a:avLst/>
-          </a:prstGeom>
-          <a:noFill/>
-          <a:ln/>
-        </p:spPr>
-        <p:txBody>
-          <a:bodyPr wrap="square" lIns="0" tIns="0" rIns="0" bIns="0" rtlCol="0" anchor="t"/>
-          <a:lstStyle/>
-          <a:p>
-            <a:pPr algn="l" indent="0" marL="0">
-              <a:lnSpc>
-                <a:spcPts val="1375"/>
-              </a:lnSpc>
-              <a:buNone/>
-            </a:pPr>
-            <a:r>
-              <a:rPr lang="en-US" sz="1100" dirty="0">
-                <a:solidFill>
-                  <a:srgbClr val="1C2833"/>
-                </a:solidFill>
-                <a:latin typeface="Courier New" pitchFamily="34" charset="0"/>
-                <a:ea typeface="Courier New" pitchFamily="34" charset="-122"/>
-                <a:cs typeface="Courier New" pitchFamily="34" charset="-120"/>
-              </a:rPr>
-              <a:t>Peer 2: _______________  One thing I learned: ____________</a:t>
-            </a:r>
-            <a:endParaRPr lang="en-US" sz="1100" dirty="0"/>
-          </a:p>
-        </p:txBody>
-      </p:sp>
-      <p:sp>
-        <p:nvSpPr>
-          <p:cNvPr id="17" name="Text 15"/>
-          <p:cNvSpPr/>
-          <p:nvPr/>
-        </p:nvSpPr>
-        <p:spPr>
-          <a:xfrm>
-            <a:off x="631627" y="3978325"/>
-            <a:ext cx="8086939" cy="174575"/>
-          </a:xfrm>
-          <a:prstGeom prst="rect">
-            <a:avLst/>
-          </a:prstGeom>
-          <a:noFill/>
-          <a:ln/>
-        </p:spPr>
-        <p:txBody>
-          <a:bodyPr wrap="square" lIns="0" tIns="0" rIns="0" bIns="0" rtlCol="0" anchor="t"/>
-          <a:lstStyle/>
-          <a:p>
-            <a:pPr algn="l" indent="0" marL="0">
-              <a:lnSpc>
-                <a:spcPts val="1375"/>
-              </a:lnSpc>
-              <a:buNone/>
-            </a:pPr>
-            <a:r>
-              <a:rPr lang="en-US" sz="1100" dirty="0">
-                <a:solidFill>
-                  <a:srgbClr val="1C2833"/>
-                </a:solidFill>
-                <a:latin typeface="Courier New" pitchFamily="34" charset="0"/>
-                <a:ea typeface="Courier New" pitchFamily="34" charset="-122"/>
-                <a:cs typeface="Courier New" pitchFamily="34" charset="-120"/>
-              </a:rPr>
-              <a:t>PART C — ONE QUESTION I'M LEAVING WITH</a:t>
-            </a:r>
-            <a:endParaRPr lang="en-US" sz="1100" dirty="0"/>
-          </a:p>
-        </p:txBody>
-      </p:sp>
-      <p:sp>
-        <p:nvSpPr>
-          <p:cNvPr id="18" name="Text 16"/>
-          <p:cNvSpPr/>
-          <p:nvPr/>
-        </p:nvSpPr>
-        <p:spPr>
-          <a:xfrm>
-            <a:off x="631627" y="4327475"/>
-            <a:ext cx="8086939" cy="174575"/>
-          </a:xfrm>
-          <a:prstGeom prst="rect">
-            <a:avLst/>
-          </a:prstGeom>
-          <a:noFill/>
-          <a:ln/>
-        </p:spPr>
-        <p:txBody>
-          <a:bodyPr wrap="square" lIns="0" tIns="0" rIns="0" bIns="0" rtlCol="0" anchor="t"/>
-          <a:lstStyle/>
-          <a:p>
-            <a:pPr algn="l" indent="0" marL="0">
-              <a:lnSpc>
-                <a:spcPts val="1375"/>
-              </a:lnSpc>
-              <a:buNone/>
-            </a:pPr>
-            <a:r>
-              <a:rPr lang="en-US" sz="1100" dirty="0">
-                <a:solidFill>
-                  <a:srgbClr val="1C2833"/>
-                </a:solidFill>
-                <a:latin typeface="Courier New" pitchFamily="34" charset="0"/>
-                <a:ea typeface="Courier New" pitchFamily="34" charset="-122"/>
-                <a:cs typeface="Courier New" pitchFamily="34" charset="-120"/>
-              </a:rPr>
-              <a:t>(Something you're still curious about, related to ANY framework</a:t>
-            </a:r>
-            <a:endParaRPr lang="en-US" sz="1100" dirty="0"/>
-          </a:p>
-        </p:txBody>
-      </p:sp>
-      <p:sp>
-        <p:nvSpPr>
-          <p:cNvPr id="19" name="Text 17"/>
-          <p:cNvSpPr/>
-          <p:nvPr/>
-        </p:nvSpPr>
-        <p:spPr>
-          <a:xfrm>
-            <a:off x="631627" y="4502051"/>
-            <a:ext cx="8086939" cy="174575"/>
-          </a:xfrm>
-          <a:prstGeom prst="rect">
-            <a:avLst/>
-          </a:prstGeom>
-          <a:noFill/>
-          <a:ln/>
-        </p:spPr>
-        <p:txBody>
-          <a:bodyPr wrap="square" lIns="0" tIns="0" rIns="0" bIns="0" rtlCol="0" anchor="t"/>
-          <a:lstStyle/>
-          <a:p>
-            <a:pPr algn="l" indent="0" marL="0">
-              <a:lnSpc>
-                <a:spcPts val="1375"/>
-              </a:lnSpc>
-              <a:buNone/>
-            </a:pPr>
-            <a:r>
-              <a:rPr lang="en-US" sz="1100" dirty="0">
-                <a:solidFill>
-                  <a:srgbClr val="1C2833"/>
-                </a:solidFill>
-                <a:latin typeface="Courier New" pitchFamily="34" charset="0"/>
-                <a:ea typeface="Courier New" pitchFamily="34" charset="-122"/>
-                <a:cs typeface="Courier New" pitchFamily="34" charset="-120"/>
-              </a:rPr>
-              <a:t>from any prior module that came up today):</a:t>
-            </a:r>
-            <a:endParaRPr lang="en-US" sz="1100" dirty="0"/>
-          </a:p>
-        </p:txBody>
-      </p:sp>
-      <p:sp>
-        <p:nvSpPr>
-          <p:cNvPr id="20" name="Text 18"/>
-          <p:cNvSpPr/>
-          <p:nvPr/>
-        </p:nvSpPr>
-        <p:spPr>
-          <a:xfrm>
-            <a:off x="631627" y="4851202"/>
-            <a:ext cx="8086939" cy="174575"/>
-          </a:xfrm>
-          <a:prstGeom prst="rect">
-            <a:avLst/>
-          </a:prstGeom>
-          <a:noFill/>
-          <a:ln/>
-        </p:spPr>
-        <p:txBody>
-          <a:bodyPr wrap="square" lIns="0" tIns="0" rIns="0" bIns="0" rtlCol="0" anchor="t"/>
-          <a:lstStyle/>
-          <a:p>
-            <a:pPr algn="l" indent="0" marL="0">
-              <a:lnSpc>
-                <a:spcPts val="1375"/>
-              </a:lnSpc>
-              <a:buNone/>
-            </a:pPr>
-            <a:r>
-              <a:rPr lang="en-US" sz="1100" dirty="0">
-                <a:solidFill>
-                  <a:srgbClr val="1C2833"/>
-                </a:solidFill>
-                <a:latin typeface="Courier New" pitchFamily="34" charset="0"/>
-                <a:ea typeface="Courier New" pitchFamily="34" charset="-122"/>
-                <a:cs typeface="Courier New" pitchFamily="34" charset="-120"/>
-              </a:rPr>
-              <a:t>____________________________________________________</a:t>
-            </a:r>
-            <a:endParaRPr lang="en-US" sz="1100" dirty="0"/>
-          </a:p>
-        </p:txBody>
-      </p:sp>
-      <p:sp>
-        <p:nvSpPr>
-          <p:cNvPr id="21" name="Text 19"/>
-          <p:cNvSpPr/>
-          <p:nvPr/>
-        </p:nvSpPr>
-        <p:spPr>
-          <a:xfrm>
-            <a:off x="631627" y="5025777"/>
-            <a:ext cx="8086939" cy="174575"/>
-          </a:xfrm>
-          <a:prstGeom prst="rect">
-            <a:avLst/>
-          </a:prstGeom>
-          <a:noFill/>
-          <a:ln/>
-        </p:spPr>
-        <p:txBody>
-          <a:bodyPr wrap="square" lIns="0" tIns="0" rIns="0" bIns="0" rtlCol="0" anchor="t"/>
-          <a:lstStyle/>
-          <a:p>
-            <a:pPr algn="l" indent="0" marL="0">
-              <a:lnSpc>
-                <a:spcPts val="1375"/>
-              </a:lnSpc>
-              <a:buNone/>
-            </a:pPr>
-            <a:r>
-              <a:rPr lang="en-US" sz="1100" dirty="0">
-                <a:solidFill>
-                  <a:srgbClr val="1C2833"/>
-                </a:solidFill>
-                <a:latin typeface="Courier New" pitchFamily="34" charset="0"/>
-                <a:ea typeface="Courier New" pitchFamily="34" charset="-122"/>
-                <a:cs typeface="Courier New" pitchFamily="34" charset="-120"/>
-              </a:rPr>
-              <a:t>____________________________________________________</a:t>
-            </a:r>
-            <a:endParaRPr lang="en-US" sz="1100" dirty="0"/>
-          </a:p>
-        </p:txBody>
-      </p:sp>
-      <p:sp>
-        <p:nvSpPr>
-          <p:cNvPr id="22" name="Text 20"/>
-          <p:cNvSpPr/>
-          <p:nvPr/>
-        </p:nvSpPr>
-        <p:spPr>
-          <a:xfrm>
-            <a:off x="406301" y="5492353"/>
+            <a:pPr algn="l" marL="342900" indent="-342900">
+              <a:lnSpc>
+                <a:spcPts val="1620"/>
+              </a:lnSpc>
+              <a:spcAft>
+                <a:spcPts val="300"/>
+              </a:spcAft>
+              <a:buSzPct val="100000"/>
+              <a:buChar char="•"/>
+            </a:pPr>
+            <a:r>
+              <a:rPr lang="en-US" sz="1200" dirty="0">
+                <a:solidFill>
+                  <a:srgbClr val="1C2833"/>
+                </a:solidFill>
+                <a:latin typeface="Arial" pitchFamily="34" charset="0"/>
+                <a:ea typeface="Arial" pitchFamily="34" charset="-122"/>
+                <a:cs typeface="Arial" pitchFamily="34" charset="-120"/>
+              </a:rPr>
+              <a:t>After all shares are done — or, if the share day is extended, immediately after the share block — students sit and complete the summative quiz (</a:t>
+            </a:r>
+            <a:pPr algn="l" indent="0" marL="0">
+              <a:lnSpc>
+                <a:spcPts val="1620"/>
+              </a:lnSpc>
+              <a:spcAft>
+                <a:spcPts val="300"/>
+              </a:spcAft>
+              <a:buNone/>
+            </a:pPr>
+            <a:r>
+              <a:rPr lang="en-US" sz="1200" dirty="0">
+                <a:solidFill>
+                  <a:srgbClr val="1C2833"/>
+                </a:solidFill>
+                <a:latin typeface="Arial" pitchFamily="34" charset="0"/>
+                <a:ea typeface="Arial" pitchFamily="34" charset="-122"/>
+                <a:cs typeface="Arial" pitchFamily="34" charset="-120"/>
+              </a:rPr>
+              <a:t>quizzes/summative.md</a:t>
+            </a:r>
+            <a:pPr algn="l" indent="0" marL="0">
+              <a:lnSpc>
+                <a:spcPts val="1620"/>
+              </a:lnSpc>
+              <a:spcAft>
+                <a:spcPts val="300"/>
+              </a:spcAft>
+              <a:buNone/>
+            </a:pPr>
+            <a:r>
+              <a:rPr lang="en-US" sz="1200" dirty="0">
+                <a:solidFill>
+                  <a:srgbClr val="1C2833"/>
+                </a:solidFill>
+                <a:latin typeface="Arial" pitchFamily="34" charset="0"/>
+                <a:ea typeface="Arial" pitchFamily="34" charset="-122"/>
+                <a:cs typeface="Arial" pitchFamily="34" charset="-120"/>
+              </a:rPr>
+              <a:t>). 15 minutes, closed book, no notes.</a:t>
+            </a:r>
+            <a:endParaRPr lang="en-US" sz="1200" dirty="0"/>
+          </a:p>
+          <a:p>
+            <a:pPr algn="l" marL="342900" indent="-342900">
+              <a:lnSpc>
+                <a:spcPts val="1620"/>
+              </a:lnSpc>
+              <a:spcAft>
+                <a:spcPts val="300"/>
+              </a:spcAft>
+              <a:buSzPct val="100000"/>
+              <a:buChar char="•"/>
+            </a:pPr>
+            <a:r>
+              <a:rPr lang="en-US" sz="1200" dirty="0">
+                <a:solidFill>
+                  <a:srgbClr val="1C2833"/>
+                </a:solidFill>
+                <a:latin typeface="Arial" pitchFamily="34" charset="0"/>
+                <a:ea typeface="Arial" pitchFamily="34" charset="-122"/>
+                <a:cs typeface="Arial" pitchFamily="34" charset="-120"/>
+              </a:rPr>
+              <a:t>The quiz is short and focused on the </a:t>
+            </a:r>
+            <a:pPr algn="l" indent="0" marL="0">
+              <a:lnSpc>
+                <a:spcPts val="1620"/>
+              </a:lnSpc>
+              <a:spcAft>
+                <a:spcPts val="300"/>
+              </a:spcAft>
+              <a:buNone/>
+            </a:pPr>
+            <a:r>
+              <a:rPr lang="en-US" sz="1200" i="1" dirty="0">
+                <a:solidFill>
+                  <a:srgbClr val="1C2833"/>
+                </a:solidFill>
+                <a:latin typeface="Arial" pitchFamily="34" charset="0"/>
+                <a:ea typeface="Arial" pitchFamily="34" charset="-122"/>
+                <a:cs typeface="Arial" pitchFamily="34" charset="-120"/>
+              </a:rPr>
+              <a:t>process</a:t>
+            </a:r>
+            <a:pPr algn="l" indent="0" marL="0">
+              <a:lnSpc>
+                <a:spcPts val="1620"/>
+              </a:lnSpc>
+              <a:spcAft>
+                <a:spcPts val="300"/>
+              </a:spcAft>
+              <a:buNone/>
+            </a:pPr>
+            <a:r>
+              <a:rPr lang="en-US" sz="1200" dirty="0">
+                <a:solidFill>
+                  <a:srgbClr val="1C2833"/>
+                </a:solidFill>
+                <a:latin typeface="Arial" pitchFamily="34" charset="0"/>
+                <a:ea typeface="Arial" pitchFamily="34" charset="-122"/>
+                <a:cs typeface="Arial" pitchFamily="34" charset="-120"/>
+              </a:rPr>
+              <a:t> of the module — not on content. (E.g.: "Name the six phases of the project sprint." "What does the term </a:t>
+            </a:r>
+            <a:pPr algn="l" indent="0" marL="0">
+              <a:lnSpc>
+                <a:spcPts val="1620"/>
+              </a:lnSpc>
+              <a:spcAft>
+                <a:spcPts val="300"/>
+              </a:spcAft>
+              <a:buNone/>
+            </a:pPr>
+            <a:r>
+              <a:rPr lang="en-US" sz="1200" i="1" dirty="0">
+                <a:solidFill>
+                  <a:srgbClr val="1C2833"/>
+                </a:solidFill>
+                <a:latin typeface="Arial" pitchFamily="34" charset="0"/>
+                <a:ea typeface="Arial" pitchFamily="34" charset="-122"/>
+                <a:cs typeface="Arial" pitchFamily="34" charset="-120"/>
+              </a:rPr>
+              <a:t>abhyāsa</a:t>
+            </a:r>
+            <a:pPr algn="l" indent="0" marL="0">
+              <a:lnSpc>
+                <a:spcPts val="1620"/>
+              </a:lnSpc>
+              <a:spcAft>
+                <a:spcPts val="300"/>
+              </a:spcAft>
+              <a:buNone/>
+            </a:pPr>
+            <a:r>
+              <a:rPr lang="en-US" sz="1200" dirty="0">
+                <a:solidFill>
+                  <a:srgbClr val="1C2833"/>
+                </a:solidFill>
+                <a:latin typeface="Arial" pitchFamily="34" charset="0"/>
+                <a:ea typeface="Arial" pitchFamily="34" charset="-122"/>
+                <a:cs typeface="Arial" pitchFamily="34" charset="-120"/>
+              </a:rPr>
+              <a:t> refer to in this module?")</a:t>
+            </a:r>
+            <a:endParaRPr lang="en-US" sz="1200" dirty="0"/>
+          </a:p>
+        </p:txBody>
+      </p:sp>
+      <p:sp>
+        <p:nvSpPr>
+          <p:cNvPr id="5" name="Text 3"/>
+          <p:cNvSpPr/>
+          <p:nvPr/>
+        </p:nvSpPr>
+        <p:spPr>
+          <a:xfrm>
+            <a:off x="406301" y="4434929"/>
             <a:ext cx="8498026" cy="213271"/>
           </a:xfrm>
           <a:prstGeom prst="rect">
